--- a/slides/HROC_Team_Presentation.pptx
+++ b/slides/HROC_Team_Presentation.pptx
@@ -799,7 +799,7 @@
           <a:p>
             <a:r>
               <a:rPr lang="en-US" dirty="0"/>
-              <a:t>Training details. Six hundred thousand trials pooled across five animals, twelve passes, about four minutes on a laptop GPU — these are small models. Reconstruction error halves and flattens. The trap we had to avoid: if you pool animals naively, the model learns to tell the animals apart, because they have different electrodes and different amplitudes. That's a recording artefact wearing a biology costume. So we standardise each animal separately before pooling. And the reason we train one model across all animals rather than one each: separate models would describe each brain in its own private vocabulary and you could never compare them. One shared model means a given pattern means the same thing in animal three as in animal eleven — which is what makes the group comparisons later legitimate.</a:t>
+              <a:t>Training details. Six hundred thousand trials pooled across five animals, twelve passes, about four minutes on a laptop GPU — these are small models. Reconstruction error halves and flattens. The trap we had to avoid: if you pool animals naively, the model learns to tell the animals apart, because they have different electrodes and different amplitudes. That's a recording artefact, not biology. So we standardise each animal separately before pooling. And the reason we train one model across all animals rather than one each: separate models would describe each brain in its own private vocabulary and you could never compare them. One shared model means a given pattern means the same thing in animal three as in animal eleven — which is what makes the group comparisons later legitimate.</a:t>
             </a:r>
             <a:endParaRPr lang="en-US" dirty="0"/>
           </a:p>
@@ -1063,7 +1063,7 @@
           <a:p>
             <a:r>
               <a:rPr lang="en-US" dirty="0"/>
-              <a:t>This slide matters because getting it wrong cost us a result. A bigger shock makes a bigger reflex with no learning involved, and across these recordings the delivered stimulus roughly quadrupled. Early on that made one of our findings come out backwards. The fix is that the M-wave sits in the same trace and reflects only the stimulus, so it's a per-trial receipt. Dr Carp added the second one: the reflex also depends on how active the muscle already was, so we measure the twenty milliseconds before each shock. Every number from here on has both corrections applied.</a:t>
+              <a:t>This slide matters because getting it wrong cost us a result. Reflex size depends on two things besides learning: how strong the stimulus was — a stronger stimulus gives a bigger reflex — and how active the muscle already was. That is what Boulay and colleagues found: H-reflex size varied with M-wave size and background EMG as well as with cortical activity. And the stimulus is not constant: in one of our animals it nearly quintupled over the recording, and early on that made one of our findings come out backwards. The corrections: the M-wave in the same trace is a per-trial receipt for how much stimulus arrived, and the twenty milliseconds before each stimulus measures background muscle activity. We remove both from every measure. Every number from here on has both corrections applied.</a:t>
             </a:r>
             <a:endParaRPr lang="en-US" dirty="0"/>
           </a:p>
@@ -1327,7 +1327,7 @@
           <a:p>
             <a:r>
               <a:rPr lang="en-US" dirty="0"/>
-              <a:t>Our first approach was the obvious one: measure how far the average brain state moves across training. It does move, and it looked convincing. But three tests say that movement is the recording rather than the animal. If you take baseline-only data and pretend half of it was training, it moves just as much, in five of six animals. If you shuffle which trial belongs to which day, nothing moves — so the measure itself is fine. And electrode drift doesn't care which direction you trained the animal, and there's no difference between the up and down groups. Two of those three were Dr Carp's suggestions, and they changed our conclusion. I'd rather show you this than not.</a:t>
+              <a:t>Our first approach was the obvious one: measure how far the average brain state moves across training. It does move, and it looked convincing. But three tests say that movement is the recording rather than the animal. If you take baseline-only data and pretend half of it was training, it moves just as much, in five of six animals. If you shuffle which trial belongs to which day, nothing moves — so the measure itself is fine. And electrode drift doesn't care which direction you trained the animal, and there's no difference between the up and down groups. Those controls changed our conclusion. I'd rather show you this than not.</a:t>
             </a:r>
             <a:endParaRPr lang="en-US" dirty="0"/>
           </a:p>
@@ -1767,7 +1767,7 @@
           <a:p>
             <a:r>
               <a:rPr lang="en-US" dirty="0"/>
-              <a:t>Dr Carp asked us to split the variance up, and this is the answer. The stimulus dominates at forty-seven percent. Background is one. About half is still unexplained, which is normal for single-trial physiology. The brain on its own looks like twenty-one percent, but almost all of that overlaps with the stimulus, because the stimulus drives both the cortical response and the reflex. Only the part that survives once the other two are in the model — about two percent — counts as a genuine cortical contribution. That's a small number and I don't want to oversell it.</a:t>
+              <a:t>Here is how the variance in reflex size divides up. The stimulus dominates at forty-seven percent. Background is one. About half is still unexplained, which is normal for single-trial physiology. The brain on its own looks like twenty-one percent, but almost all of that overlaps with the stimulus, because the stimulus drives both the cortical response and the reflex. Only the part that survives once the other two are in the model — about two percent — counts as a genuine cortical contribution. That's a small number and I don't want to oversell it.</a:t>
             </a:r>
             <a:endParaRPr lang="en-US" dirty="0"/>
           </a:p>
@@ -1855,7 +1855,7 @@
           <a:p>
             <a:r>
               <a:rPr lang="en-US" dirty="0"/>
-              <a:t>This is everything on one slide. On the left, behaviour: every animal moved in the direction it was trained, three of them past the twenty percent line. In the middle, the prediction score against its shuffled control — real in blue, shuffled in grey — and the real bar is higher in every animal. On the right, how many five-day windows beat their own shuffle: nine of nine, fifteen of seventeen, and three animals at a hundred percent. Ninety-nine of a hundred and one overall.</a:t>
+              <a:t>This is everything on one slide. On the left, behaviour: three animals passed the twenty percent line in the trained direction; the other two moved against their training. In the middle, the prediction score against its shuffled control — real in blue, shuffled in grey — and the real bar is higher in every animal. On the right, how many five-day windows beat their own shuffle: nine of nine, fifteen of seventeen, and three animals at a hundred percent. Ninety-nine of a hundred and one overall.</a:t>
             </a:r>
             <a:endParaRPr lang="en-US" dirty="0"/>
           </a:p>
@@ -1943,7 +1943,7 @@
           <a:p>
             <a:r>
               <a:rPr lang="en-US" dirty="0"/>
-              <a:t>This is everything we tried to kill the result with. Five it survives, two it fails, and the two failures are what told us the average-state approach was the wrong question. Most of these were suggested by Dr Carp. If anyone here can think of something we haven't tried, that's genuinely the most useful thing I could take away from this meeting.</a:t>
+              <a:t>These are the controls we applied. Five it survives, two it fails, and the two failures are what told us the average-state approach was the wrong question. If anyone here can think of something we haven't tried, that's genuinely the most useful thing I could take away from this meeting.</a:t>
             </a:r>
             <a:endParaRPr lang="en-US" dirty="0"/>
           </a:p>
@@ -2031,7 +2031,7 @@
           <a:p>
             <a:r>
               <a:rPr lang="en-US" dirty="0"/>
-              <a:t>The obvious objection is that both channels are recorded simultaneously, so maybe the cortical electrode is just picking up muscle. Dr Carp suggested the test: correlate cortical power against muscle power and see how much they move together. Muscle artefact lives at high frequency, so that's where contamination would show. Above a hundred hertz the correlation is plus nought point nought six — essentially zero. The low bands are slightly negative. And the cortical signal marginally leads the muscle, which is the acceptable direction. So we don't think this is contamination, though I'd welcome a better test.</a:t>
+              <a:t>The obvious objection is that both channels are recorded simultaneously, so maybe the cortical electrode is just picking up muscle. The test is to correlate cortical power against muscle power and see how much they move together. Muscle artefact lives at high frequency, so that's where contamination would show. Above a hundred hertz the correlation is plus nought point nought six — essentially zero. The low bands are slightly negative. And the cortical signal marginally leads the muscle, which is the acceptable direction. So we don't think this is contamination, though I'd welcome a better test.</a:t>
             </a:r>
             <a:endParaRPr lang="en-US" dirty="0"/>
           </a:p>
@@ -2119,7 +2119,7 @@
           <a:p>
             <a:r>
               <a:rPr lang="en-US" dirty="0"/>
-              <a:t>This is the thread I think is most promising, and it was Dr Carp's suggestion. Animals differ in how much they learned, and two failed outright — those become a built-in negative control. The correlation between how much an animal learned and how much its cortical coupling changed is plus nought point seven one, and the two that failed show no increase. With five animals that's a direction rather than a result. Five more animals are downloaded and ready to process, and that's what would settle it.</a:t>
+              <a:t>This is the thread I think is most promising. Animals differ in how much they learned, and two failed outright — those become a built-in negative control. The correlation between how much an animal learned and how much its cortical coupling changed is plus nought point six four, and the two that failed show no increase. With five animals that's a direction rather than a result. Four more down-conditioned animals are next through the pipeline, and that is what would help settle it.</a:t>
             </a:r>
             <a:endParaRPr lang="en-US" dirty="0"/>
           </a:p>
@@ -2207,7 +2207,7 @@
           <a:p>
             <a:r>
               <a:rPr lang="en-US" dirty="0"/>
-              <a:t>One new thread, which came out of talking with Dr Carp. The reward threshold is adjusted by hand, day by day — raised when the rat is beating the task, lowered when it's struggling. That's effectively a staircase procedure, and it's a record of how hard the task was for that animal, written down independently of anything we measure from the electrodes. Right now our scaling result correlates two things measured from the same electrodes, which share noise. If cortical coupling instead tracks a behavioural record kept by hand at the time, that's a much harder result to dismiss. We'd like to build that next.</a:t>
+              <a:t>One new thread, which came out of our last meeting. The reward threshold is adjusted by hand, day by day — raised when the rat exceeds it, lowered when it's struggling. That's effectively a staircase procedure, and it's a record of how hard the task was for that animal, written down independently of anything we measure from the electrodes. Right now our scaling result correlates two things measured from the same electrodes, which share noise. If cortical coupling instead tracks a behavioural record kept by hand at the time, that's a much harder result to dismiss. We'd like to build that next.</a:t>
             </a:r>
             <a:endParaRPr lang="en-US" dirty="0"/>
           </a:p>
@@ -2471,7 +2471,7 @@
           <a:p>
             <a:r>
               <a:rPr lang="en-US" dirty="0"/>
-              <a:t>For anyone not close to this work: a small shock to the leg nerve produces a reflex in the soleus. The rat is rewarded when that reflex is bigger, or smaller, than a threshold. Over weeks it shifts, and twenty percent counts as success. What's already known from Chad Boulay's paper is that cortical activity influences reflex size. Our question is whether you can see that on a single trial, and whether the relationship itself changes with learning.</a:t>
+              <a:t>For anyone not close to this work: a small electrical stimulus to the leg nerve produces a reflex in the soleus muscle. The rat is rewarded when that reflex is bigger, or smaller, than a threshold. Over weeks it shifts in the trained direction, and a twenty percent change counts as success. The long-term change is in the spinal cord itself.</a:t>
             </a:r>
             <a:endParaRPr lang="en-US" dirty="0"/>
           </a:p>
@@ -2559,7 +2559,7 @@
           <a:p>
             <a:r>
               <a:rPr lang="en-US" dirty="0"/>
-              <a:t>What happens next. Five more animals are downloaded and ready, which takes us from five to about ten and is what powers the scaling test. Then frequency-resolved coupling, to see which bands carry the information — that sharpens both the finding and the contamination argument. The reward-criterion measure as an independent behavioural record. And then writing it up.</a:t>
+              <a:t>What happens next. The remaining down-conditioned animals, seven, eight, thirteen and fourteen, are next through the pipeline, which takes us from five to nine and is what powers the scaling test. Then frequency-resolved coupling, to see which bands carry the information — that sharpens both the finding and the contamination argument. The reward-criterion measure as an independent behavioural record. And then writing it up.</a:t>
             </a:r>
             <a:endParaRPr lang="en-US" dirty="0"/>
           </a:p>
@@ -2735,7 +2735,7 @@
           <a:p>
             <a:r>
               <a:rPr lang="en-US" dirty="0"/>
-              <a:t>And the things we know we haven't settled. Whether the coupling grows with learning — the correlation points the right way but five animals can't settle it, and five more are processed and waiting. Which frequencies carry the signal. Whether two percent of variance is biologically meaningful, which is honestly a question for this room more than for us. And what else could produce it that we haven't excluded — we'd genuinely like to know what we're missing.</a:t>
+              <a:t>And the things we know we haven't settled. Whether the coupling grows with learning — the correlation points the right way but five animals can't settle it, and four more are next. Which frequencies carry the signal. Whether two percent of variance is biologically meaningful, which is honestly a question for this room more than for us. And what else could produce it that we haven't excluded — we'd genuinely like to know what we're missing.</a:t>
             </a:r>
             <a:endParaRPr lang="en-US" dirty="0"/>
           </a:p>
@@ -2823,7 +2823,7 @@
           <a:p>
             <a:r>
               <a:rPr lang="en-US" dirty="0"/>
-              <a:t>Everything is public. There's a project page with the findings and figures, the repository with the full pipeline — two commands per animal and it runs end to end — and a six-page write-up. The repository has every script, the trained encoder, all the figures, per-animal results, a starter notebook and setup instructions. No raw recordings; those stay with NCAN. If anyone wants to run it on their own data, it should be straightforward.</a:t>
+              <a:t>Everything is public. There's a project page with the findings and figures, the repository with the full pipeline — two commands per animal and it runs end to end — and a six-page write-up. The repository has every script, the trained encoder, all the figures, per-animal results, a starter notebook and setup instructions. Raw recordings are available through NCAN. If anyone wants to run it on their own data, it should be straightforward.</a:t>
             </a:r>
             <a:endParaRPr lang="en-US" dirty="0"/>
           </a:p>
@@ -2911,7 +2911,7 @@
           <a:p>
             <a:r>
               <a:rPr lang="en-US" dirty="0"/>
-              <a:t>Thank you. And genuinely — the sham control, the randomised order test and the pre-stimulus covariate were all Dr Carp's suggestions, and each one changed what this project concluded. Happy to take questions.</a:t>
+              <a:t>Thank you, and our thanks to Dr. Carp and Theresa Vaughan for their guidance throughout this project. Happy to take questions.</a:t>
             </a:r>
             <a:endParaRPr lang="en-US" dirty="0"/>
           </a:p>
@@ -2999,7 +2999,7 @@
           <a:p>
             <a:r>
               <a:rPr lang="en-US" dirty="0"/>
-              <a:t>Why bring machine learning to this at all. The usual approach is to decide in advance which features of the trace might matter and measure those — but whatever you didn't think of, you don't measure. Instead we let a network learn its own description of each trace with no labels, then test what it can predict. The precedent is BrainBERT, out of MIT and used widely for human intracranial work: learn a general representation of neural signal first, then apply it downstream. Ours is a much smaller model because we have one channel and a thirty millisecond window rather than a full array.</a:t>
+              <a:t>This project builds on a 2015 paper from this laboratory by Chad Boulay, Xiang Yang Chen and Jonathan Wolpaw. Their question was how ongoing activity in sensorimotor cortex affects the H-reflex. In forty-one awake rats they recorded ECoG over sensorimotor cortex together with soleus EMG and the H-reflex. The cortical signal fell into three frequency bands: mu-beta, low gamma and high gamma. Background muscle activity tracked cortical state, and H-reflex size related to the same bands in the opposite direction, but only once background EMG was included in the model. Their interpretation was that an activated cortex both excites the motoneurons and reduces the efficacy of the afferent input. So a cortical-spinal relationship was already established, from band power across many trials. Our question is whether it is visible on a single trial, and whether it changes as the animal learns.</a:t>
             </a:r>
             <a:endParaRPr lang="en-US" dirty="0"/>
           </a:p>
@@ -3087,7 +3087,7 @@
           <a:p>
             <a:r>
               <a:rPr lang="en-US" dirty="0"/>
-              <a:t>Orientation before anything else. Every shock gives one trial — thirty milliseconds at five kilohertz, two channels recorded simultaneously. The spike at zero is the stimulus artifact. The bump at two to four milliseconds is the M-wave, the nerve firing the muscle directly. The bump at six to nine is the H-reflex, which went down to the spinal cord and back. That's the one conditioning changes. This particular figure is the average of two hundred eighty thousand trials from one animal.</a:t>
+              <a:t>Why bring machine learning to this at all. The usual approach is to decide in advance which features of the recording might matter and measure those — but whatever you didn't think of, you don't measure. Instead we let a network learn its own description of each trace with no labels, then test what it can predict. The precedent is BrainBERT, a model from MIT published at ICLR in 2023: it is trained on human intracranial recordings, learns a general representation of the signal first without labels, and is then applied to downstream questions. Ours is a much smaller model because we have one channel and a thirty-millisecond window rather than a full electrode array.</a:t>
             </a:r>
             <a:endParaRPr lang="en-US" dirty="0"/>
           </a:p>
@@ -3175,7 +3175,7 @@
           <a:p>
             <a:r>
               <a:rPr lang="en-US" dirty="0"/>
-              <a:t>First problem, and it took a while. We were given the tables and a decoder script that documented the byte order as big-endian. Decoded that way every trial is noise — no M-wave, no reflex. The files are actually little-endian. It's one flag. But the reason we trusted the fix wasn't that the output looked plausible; it's that the M-wave and H-reflex landed at exactly the latencies the experimenter had typed into the log back in 2006 — MR interval two to four, HR interval six to nine. The data confirmed the notes and the notes confirmed the data.</a:t>
+              <a:t>Orientation before anything else. Every stimulus produces one trial — thirty milliseconds at five kilohertz, recorded from a pair of EMG electrodes in the soleus muscle. The spike at zero is the stimulus artifact; it is clipped here so it doesn't dominate. The bump at two to four milliseconds is the M-wave, the nerve activating the muscle directly. The bump at six to nine is the H-reflex, which went to the spinal cord and back. That's the one conditioning changes. This figure is the average of about two hundred eighty thousand trials from one animal.</a:t>
             </a:r>
             <a:endParaRPr lang="en-US" dirty="0"/>
           </a:p>
@@ -3263,7 +3263,7 @@
           <a:p>
             <a:r>
               <a:rPr lang="en-US" dirty="0"/>
-              <a:t>This is what it actually looked like. Left: decoded the way the documentation says, averaged over eight thousand trials. Amplitudes in the tens of thousands of microvolts, which is ten times anything physiological, and no structure at all. Right: the identical file with the byte order flipped. Stimulus artifact, then the M-wave in the orange band, then the H-reflex in the blue band. This is real data, not an illustration — and it's the moment the project actually started.</a:t>
+              <a:t>First problem, and it took a while. We were given the tables and a decoder script that said each sample's two bytes are stored most-significant first — big-endian. Decoded that way, every trial is noise. The files are actually stored least-significant first — little-endian. The reason we trusted that wasn't that the output looked plausible; it's that the M-wave and H-reflex landed at exactly the latencies the experimenter had typed into the log in 2006 — MR interval two to four, HR interval six to nine. The data confirmed the notes and the notes confirmed the data.</a:t>
             </a:r>
             <a:endParaRPr lang="en-US" dirty="0"/>
           </a:p>
@@ -3351,7 +3351,7 @@
           <a:p>
             <a:r>
               <a:rPr lang="en-US" dirty="0"/>
-              <a:t>Six animals, three trained down and three up, forty-five to two hundred ten days each. Worth explaining how we chose them, because it saved us a lot of time. The log files are a few hundred kilobytes; the signal data is four gigabytes an animal. The experimenter raises the reward threshold whenever the rat starts beating it — so the threshold history is a written record of how the animal was doing. We read only the logs, then downloaded signal data for the ones that had learned. We also dropped animal twelve: its pre-stimulus cortical signal is under three microvolts against a hundred-plus in the others, so that electrode was dead.</a:t>
+              <a:t>Six animals, three trained down and three up, forty-five to two hundred ten days each. Worth explaining how we chose them, because it saved us a lot of time. The log files are a few hundred kilobytes; the signal data is four gigabytes an animal. The experimenter raises the reward threshold whenever the rat exceeds it — so the threshold history is a written record of how the animal was doing. We read only the logs, then downloaded signal data for the ones that responded. We also dropped animal twelve: its pre-stimulus cortical signal is under three microvolts against a hundred-plus in the others, so that electrode had failed.</a:t>
             </a:r>
             <a:endParaRPr lang="en-US" dirty="0"/>
           </a:p>
@@ -3881,7 +3881,7 @@
               <a:buNone/>
             </a:pPr>
             <a:r>
-              <a:rPr lang="en-US" sz="1300" b="1" spc="300" kern="0" dirty="0">
+              <a:rPr lang="en-US" sz="1450" b="1" spc="300" kern="0" dirty="0">
                 <a:solidFill>
                   <a:srgbClr val="7FB8C9"/>
                 </a:solidFill>
@@ -3889,9 +3889,9 @@
                 <a:ea typeface="Calibri" pitchFamily="34" charset="-122"/>
                 <a:cs typeface="Calibri" pitchFamily="34" charset="-120"/>
               </a:rPr>
-              <a:t>NCAN · WADSWORTH CENTER · SUMMER 2026</a:t>
-            </a:r>
-            <a:endParaRPr lang="en-US" sz="1300" dirty="0"/>
+              <a:t>NCAN · STRATTON VA MEDICAL CENTER · SUMMER 2026</a:t>
+            </a:r>
+            <a:endParaRPr lang="en-US" sz="1450" dirty="0"/>
           </a:p>
         </p:txBody>
       </p:sp>
@@ -4021,7 +4021,7 @@
               <a:buNone/>
             </a:pPr>
             <a:r>
-              <a:rPr lang="en-US" sz="1400" dirty="0">
+              <a:rPr lang="en-US" sz="1600" dirty="0">
                 <a:solidFill>
                   <a:srgbClr val="8B9AA6"/>
                 </a:solidFill>
@@ -4029,9 +4029,9 @@
                 <a:ea typeface="Calibri" pitchFamily="34" charset="-122"/>
                 <a:cs typeface="Calibri" pitchFamily="34" charset="-120"/>
               </a:rPr>
-              <a:t>Suchith Rao  ·  Tarun Senthil          with Dr. Jonathan Carp and Teresa</a:t>
-            </a:r>
-            <a:endParaRPr lang="en-US" sz="1400" dirty="0"/>
+              <a:t>Suchith Rao  ·  Tarun Senthil          with Dr. Jonathan Carp and Theresa Vaughan</a:t>
+            </a:r>
+            <a:endParaRPr lang="en-US" sz="1600" dirty="0"/>
           </a:p>
         </p:txBody>
       </p:sp>
@@ -4092,7 +4092,7 @@
               <a:buNone/>
             </a:pPr>
             <a:r>
-              <a:rPr lang="en-US" sz="1150" b="1" spc="320" kern="0" dirty="0">
+              <a:rPr lang="en-US" sz="1300" b="1" spc="320" kern="0" dirty="0">
                 <a:solidFill>
                   <a:srgbClr val="6B4E8F"/>
                 </a:solidFill>
@@ -4102,7 +4102,7 @@
               </a:rPr>
               <a:t>PART 3 · HOW WE BUILT IT</a:t>
             </a:r>
-            <a:endParaRPr lang="en-US" sz="1150" dirty="0"/>
+            <a:endParaRPr lang="en-US" sz="1300" dirty="0"/>
           </a:p>
         </p:txBody>
       </p:sp>
@@ -4155,13 +4155,14 @@
         </p:nvPicPr>
         <p:blipFill>
           <a:blip r:embed="rId1"/>
-          <a:srcRect l="0" r="0" t="0" b="0"/>
-          <a:stretch/>
+          <a:stretch>
+            <a:fillRect/>
+          </a:stretch>
         </p:blipFill>
         <p:spPr>
           <a:xfrm>
-            <a:off x="685800" y="1874520"/>
-            <a:ext cx="10881360" cy="3688597"/>
+            <a:off x="1064199" y="1874520"/>
+            <a:ext cx="10124562" cy="3688597"/>
           </a:xfrm>
           <a:prstGeom prst="rect">
             <a:avLst/>
@@ -4225,7 +4226,7 @@
               <a:buNone/>
             </a:pPr>
             <a:r>
-              <a:rPr lang="en-US" sz="1150" b="1" spc="320" kern="0" dirty="0">
+              <a:rPr lang="en-US" sz="1300" b="1" spc="320" kern="0" dirty="0">
                 <a:solidFill>
                   <a:srgbClr val="6B4E8F"/>
                 </a:solidFill>
@@ -4235,7 +4236,7 @@
               </a:rPr>
               <a:t>PART 3 · HOW WE BUILT IT</a:t>
             </a:r>
-            <a:endParaRPr lang="en-US" sz="1150" dirty="0"/>
+            <a:endParaRPr lang="en-US" sz="1300" dirty="0"/>
           </a:p>
         </p:txBody>
       </p:sp>
@@ -4288,13 +4289,14 @@
         </p:nvPicPr>
         <p:blipFill>
           <a:blip r:embed="rId1"/>
-          <a:srcRect l="0" r="0" t="0" b="0"/>
-          <a:stretch/>
+          <a:stretch>
+            <a:fillRect/>
+          </a:stretch>
         </p:blipFill>
         <p:spPr>
           <a:xfrm>
-            <a:off x="1147572" y="1783080"/>
-            <a:ext cx="9957816" cy="4114800"/>
+            <a:off x="1440671" y="1783080"/>
+            <a:ext cx="9371619" cy="4114800"/>
           </a:xfrm>
           <a:prstGeom prst="rect">
             <a:avLst/>
@@ -4358,7 +4360,7 @@
               <a:buNone/>
             </a:pPr>
             <a:r>
-              <a:rPr lang="en-US" sz="1150" b="1" spc="320" kern="0" dirty="0">
+              <a:rPr lang="en-US" sz="1300" b="1" spc="320" kern="0" dirty="0">
                 <a:solidFill>
                   <a:srgbClr val="6B4E8F"/>
                 </a:solidFill>
@@ -4368,7 +4370,7 @@
               </a:rPr>
               <a:t>PART 3 · HOW WE BUILT IT</a:t>
             </a:r>
-            <a:endParaRPr lang="en-US" sz="1150" dirty="0"/>
+            <a:endParaRPr lang="en-US" sz="1300" dirty="0"/>
           </a:p>
         </p:txBody>
       </p:sp>
@@ -4470,7 +4472,7 @@
               <a:buNone/>
             </a:pPr>
             <a:r>
-              <a:rPr lang="en-US" sz="1450" b="1" dirty="0">
+              <a:rPr lang="en-US" sz="1650" b="1" dirty="0">
                 <a:solidFill>
                   <a:srgbClr val="6B4E8F"/>
                 </a:solidFill>
@@ -4480,7 +4482,7 @@
               </a:rPr>
               <a:t>How it was trained</a:t>
             </a:r>
-            <a:endParaRPr lang="en-US" sz="1450" dirty="0"/>
+            <a:endParaRPr lang="en-US" sz="1650" dirty="0"/>
           </a:p>
         </p:txBody>
       </p:sp>
@@ -4509,7 +4511,7 @@
               <a:buNone/>
             </a:pPr>
             <a:r>
-              <a:rPr lang="en-US" sz="1300" b="1" dirty="0">
+              <a:rPr lang="en-US" sz="1450" b="1" dirty="0">
                 <a:solidFill>
                   <a:srgbClr val="14212E"/>
                 </a:solidFill>
@@ -4519,7 +4521,7 @@
               </a:rPr>
               <a:t>600,000</a:t>
             </a:r>
-            <a:endParaRPr lang="en-US" sz="1300" dirty="0"/>
+            <a:endParaRPr lang="en-US" sz="1450" dirty="0"/>
           </a:p>
         </p:txBody>
       </p:sp>
@@ -4548,7 +4550,7 @@
               <a:buNone/>
             </a:pPr>
             <a:r>
-              <a:rPr lang="en-US" sz="1250" dirty="0">
+              <a:rPr lang="en-US" sz="1400" dirty="0">
                 <a:solidFill>
                   <a:srgbClr val="5A6B7B"/>
                 </a:solidFill>
@@ -4558,7 +4560,7 @@
               </a:rPr>
               <a:t>trials pooled across five animals</a:t>
             </a:r>
-            <a:endParaRPr lang="en-US" sz="1250" dirty="0"/>
+            <a:endParaRPr lang="en-US" sz="1400" dirty="0"/>
           </a:p>
         </p:txBody>
       </p:sp>
@@ -4587,7 +4589,7 @@
               <a:buNone/>
             </a:pPr>
             <a:r>
-              <a:rPr lang="en-US" sz="1300" b="1" dirty="0">
+              <a:rPr lang="en-US" sz="1450" b="1" dirty="0">
                 <a:solidFill>
                   <a:srgbClr val="14212E"/>
                 </a:solidFill>
@@ -4597,7 +4599,7 @@
               </a:rPr>
               <a:t>12</a:t>
             </a:r>
-            <a:endParaRPr lang="en-US" sz="1300" dirty="0"/>
+            <a:endParaRPr lang="en-US" sz="1450" dirty="0"/>
           </a:p>
         </p:txBody>
       </p:sp>
@@ -4626,7 +4628,7 @@
               <a:buNone/>
             </a:pPr>
             <a:r>
-              <a:rPr lang="en-US" sz="1250" dirty="0">
+              <a:rPr lang="en-US" sz="1400" dirty="0">
                 <a:solidFill>
                   <a:srgbClr val="5A6B7B"/>
                 </a:solidFill>
@@ -4636,7 +4638,7 @@
               </a:rPr>
               <a:t>passes through the data</a:t>
             </a:r>
-            <a:endParaRPr lang="en-US" sz="1250" dirty="0"/>
+            <a:endParaRPr lang="en-US" sz="1400" dirty="0"/>
           </a:p>
         </p:txBody>
       </p:sp>
@@ -4665,7 +4667,7 @@
               <a:buNone/>
             </a:pPr>
             <a:r>
-              <a:rPr lang="en-US" sz="1300" b="1" dirty="0">
+              <a:rPr lang="en-US" sz="1450" b="1" dirty="0">
                 <a:solidFill>
                   <a:srgbClr val="14212E"/>
                 </a:solidFill>
@@ -4675,7 +4677,7 @@
               </a:rPr>
               <a:t>~4 min</a:t>
             </a:r>
-            <a:endParaRPr lang="en-US" sz="1300" dirty="0"/>
+            <a:endParaRPr lang="en-US" sz="1450" dirty="0"/>
           </a:p>
         </p:txBody>
       </p:sp>
@@ -4704,7 +4706,7 @@
               <a:buNone/>
             </a:pPr>
             <a:r>
-              <a:rPr lang="en-US" sz="1250" dirty="0">
+              <a:rPr lang="en-US" sz="1400" dirty="0">
                 <a:solidFill>
                   <a:srgbClr val="5A6B7B"/>
                 </a:solidFill>
@@ -4714,7 +4716,7 @@
               </a:rPr>
               <a:t>on a laptop GPU</a:t>
             </a:r>
-            <a:endParaRPr lang="en-US" sz="1250" dirty="0"/>
+            <a:endParaRPr lang="en-US" sz="1400" dirty="0"/>
           </a:p>
         </p:txBody>
       </p:sp>
@@ -4743,7 +4745,7 @@
               <a:buNone/>
             </a:pPr>
             <a:r>
-              <a:rPr lang="en-US" sz="1300" b="1" dirty="0">
+              <a:rPr lang="en-US" sz="1450" b="1" dirty="0">
                 <a:solidFill>
                   <a:srgbClr val="14212E"/>
                 </a:solidFill>
@@ -4753,7 +4755,7 @@
               </a:rPr>
               <a:t>0.0149 → 0.0070</a:t>
             </a:r>
-            <a:endParaRPr lang="en-US" sz="1300" dirty="0"/>
+            <a:endParaRPr lang="en-US" sz="1450" dirty="0"/>
           </a:p>
         </p:txBody>
       </p:sp>
@@ -4782,7 +4784,7 @@
               <a:buNone/>
             </a:pPr>
             <a:r>
-              <a:rPr lang="en-US" sz="1250" dirty="0">
+              <a:rPr lang="en-US" sz="1400" dirty="0">
                 <a:solidFill>
                   <a:srgbClr val="5A6B7B"/>
                 </a:solidFill>
@@ -4792,7 +4794,7 @@
               </a:rPr>
               <a:t>reconstruction error</a:t>
             </a:r>
-            <a:endParaRPr lang="en-US" sz="1250" dirty="0"/>
+            <a:endParaRPr lang="en-US" sz="1400" dirty="0"/>
           </a:p>
         </p:txBody>
       </p:sp>
@@ -4855,7 +4857,7 @@
               <a:buNone/>
             </a:pPr>
             <a:r>
-              <a:rPr lang="en-US" sz="1450" b="1" dirty="0">
+              <a:rPr lang="en-US" sz="1650" b="1" dirty="0">
                 <a:solidFill>
                   <a:srgbClr val="B4671A"/>
                 </a:solidFill>
@@ -4865,7 +4867,7 @@
               </a:rPr>
               <a:t>The trap</a:t>
             </a:r>
-            <a:endParaRPr lang="en-US" sz="1450" dirty="0"/>
+            <a:endParaRPr lang="en-US" sz="1650" dirty="0"/>
           </a:p>
         </p:txBody>
       </p:sp>
@@ -4897,7 +4899,7 @@
               <a:buNone/>
             </a:pPr>
             <a:r>
-              <a:rPr lang="en-US" sz="1350" dirty="0">
+              <a:rPr lang="en-US" sz="1550" dirty="0">
                 <a:solidFill>
                   <a:srgbClr val="14212E"/>
                 </a:solidFill>
@@ -4905,9 +4907,9 @@
                 <a:ea typeface="Calibri" pitchFamily="34" charset="-122"/>
                 <a:cs typeface="Calibri" pitchFamily="34" charset="-120"/>
               </a:rPr>
-              <a:t>Pool several animals naively and the model learns to tell the animals apart — different electrodes, different amplitudes. That is a recording artefact wearing a biology costume.</a:t>
-            </a:r>
-            <a:endParaRPr lang="en-US" sz="1350" dirty="0"/>
+              <a:t>Pool several animals naively and the model learns to tell the animals apart — different electrodes, different amplitudes. That is a recording artefact, not biology.</a:t>
+            </a:r>
+            <a:endParaRPr lang="en-US" sz="1550" dirty="0"/>
           </a:p>
         </p:txBody>
       </p:sp>
@@ -4936,7 +4938,7 @@
               <a:buNone/>
             </a:pPr>
             <a:r>
-              <a:rPr lang="en-US" sz="1250" b="1" i="1" dirty="0">
+              <a:rPr lang="en-US" sz="1400" b="1" i="1" dirty="0">
                 <a:solidFill>
                   <a:srgbClr val="3B6E43"/>
                 </a:solidFill>
@@ -4946,7 +4948,7 @@
               </a:rPr>
               <a:t>Fix: standardise every animal separately before pooling.</a:t>
             </a:r>
-            <a:endParaRPr lang="en-US" sz="1250" dirty="0"/>
+            <a:endParaRPr lang="en-US" sz="1400" dirty="0"/>
           </a:p>
         </p:txBody>
       </p:sp>
@@ -5009,7 +5011,7 @@
               <a:buNone/>
             </a:pPr>
             <a:r>
-              <a:rPr lang="en-US" sz="1400" b="1" dirty="0">
+              <a:rPr lang="en-US" sz="1600" b="1" dirty="0">
                 <a:solidFill>
                   <a:srgbClr val="15718F"/>
                 </a:solidFill>
@@ -5019,7 +5021,7 @@
               </a:rPr>
               <a:t>Why one model across all animals, rather than one per animal</a:t>
             </a:r>
-            <a:endParaRPr lang="en-US" sz="1400" dirty="0"/>
+            <a:endParaRPr lang="en-US" sz="1600" dirty="0"/>
           </a:p>
         </p:txBody>
       </p:sp>
@@ -5051,7 +5053,7 @@
               <a:buNone/>
             </a:pPr>
             <a:r>
-              <a:rPr lang="en-US" sz="1350" dirty="0">
+              <a:rPr lang="en-US" sz="1550" dirty="0">
                 <a:solidFill>
                   <a:srgbClr val="14212E"/>
                 </a:solidFill>
@@ -5061,7 +5063,7 @@
               </a:rPr>
               <a:t>A separate model per animal would describe each brain in its own private vocabulary, and you could never compare them. Training one model on all of them forces a shared vocabulary — so “this pattern of cortical activity” means the same thing in animal 3 as it does in animal 11. That is what makes the group comparisons later in the talk legitimate.</a:t>
             </a:r>
-            <a:endParaRPr lang="en-US" sz="1350" dirty="0"/>
+            <a:endParaRPr lang="en-US" sz="1550" dirty="0"/>
           </a:p>
         </p:txBody>
       </p:sp>
@@ -5122,7 +5124,7 @@
               <a:buNone/>
             </a:pPr>
             <a:r>
-              <a:rPr lang="en-US" sz="1150" b="1" spc="320" kern="0" dirty="0">
+              <a:rPr lang="en-US" sz="1300" b="1" spc="320" kern="0" dirty="0">
                 <a:solidFill>
                   <a:srgbClr val="6B4E8F"/>
                 </a:solidFill>
@@ -5132,7 +5134,7 @@
               </a:rPr>
               <a:t>PART 3 · HOW WE BUILT IT</a:t>
             </a:r>
-            <a:endParaRPr lang="en-US" sz="1150" dirty="0"/>
+            <a:endParaRPr lang="en-US" sz="1300" dirty="0"/>
           </a:p>
         </p:txBody>
       </p:sp>
@@ -5185,13 +5187,14 @@
         </p:nvPicPr>
         <p:blipFill>
           <a:blip r:embed="rId1"/>
-          <a:srcRect l="0" r="0" t="0" b="0"/>
-          <a:stretch/>
+          <a:stretch>
+            <a:fillRect/>
+          </a:stretch>
         </p:blipFill>
         <p:spPr>
           <a:xfrm>
             <a:off x="685800" y="1828800"/>
-            <a:ext cx="10881360" cy="3845004"/>
+            <a:ext cx="10881360" cy="3770954"/>
           </a:xfrm>
           <a:prstGeom prst="rect">
             <a:avLst/>
@@ -5255,7 +5258,7 @@
               <a:buNone/>
             </a:pPr>
             <a:r>
-              <a:rPr lang="en-US" sz="1150" b="1" spc="320" kern="0" dirty="0">
+              <a:rPr lang="en-US" sz="1300" b="1" spc="320" kern="0" dirty="0">
                 <a:solidFill>
                   <a:srgbClr val="6B4E8F"/>
                 </a:solidFill>
@@ -5265,7 +5268,7 @@
               </a:rPr>
               <a:t>PART 3 · HOW IT WENT</a:t>
             </a:r>
-            <a:endParaRPr lang="en-US" sz="1150" dirty="0"/>
+            <a:endParaRPr lang="en-US" sz="1300" dirty="0"/>
           </a:p>
         </p:txBody>
       </p:sp>
@@ -5318,13 +5321,14 @@
         </p:nvPicPr>
         <p:blipFill>
           <a:blip r:embed="rId1"/>
-          <a:srcRect l="0" r="0" t="0" b="0"/>
-          <a:stretch/>
+          <a:stretch>
+            <a:fillRect/>
+          </a:stretch>
         </p:blipFill>
         <p:spPr>
           <a:xfrm>
-            <a:off x="685800" y="1965960"/>
-            <a:ext cx="10881360" cy="3065172"/>
+            <a:off x="1222205" y="1965960"/>
+            <a:ext cx="9808550" cy="3065172"/>
           </a:xfrm>
           <a:prstGeom prst="rect">
             <a:avLst/>
@@ -5388,7 +5392,7 @@
               <a:buNone/>
             </a:pPr>
             <a:r>
-              <a:rPr lang="en-US" sz="1150" b="1" spc="320" kern="0" dirty="0">
+              <a:rPr lang="en-US" sz="1300" b="1" spc="320" kern="0" dirty="0">
                 <a:solidFill>
                   <a:srgbClr val="B4671A"/>
                 </a:solidFill>
@@ -5398,7 +5402,7 @@
               </a:rPr>
               <a:t>PART 3 · HOW WE BUILT IT</a:t>
             </a:r>
-            <a:endParaRPr lang="en-US" sz="1150" dirty="0"/>
+            <a:endParaRPr lang="en-US" sz="1300" dirty="0"/>
           </a:p>
         </p:txBody>
       </p:sp>
@@ -5450,11 +5454,11 @@
         <p:spPr>
           <a:xfrm>
             <a:off x="685800" y="1920240"/>
-            <a:ext cx="5349240" cy="2240280"/>
+            <a:ext cx="5349240" cy="3246120"/>
           </a:xfrm>
           <a:prstGeom prst="roundRect">
             <a:avLst>
-              <a:gd name="adj" fmla="val 3265"/>
+              <a:gd name="adj" fmla="val 2254"/>
             </a:avLst>
           </a:prstGeom>
           <a:solidFill>
@@ -5500,7 +5504,7 @@
               <a:buNone/>
             </a:pPr>
             <a:r>
-              <a:rPr lang="en-US" sz="1450" b="1" dirty="0">
+              <a:rPr lang="en-US" sz="1650" b="1" dirty="0">
                 <a:solidFill>
                   <a:srgbClr val="B4671A"/>
                 </a:solidFill>
@@ -5510,7 +5514,7 @@
               </a:rPr>
               <a:t>The problem</a:t>
             </a:r>
-            <a:endParaRPr lang="en-US" sz="1450" dirty="0"/>
+            <a:endParaRPr lang="en-US" sz="1650" dirty="0"/>
           </a:p>
         </p:txBody>
       </p:sp>
@@ -5523,7 +5527,7 @@
         <p:spPr>
           <a:xfrm>
             <a:off x="960120" y="2514600"/>
-            <a:ext cx="4846320" cy="1051560"/>
+            <a:ext cx="4846320" cy="1828800"/>
           </a:xfrm>
           <a:prstGeom prst="rect">
             <a:avLst/>
@@ -5542,7 +5546,7 @@
               <a:buNone/>
             </a:pPr>
             <a:r>
-              <a:rPr lang="en-US" sz="1400" dirty="0">
+              <a:rPr lang="en-US" sz="1600" dirty="0">
                 <a:solidFill>
                   <a:srgbClr val="14212E"/>
                 </a:solidFill>
@@ -5550,7 +5554,46 @@
                 <a:ea typeface="Calibri" pitchFamily="34" charset="-122"/>
                 <a:cs typeface="Calibri" pitchFamily="34" charset="-120"/>
               </a:rPr>
-              <a:t>A bigger shock makes a bigger reflex — no learning required. Across these recordings the delivered stimulus roughly quadrupled.</a:t>
+              <a:t>A bigger stimulus makes a bigger reflex — no learning required — and so does a more active muscle. Boulay et al. (2015) found exactly this: H-reflex size varied with M-wave size and background EMG as well as with cortical activity.</a:t>
+            </a:r>
+            <a:endParaRPr lang="en-US" sz="1600" dirty="0"/>
+          </a:p>
+        </p:txBody>
+      </p:sp>
+      <p:sp>
+        <p:nvSpPr>
+          <p:cNvPr id="7" name="Text 5"/>
+          <p:cNvSpPr/>
+          <p:nvPr/>
+        </p:nvSpPr>
+        <p:spPr>
+          <a:xfrm>
+            <a:off x="960120" y="4389120"/>
+            <a:ext cx="4846320" cy="685800"/>
+          </a:xfrm>
+          <a:prstGeom prst="rect">
+            <a:avLst/>
+          </a:prstGeom>
+          <a:noFill/>
+          <a:ln/>
+        </p:spPr>
+        <p:txBody>
+          <a:bodyPr wrap="square" lIns="0" tIns="0" rIns="0" bIns="0" rtlCol="0" anchor="ctr"/>
+          <a:lstStyle/>
+          <a:p>
+            <a:pPr indent="0" marL="0">
+              <a:buNone/>
+            </a:pPr>
+            <a:r>
+              <a:rPr lang="en-US" sz="1400" i="1" dirty="0">
+                <a:solidFill>
+                  <a:srgbClr val="5A6B7B"/>
+                </a:solidFill>
+                <a:latin typeface="Calibri" pitchFamily="34" charset="0"/>
+                <a:ea typeface="Calibri" pitchFamily="34" charset="-122"/>
+                <a:cs typeface="Calibri" pitchFamily="34" charset="-120"/>
+              </a:rPr>
+              <a:t>In one animal the delivered stimulus nearly quintupled over the recording; early on, that made one of our results come out backwards.</a:t>
             </a:r>
             <a:endParaRPr lang="en-US" sz="1400" dirty="0"/>
           </a:p>
@@ -5558,45 +5601,6 @@
       </p:sp>
       <p:sp>
         <p:nvSpPr>
-          <p:cNvPr id="7" name="Text 5"/>
-          <p:cNvSpPr/>
-          <p:nvPr/>
-        </p:nvSpPr>
-        <p:spPr>
-          <a:xfrm>
-            <a:off x="960120" y="3611880"/>
-            <a:ext cx="4846320" cy="457200"/>
-          </a:xfrm>
-          <a:prstGeom prst="rect">
-            <a:avLst/>
-          </a:prstGeom>
-          <a:noFill/>
-          <a:ln/>
-        </p:spPr>
-        <p:txBody>
-          <a:bodyPr wrap="square" lIns="0" tIns="0" rIns="0" bIns="0" rtlCol="0" anchor="ctr"/>
-          <a:lstStyle/>
-          <a:p>
-            <a:pPr indent="0" marL="0">
-              <a:buNone/>
-            </a:pPr>
-            <a:r>
-              <a:rPr lang="en-US" sz="1250" i="1" dirty="0">
-                <a:solidFill>
-                  <a:srgbClr val="5A6B7B"/>
-                </a:solidFill>
-                <a:latin typeface="Calibri" pitchFamily="34" charset="0"/>
-                <a:ea typeface="Calibri" pitchFamily="34" charset="-122"/>
-                <a:cs typeface="Calibri" pitchFamily="34" charset="-120"/>
-              </a:rPr>
-              <a:t>Early on this made one of our results come out backwards.</a:t>
-            </a:r>
-            <a:endParaRPr lang="en-US" sz="1250" dirty="0"/>
-          </a:p>
-        </p:txBody>
-      </p:sp>
-      <p:sp>
-        <p:nvSpPr>
           <p:cNvPr id="8" name="Shape 6"/>
           <p:cNvSpPr/>
           <p:nvPr/>
@@ -5604,11 +5608,11 @@
         <p:spPr>
           <a:xfrm>
             <a:off x="6217920" y="1920240"/>
-            <a:ext cx="5349240" cy="2240280"/>
+            <a:ext cx="5349240" cy="3246120"/>
           </a:xfrm>
           <a:prstGeom prst="roundRect">
             <a:avLst>
-              <a:gd name="adj" fmla="val 3265"/>
+              <a:gd name="adj" fmla="val 2254"/>
             </a:avLst>
           </a:prstGeom>
           <a:solidFill>
@@ -5654,7 +5658,7 @@
               <a:buNone/>
             </a:pPr>
             <a:r>
-              <a:rPr lang="en-US" sz="1450" b="1" dirty="0">
+              <a:rPr lang="en-US" sz="1650" b="1" dirty="0">
                 <a:solidFill>
                   <a:srgbClr val="15718F"/>
                 </a:solidFill>
@@ -5664,7 +5668,7 @@
               </a:rPr>
               <a:t>The fix</a:t>
             </a:r>
-            <a:endParaRPr lang="en-US" sz="1450" dirty="0"/>
+            <a:endParaRPr lang="en-US" sz="1650" dirty="0"/>
           </a:p>
         </p:txBody>
       </p:sp>
@@ -5677,7 +5681,7 @@
         <p:spPr>
           <a:xfrm>
             <a:off x="6492240" y="2514600"/>
-            <a:ext cx="4846320" cy="1188720"/>
+            <a:ext cx="4846320" cy="2103120"/>
           </a:xfrm>
           <a:prstGeom prst="rect">
             <a:avLst/>
@@ -5696,7 +5700,7 @@
               <a:buNone/>
             </a:pPr>
             <a:r>
-              <a:rPr lang="en-US" sz="1400" dirty="0">
+              <a:rPr lang="en-US" sz="1600" dirty="0">
                 <a:solidFill>
                   <a:srgbClr val="14212E"/>
                 </a:solidFill>
@@ -5704,108 +5708,15 @@
                 <a:ea typeface="Calibri" pitchFamily="34" charset="-122"/>
                 <a:cs typeface="Calibri" pitchFamily="34" charset="-120"/>
               </a:rPr>
-              <a:t>The M-wave sits in the same trace and reflects only the stimulus. It is a per-trial receipt for how much shock arrived. We remove its influence from every measure.</a:t>
-            </a:r>
-            <a:endParaRPr lang="en-US" sz="1400" dirty="0"/>
+              <a:t>The M-wave sits in the same trace and reflects only the stimulus. It is a per-trial receipt for how much stimulus arrived. The 20 ms before each stimulus measures how active the muscle already was. We remove both from every measure.</a:t>
+            </a:r>
+            <a:endParaRPr lang="en-US" sz="1600" dirty="0"/>
           </a:p>
         </p:txBody>
       </p:sp>
       <p:sp>
         <p:nvSpPr>
           <p:cNvPr id="11" name="Shape 9"/>
-          <p:cNvSpPr/>
-          <p:nvPr/>
-        </p:nvSpPr>
-        <p:spPr>
-          <a:xfrm>
-            <a:off x="685800" y="4389120"/>
-            <a:ext cx="10881360" cy="960120"/>
-          </a:xfrm>
-          <a:prstGeom prst="roundRect">
-            <a:avLst>
-              <a:gd name="adj" fmla="val 7619"/>
-            </a:avLst>
-          </a:prstGeom>
-          <a:solidFill>
-            <a:srgbClr val="F4F7F9"/>
-          </a:solidFill>
-          <a:ln w="12700">
-            <a:solidFill>
-              <a:srgbClr val="DDE4EA"/>
-            </a:solidFill>
-            <a:prstDash val="solid"/>
-          </a:ln>
-          <a:effectLst>
-            <a:outerShdw sx="100000" sy="100000" kx="0" ky="0" algn="bl" rotWithShape="0" blurRad="127000" dist="38100" dir="5400000">
-              <a:srgbClr val="0C1620">
-                <a:alpha val="11000"/>
-              </a:srgbClr>
-            </a:outerShdw>
-          </a:effectLst>
-        </p:spPr>
-      </p:sp>
-      <p:sp>
-        <p:nvSpPr>
-          <p:cNvPr id="12" name="Text 10"/>
-          <p:cNvSpPr/>
-          <p:nvPr/>
-        </p:nvSpPr>
-        <p:spPr>
-          <a:xfrm>
-            <a:off x="1005840" y="4553712"/>
-            <a:ext cx="10241280" cy="640080"/>
-          </a:xfrm>
-          <a:prstGeom prst="rect">
-            <a:avLst/>
-          </a:prstGeom>
-          <a:noFill/>
-          <a:ln/>
-        </p:spPr>
-        <p:txBody>
-          <a:bodyPr wrap="square" lIns="0" tIns="0" rIns="0" bIns="0" rtlCol="0" anchor="ctr"/>
-          <a:lstStyle/>
-          <a:p>
-            <a:pPr indent="0" marL="0">
-              <a:lnSpc>
-                <a:spcPct val="106000"/>
-              </a:lnSpc>
-              <a:buNone/>
-            </a:pPr>
-            <a:r>
-              <a:rPr lang="en-US" sz="1400" b="1" dirty="0">
-                <a:solidFill>
-                  <a:srgbClr val="15718F"/>
-                </a:solidFill>
-                <a:latin typeface="Calibri" pitchFamily="34" charset="0"/>
-                <a:ea typeface="Calibri" pitchFamily="34" charset="-122"/>
-                <a:cs typeface="Calibri" pitchFamily="34" charset="-120"/>
-              </a:rPr>
-              <a:t>Dr. Carp's addition:  </a:t>
-            </a:r>
-            <a:pPr indent="0" marL="0">
-              <a:lnSpc>
-                <a:spcPct val="106000"/>
-              </a:lnSpc>
-              <a:buNone/>
-            </a:pPr>
-            <a:r>
-              <a:rPr lang="en-US" sz="1400" dirty="0">
-                <a:solidFill>
-                  <a:srgbClr val="14212E"/>
-                </a:solidFill>
-                <a:latin typeface="Calibri" pitchFamily="34" charset="0"/>
-                <a:ea typeface="Calibri" pitchFamily="34" charset="-122"/>
-                <a:cs typeface="Calibri" pitchFamily="34" charset="-120"/>
-              </a:rPr>
-              <a:t>the reflex also depends on how active the muscle already was. We now measure the 20 ms before each shock and remove that too.</a:t>
-            </a:r>
-            <a:endParaRPr lang="en-US" sz="1400" dirty="0"/>
-          </a:p>
-        </p:txBody>
-      </p:sp>
-      <p:sp>
-        <p:nvSpPr>
-          <p:cNvPr id="13" name="Shape 11"/>
           <p:cNvSpPr/>
           <p:nvPr/>
         </p:nvSpPr>
@@ -5839,7 +5750,7 @@
       </p:sp>
       <p:sp>
         <p:nvSpPr>
-          <p:cNvPr id="14" name="Text 12"/>
+          <p:cNvPr id="12" name="Text 10"/>
           <p:cNvSpPr/>
           <p:nvPr/>
         </p:nvSpPr>
@@ -5862,7 +5773,7 @@
               <a:buNone/>
             </a:pPr>
             <a:r>
-              <a:rPr lang="en-US" sz="1400" b="1" dirty="0">
+              <a:rPr lang="en-US" sz="1600" b="1" dirty="0">
                 <a:solidFill>
                   <a:srgbClr val="FFFFFF"/>
                 </a:solidFill>
@@ -5872,7 +5783,7 @@
               </a:rPr>
               <a:t>Every number in the rest of this talk has both corrections applied.</a:t>
             </a:r>
-            <a:endParaRPr lang="en-US" sz="1400" dirty="0"/>
+            <a:endParaRPr lang="en-US" sz="1600" dirty="0"/>
           </a:p>
         </p:txBody>
       </p:sp>
@@ -5933,7 +5844,7 @@
               <a:buNone/>
             </a:pPr>
             <a:r>
-              <a:rPr lang="en-US" sz="1150" b="1" spc="320" kern="0" dirty="0">
+              <a:rPr lang="en-US" sz="1300" b="1" spc="320" kern="0" dirty="0">
                 <a:solidFill>
                   <a:srgbClr val="3B6E43"/>
                 </a:solidFill>
@@ -5943,7 +5854,7 @@
               </a:rPr>
               <a:t>PART 4 · RESULT ONE</a:t>
             </a:r>
-            <a:endParaRPr lang="en-US" sz="1150" dirty="0"/>
+            <a:endParaRPr lang="en-US" sz="1300" dirty="0"/>
           </a:p>
         </p:txBody>
       </p:sp>
@@ -5996,13 +5907,14 @@
         </p:nvPicPr>
         <p:blipFill>
           <a:blip r:embed="rId1"/>
-          <a:srcRect l="0" r="0" t="0" b="0"/>
-          <a:stretch/>
+          <a:stretch>
+            <a:fillRect/>
+          </a:stretch>
         </p:blipFill>
         <p:spPr>
           <a:xfrm>
             <a:off x="566928" y="1920240"/>
-            <a:ext cx="6858000" cy="2637692"/>
+            <a:ext cx="6858000" cy="2541335"/>
           </a:xfrm>
           <a:prstGeom prst="rect">
             <a:avLst/>
@@ -6068,7 +5980,7 @@
               <a:buNone/>
             </a:pPr>
             <a:r>
-              <a:rPr lang="en-US" sz="1400" b="1" dirty="0">
+              <a:rPr lang="en-US" sz="1600" b="1" dirty="0">
                 <a:solidFill>
                   <a:srgbClr val="3B6E43"/>
                 </a:solidFill>
@@ -6078,7 +5990,7 @@
               </a:rPr>
               <a:t>The positive control</a:t>
             </a:r>
-            <a:endParaRPr lang="en-US" sz="1400" dirty="0"/>
+            <a:endParaRPr lang="en-US" sz="1600" dirty="0"/>
           </a:p>
         </p:txBody>
       </p:sp>
@@ -6110,7 +6022,7 @@
               <a:buNone/>
             </a:pPr>
             <a:r>
-              <a:rPr lang="en-US" sz="1350" dirty="0">
+              <a:rPr lang="en-US" sz="1550" dirty="0">
                 <a:solidFill>
                   <a:srgbClr val="14212E"/>
                 </a:solidFill>
@@ -6120,7 +6032,7 @@
               </a:rPr>
               <a:t>Each animal is lined up to its own training start day. Up-trained animals (red) rise; down-trained (blue) fall.</a:t>
             </a:r>
-            <a:endParaRPr lang="en-US" sz="1350" dirty="0"/>
+            <a:endParaRPr lang="en-US" sz="1550" dirty="0"/>
           </a:p>
         </p:txBody>
       </p:sp>
@@ -6152,7 +6064,7 @@
               <a:buNone/>
             </a:pPr>
             <a:r>
-              <a:rPr lang="en-US" sz="1350" b="1" dirty="0">
+              <a:rPr lang="en-US" sz="1550" b="1" dirty="0">
                 <a:solidFill>
                   <a:srgbClr val="14212E"/>
                 </a:solidFill>
@@ -6162,7 +6074,7 @@
               </a:rPr>
               <a:t>Three of five clear the 20% criterion in the trained direction.</a:t>
             </a:r>
-            <a:endParaRPr lang="en-US" sz="1350" dirty="0"/>
+            <a:endParaRPr lang="en-US" sz="1550" dirty="0"/>
           </a:p>
         </p:txBody>
       </p:sp>
@@ -6194,7 +6106,7 @@
               <a:buNone/>
             </a:pPr>
             <a:r>
-              <a:rPr lang="en-US" sz="1200" i="1" dirty="0">
+              <a:rPr lang="en-US" sz="1350" i="1" dirty="0">
                 <a:solidFill>
                   <a:srgbClr val="5A6B7B"/>
                 </a:solidFill>
@@ -6202,9 +6114,9 @@
                 <a:ea typeface="Calibri" pitchFamily="34" charset="-122"/>
                 <a:cs typeface="Calibri" pitchFamily="34" charset="-120"/>
               </a:rPr>
-              <a:t>The two that don't become a built-in control later on.</a:t>
-            </a:r>
-            <a:endParaRPr lang="en-US" sz="1200" dirty="0"/>
+              <a:t>The two failures become a built-in control later on.</a:t>
+            </a:r>
+            <a:endParaRPr lang="en-US" sz="1350" dirty="0"/>
           </a:p>
         </p:txBody>
       </p:sp>
@@ -6265,7 +6177,7 @@
               <a:buNone/>
             </a:pPr>
             <a:r>
-              <a:rPr lang="en-US" sz="1150" b="1" spc="320" kern="0" dirty="0">
+              <a:rPr lang="en-US" sz="1300" b="1" spc="320" kern="0" dirty="0">
                 <a:solidFill>
                   <a:srgbClr val="B4671A"/>
                 </a:solidFill>
@@ -6275,7 +6187,7 @@
               </a:rPr>
               <a:t>PART 4 · THE HARD PART</a:t>
             </a:r>
-            <a:endParaRPr lang="en-US" sz="1150" dirty="0"/>
+            <a:endParaRPr lang="en-US" sz="1300" dirty="0"/>
           </a:p>
         </p:txBody>
       </p:sp>
@@ -6328,13 +6240,14 @@
         </p:nvPicPr>
         <p:blipFill>
           <a:blip r:embed="rId1"/>
-          <a:srcRect l="0" r="0" t="0" b="0"/>
-          <a:stretch/>
+          <a:stretch>
+            <a:fillRect/>
+          </a:stretch>
         </p:blipFill>
         <p:spPr>
           <a:xfrm>
-            <a:off x="1220724" y="1874520"/>
-            <a:ext cx="9811512" cy="3383280"/>
+            <a:off x="1875809" y="1874520"/>
+            <a:ext cx="8501342" cy="3383280"/>
           </a:xfrm>
           <a:prstGeom prst="rect">
             <a:avLst/>
@@ -6400,7 +6313,7 @@
               <a:buNone/>
             </a:pPr>
             <a:r>
-              <a:rPr lang="en-US" sz="1450" b="1" dirty="0">
+              <a:rPr lang="en-US" sz="1650" b="1" dirty="0">
                 <a:solidFill>
                   <a:srgbClr val="FFFFFF"/>
                 </a:solidFill>
@@ -6410,7 +6323,7 @@
               </a:rPr>
               <a:t>This is a limit of the study design, not of the data — and it shaped everything we did next.</a:t>
             </a:r>
-            <a:endParaRPr lang="en-US" sz="1450" dirty="0"/>
+            <a:endParaRPr lang="en-US" sz="1650" dirty="0"/>
           </a:p>
         </p:txBody>
       </p:sp>
@@ -6471,7 +6384,7 @@
               <a:buNone/>
             </a:pPr>
             <a:r>
-              <a:rPr lang="en-US" sz="1150" b="1" spc="320" kern="0" dirty="0">
+              <a:rPr lang="en-US" sz="1300" b="1" spc="320" kern="0" dirty="0">
                 <a:solidFill>
                   <a:srgbClr val="A44430"/>
                 </a:solidFill>
@@ -6481,7 +6394,7 @@
               </a:rPr>
               <a:t>PART 4 · RESULT TWO, A NEGATIVE</a:t>
             </a:r>
-            <a:endParaRPr lang="en-US" sz="1150" dirty="0"/>
+            <a:endParaRPr lang="en-US" sz="1300" dirty="0"/>
           </a:p>
         </p:txBody>
       </p:sp>
@@ -6552,7 +6465,7 @@
               <a:buNone/>
             </a:pPr>
             <a:r>
-              <a:rPr lang="en-US" sz="1500" dirty="0">
+              <a:rPr lang="en-US" sz="1700" dirty="0">
                 <a:solidFill>
                   <a:srgbClr val="5A6B7B"/>
                 </a:solidFill>
@@ -6562,7 +6475,7 @@
               </a:rPr>
               <a:t>We measured how far the average brain state moved across training. It moves — but three tests say the movement is the recording, not the animal.</a:t>
             </a:r>
-            <a:endParaRPr lang="en-US" sz="1500" dirty="0"/>
+            <a:endParaRPr lang="en-US" sz="1700" dirty="0"/>
           </a:p>
         </p:txBody>
       </p:sp>
@@ -6628,7 +6541,7 @@
               <a:buNone/>
             </a:pPr>
             <a:r>
-              <a:rPr lang="en-US" sz="1350" b="1" dirty="0">
+              <a:rPr lang="en-US" sz="1550" b="1" dirty="0">
                 <a:solidFill>
                   <a:srgbClr val="14212E"/>
                 </a:solidFill>
@@ -6638,7 +6551,7 @@
               </a:rPr>
               <a:t>Take baseline-only data and pretend half was training</a:t>
             </a:r>
-            <a:endParaRPr lang="en-US" sz="1350" dirty="0"/>
+            <a:endParaRPr lang="en-US" sz="1550" dirty="0"/>
           </a:p>
         </p:txBody>
       </p:sp>
@@ -6670,7 +6583,7 @@
               <a:buNone/>
             </a:pPr>
             <a:r>
-              <a:rPr lang="en-US" sz="1200" dirty="0">
+              <a:rPr lang="en-US" sz="1350" dirty="0">
                 <a:solidFill>
                   <a:srgbClr val="5A6B7B"/>
                 </a:solidFill>
@@ -6680,7 +6593,7 @@
               </a:rPr>
               <a:t>Nothing happened, so it should show no movement</a:t>
             </a:r>
-            <a:endParaRPr lang="en-US" sz="1200" dirty="0"/>
+            <a:endParaRPr lang="en-US" sz="1350" dirty="0"/>
           </a:p>
         </p:txBody>
       </p:sp>
@@ -6712,7 +6625,7 @@
               <a:buNone/>
             </a:pPr>
             <a:r>
-              <a:rPr lang="en-US" sz="1250" b="1" dirty="0">
+              <a:rPr lang="en-US" sz="1400" b="1" dirty="0">
                 <a:solidFill>
                   <a:srgbClr val="A44430"/>
                 </a:solidFill>
@@ -6722,7 +6635,7 @@
               </a:rPr>
               <a:t>Moves just as much — 5 of 6 animals</a:t>
             </a:r>
-            <a:endParaRPr lang="en-US" sz="1250" dirty="0"/>
+            <a:endParaRPr lang="en-US" sz="1400" dirty="0"/>
           </a:p>
         </p:txBody>
       </p:sp>
@@ -6788,7 +6701,7 @@
               <a:buNone/>
             </a:pPr>
             <a:r>
-              <a:rPr lang="en-US" sz="1350" b="1" dirty="0">
+              <a:rPr lang="en-US" sz="1550" b="1" dirty="0">
                 <a:solidFill>
                   <a:srgbClr val="14212E"/>
                 </a:solidFill>
@@ -6798,7 +6711,7 @@
               </a:rPr>
               <a:t>Shuffle which trial belongs to which day</a:t>
             </a:r>
-            <a:endParaRPr lang="en-US" sz="1350" dirty="0"/>
+            <a:endParaRPr lang="en-US" sz="1550" dirty="0"/>
           </a:p>
         </p:txBody>
       </p:sp>
@@ -6830,7 +6743,7 @@
               <a:buNone/>
             </a:pPr>
             <a:r>
-              <a:rPr lang="en-US" sz="1200" dirty="0">
+              <a:rPr lang="en-US" sz="1350" dirty="0">
                 <a:solidFill>
                   <a:srgbClr val="5A6B7B"/>
                 </a:solidFill>
@@ -6840,7 +6753,7 @@
               </a:rPr>
               <a:t>Keeps the numbers, destroys the timeline</a:t>
             </a:r>
-            <a:endParaRPr lang="en-US" sz="1200" dirty="0"/>
+            <a:endParaRPr lang="en-US" sz="1350" dirty="0"/>
           </a:p>
         </p:txBody>
       </p:sp>
@@ -6872,7 +6785,7 @@
               <a:buNone/>
             </a:pPr>
             <a:r>
-              <a:rPr lang="en-US" sz="1250" b="1" dirty="0">
+              <a:rPr lang="en-US" sz="1400" b="1" dirty="0">
                 <a:solidFill>
                   <a:srgbClr val="3B6E43"/>
                 </a:solidFill>
@@ -6882,7 +6795,7 @@
               </a:rPr>
               <a:t>No movement — the measure itself is sound</a:t>
             </a:r>
-            <a:endParaRPr lang="en-US" sz="1250" dirty="0"/>
+            <a:endParaRPr lang="en-US" sz="1400" dirty="0"/>
           </a:p>
         </p:txBody>
       </p:sp>
@@ -6948,7 +6861,7 @@
               <a:buNone/>
             </a:pPr>
             <a:r>
-              <a:rPr lang="en-US" sz="1350" b="1" dirty="0">
+              <a:rPr lang="en-US" sz="1550" b="1" dirty="0">
                 <a:solidFill>
                   <a:srgbClr val="14212E"/>
                 </a:solidFill>
@@ -6958,7 +6871,7 @@
               </a:rPr>
               <a:t>Compare animals trained up against trained down</a:t>
             </a:r>
-            <a:endParaRPr lang="en-US" sz="1350" dirty="0"/>
+            <a:endParaRPr lang="en-US" sz="1550" dirty="0"/>
           </a:p>
         </p:txBody>
       </p:sp>
@@ -6990,7 +6903,7 @@
               <a:buNone/>
             </a:pPr>
             <a:r>
-              <a:rPr lang="en-US" sz="1200" dirty="0">
+              <a:rPr lang="en-US" sz="1350" dirty="0">
                 <a:solidFill>
                   <a:srgbClr val="5A6B7B"/>
                 </a:solidFill>
@@ -7000,7 +6913,7 @@
               </a:rPr>
               <a:t>Electrode drift doesn't care which way you trained</a:t>
             </a:r>
-            <a:endParaRPr lang="en-US" sz="1200" dirty="0"/>
+            <a:endParaRPr lang="en-US" sz="1350" dirty="0"/>
           </a:p>
         </p:txBody>
       </p:sp>
@@ -7032,7 +6945,7 @@
               <a:buNone/>
             </a:pPr>
             <a:r>
-              <a:rPr lang="en-US" sz="1250" b="1" dirty="0">
+              <a:rPr lang="en-US" sz="1400" b="1" dirty="0">
                 <a:solidFill>
                   <a:srgbClr val="A44430"/>
                 </a:solidFill>
@@ -7042,7 +6955,7 @@
               </a:rPr>
               <a:t>No difference between the groups</a:t>
             </a:r>
-            <a:endParaRPr lang="en-US" sz="1250" dirty="0"/>
+            <a:endParaRPr lang="en-US" sz="1400" dirty="0"/>
           </a:p>
         </p:txBody>
       </p:sp>
@@ -7071,7 +6984,7 @@
               <a:buNone/>
             </a:pPr>
             <a:r>
-              <a:rPr lang="en-US" sz="1250" i="1" dirty="0">
+              <a:rPr lang="en-US" sz="1400" i="1" dirty="0">
                 <a:solidFill>
                   <a:srgbClr val="5A6B7B"/>
                 </a:solidFill>
@@ -7079,9 +6992,9 @@
                 <a:ea typeface="Calibri" pitchFamily="34" charset="-122"/>
                 <a:cs typeface="Calibri" pitchFamily="34" charset="-120"/>
               </a:rPr>
-              <a:t>Two of these three were Dr. Carp's suggestions. They changed our conclusion.</a:t>
-            </a:r>
-            <a:endParaRPr lang="en-US" sz="1250" dirty="0"/>
+              <a:t>These controls changed our conclusion.</a:t>
+            </a:r>
+            <a:endParaRPr lang="en-US" sz="1400" dirty="0"/>
           </a:p>
         </p:txBody>
       </p:sp>
@@ -7142,7 +7055,7 @@
               <a:buNone/>
             </a:pPr>
             <a:r>
-              <a:rPr lang="en-US" sz="1150" b="1" spc="320" kern="0" dirty="0">
+              <a:rPr lang="en-US" sz="1300" b="1" spc="320" kern="0" dirty="0">
                 <a:solidFill>
                   <a:srgbClr val="15718F"/>
                 </a:solidFill>
@@ -7152,7 +7065,7 @@
               </a:rPr>
               <a:t>PART 4 · THE IDEA</a:t>
             </a:r>
-            <a:endParaRPr lang="en-US" sz="1150" dirty="0"/>
+            <a:endParaRPr lang="en-US" sz="1300" dirty="0"/>
           </a:p>
         </p:txBody>
       </p:sp>
@@ -7189,7 +7102,7 @@
                 <a:ea typeface="Cambria" pitchFamily="34" charset="-122"/>
                 <a:cs typeface="Cambria" pitchFamily="34" charset="-120"/>
               </a:rPr>
-              <a:t>So we asked a question drift cannot fake</a:t>
+              <a:t>So we asked a question that drift cannot fake</a:t>
             </a:r>
             <a:endParaRPr lang="en-US" sz="3000" dirty="0"/>
           </a:p>
@@ -7254,7 +7167,7 @@
               <a:buNone/>
             </a:pPr>
             <a:r>
-              <a:rPr lang="en-US" sz="1250" b="1" dirty="0">
+              <a:rPr lang="en-US" sz="1400" b="1" dirty="0">
                 <a:solidFill>
                   <a:srgbClr val="9AA8B4"/>
                 </a:solidFill>
@@ -7264,7 +7177,7 @@
               </a:rPr>
               <a:t>Instead of</a:t>
             </a:r>
-            <a:endParaRPr lang="en-US" sz="1250" dirty="0"/>
+            <a:endParaRPr lang="en-US" sz="1400" dirty="0"/>
           </a:p>
         </p:txBody>
       </p:sp>
@@ -7369,7 +7282,7 @@
               <a:buNone/>
             </a:pPr>
             <a:r>
-              <a:rPr lang="en-US" sz="1250" b="1" dirty="0">
+              <a:rPr lang="en-US" sz="1400" b="1" dirty="0">
                 <a:solidFill>
                   <a:srgbClr val="15718F"/>
                 </a:solidFill>
@@ -7379,7 +7292,7 @@
               </a:rPr>
               <a:t>We ask</a:t>
             </a:r>
-            <a:endParaRPr lang="en-US" sz="1250" dirty="0"/>
+            <a:endParaRPr lang="en-US" sz="1400" dirty="0"/>
           </a:p>
         </p:txBody>
       </p:sp>
@@ -7435,13 +7348,14 @@
         </p:nvPicPr>
         <p:blipFill>
           <a:blip r:embed="rId1"/>
-          <a:srcRect l="0" r="0" t="0" b="0"/>
-          <a:stretch/>
+          <a:stretch>
+            <a:fillRect/>
+          </a:stretch>
         </p:blipFill>
         <p:spPr>
           <a:xfrm>
-            <a:off x="2161642" y="3520440"/>
-            <a:ext cx="7929677" cy="2926080"/>
+            <a:off x="2675873" y="3520440"/>
+            <a:ext cx="6901214" cy="2926080"/>
           </a:xfrm>
           <a:prstGeom prst="rect">
             <a:avLst/>
@@ -7505,7 +7419,7 @@
               <a:buNone/>
             </a:pPr>
             <a:r>
-              <a:rPr lang="en-US" sz="1150" b="1" spc="320" kern="0" dirty="0">
+              <a:rPr lang="en-US" sz="1300" b="1" spc="320" kern="0" dirty="0">
                 <a:solidFill>
                   <a:srgbClr val="9AA8B4"/>
                 </a:solidFill>
@@ -7515,7 +7429,7 @@
               </a:rPr>
               <a:t>WHAT WE'LL COVER</a:t>
             </a:r>
-            <a:endParaRPr lang="en-US" sz="1150" dirty="0"/>
+            <a:endParaRPr lang="en-US" sz="1300" dirty="0"/>
           </a:p>
         </p:txBody>
       </p:sp>
@@ -7660,23 +7574,23 @@
         <p:spPr>
           <a:xfrm>
             <a:off x="1572768" y="1956816"/>
-            <a:ext cx="2926080" cy="594360"/>
-          </a:xfrm>
-          <a:prstGeom prst="rect">
-            <a:avLst/>
-          </a:prstGeom>
-          <a:noFill/>
-          <a:ln/>
-        </p:spPr>
-        <p:txBody>
-          <a:bodyPr wrap="square" lIns="0" tIns="0" rIns="0" bIns="0" rtlCol="0" anchor="ctr"/>
-          <a:lstStyle/>
-          <a:p>
-            <a:pPr indent="0" marL="0">
-              <a:buNone/>
-            </a:pPr>
-            <a:r>
-              <a:rPr lang="en-US" sz="1900" b="1" dirty="0">
+            <a:ext cx="3108960" cy="640080"/>
+          </a:xfrm>
+          <a:prstGeom prst="rect">
+            <a:avLst/>
+          </a:prstGeom>
+          <a:noFill/>
+          <a:ln/>
+        </p:spPr>
+        <p:txBody>
+          <a:bodyPr wrap="square" lIns="0" tIns="0" rIns="0" bIns="0" rtlCol="0" anchor="ctr"/>
+          <a:lstStyle/>
+          <a:p>
+            <a:pPr indent="0" marL="0">
+              <a:buNone/>
+            </a:pPr>
+            <a:r>
+              <a:rPr lang="en-US" sz="2300" b="1" dirty="0">
                 <a:solidFill>
                   <a:srgbClr val="14212E"/>
                 </a:solidFill>
@@ -7686,7 +7600,7 @@
               </a:rPr>
               <a:t>The question</a:t>
             </a:r>
-            <a:endParaRPr lang="en-US" sz="1900" dirty="0"/>
+            <a:endParaRPr lang="en-US" sz="2300" dirty="0"/>
           </a:p>
         </p:txBody>
       </p:sp>
@@ -7699,23 +7613,23 @@
         <p:spPr>
           <a:xfrm>
             <a:off x="4663440" y="1956816"/>
-            <a:ext cx="6583680" cy="594360"/>
-          </a:xfrm>
-          <a:prstGeom prst="rect">
-            <a:avLst/>
-          </a:prstGeom>
-          <a:noFill/>
-          <a:ln/>
-        </p:spPr>
-        <p:txBody>
-          <a:bodyPr wrap="square" lIns="0" tIns="0" rIns="0" bIns="0" rtlCol="0" anchor="ctr"/>
-          <a:lstStyle/>
-          <a:p>
-            <a:pPr indent="0" marL="0">
-              <a:buNone/>
-            </a:pPr>
-            <a:r>
-              <a:rPr lang="en-US" sz="1350" dirty="0">
+            <a:ext cx="6583680" cy="640080"/>
+          </a:xfrm>
+          <a:prstGeom prst="rect">
+            <a:avLst/>
+          </a:prstGeom>
+          <a:noFill/>
+          <a:ln/>
+        </p:spPr>
+        <p:txBody>
+          <a:bodyPr wrap="square" lIns="0" tIns="0" rIns="0" bIns="0" rtlCol="0" anchor="ctr"/>
+          <a:lstStyle/>
+          <a:p>
+            <a:pPr indent="0" marL="0">
+              <a:buNone/>
+            </a:pPr>
+            <a:r>
+              <a:rPr lang="en-US" sz="1600" dirty="0">
                 <a:solidFill>
                   <a:srgbClr val="5A6B7B"/>
                 </a:solidFill>
@@ -7725,7 +7639,7 @@
               </a:rPr>
               <a:t>what conditioning is, and what was already known</a:t>
             </a:r>
-            <a:endParaRPr lang="en-US" sz="1350" dirty="0"/>
+            <a:endParaRPr lang="en-US" sz="1600" dirty="0"/>
           </a:p>
         </p:txBody>
       </p:sp>
@@ -7831,23 +7745,23 @@
         <p:spPr>
           <a:xfrm>
             <a:off x="1572768" y="2935224"/>
-            <a:ext cx="2926080" cy="594360"/>
-          </a:xfrm>
-          <a:prstGeom prst="rect">
-            <a:avLst/>
-          </a:prstGeom>
-          <a:noFill/>
-          <a:ln/>
-        </p:spPr>
-        <p:txBody>
-          <a:bodyPr wrap="square" lIns="0" tIns="0" rIns="0" bIns="0" rtlCol="0" anchor="ctr"/>
-          <a:lstStyle/>
-          <a:p>
-            <a:pPr indent="0" marL="0">
-              <a:buNone/>
-            </a:pPr>
-            <a:r>
-              <a:rPr lang="en-US" sz="1900" b="1" dirty="0">
+            <a:ext cx="3108960" cy="640080"/>
+          </a:xfrm>
+          <a:prstGeom prst="rect">
+            <a:avLst/>
+          </a:prstGeom>
+          <a:noFill/>
+          <a:ln/>
+        </p:spPr>
+        <p:txBody>
+          <a:bodyPr wrap="square" lIns="0" tIns="0" rIns="0" bIns="0" rtlCol="0" anchor="ctr"/>
+          <a:lstStyle/>
+          <a:p>
+            <a:pPr indent="0" marL="0">
+              <a:buNone/>
+            </a:pPr>
+            <a:r>
+              <a:rPr lang="en-US" sz="2300" b="1" dirty="0">
                 <a:solidFill>
                   <a:srgbClr val="14212E"/>
                 </a:solidFill>
@@ -7857,7 +7771,7 @@
               </a:rPr>
               <a:t>The data</a:t>
             </a:r>
-            <a:endParaRPr lang="en-US" sz="1900" dirty="0"/>
+            <a:endParaRPr lang="en-US" sz="2300" dirty="0"/>
           </a:p>
         </p:txBody>
       </p:sp>
@@ -7870,23 +7784,23 @@
         <p:spPr>
           <a:xfrm>
             <a:off x="4663440" y="2935224"/>
-            <a:ext cx="6583680" cy="594360"/>
-          </a:xfrm>
-          <a:prstGeom prst="rect">
-            <a:avLst/>
-          </a:prstGeom>
-          <a:noFill/>
-          <a:ln/>
-        </p:spPr>
-        <p:txBody>
-          <a:bodyPr wrap="square" lIns="0" tIns="0" rIns="0" bIns="0" rtlCol="0" anchor="ctr"/>
-          <a:lstStyle/>
-          <a:p>
-            <a:pPr indent="0" marL="0">
-              <a:buNone/>
-            </a:pPr>
-            <a:r>
-              <a:rPr lang="en-US" sz="1350" dirty="0">
+            <a:ext cx="6583680" cy="640080"/>
+          </a:xfrm>
+          <a:prstGeom prst="rect">
+            <a:avLst/>
+          </a:prstGeom>
+          <a:noFill/>
+          <a:ln/>
+        </p:spPr>
+        <p:txBody>
+          <a:bodyPr wrap="square" lIns="0" tIns="0" rIns="0" bIns="0" rtlCol="0" anchor="ctr"/>
+          <a:lstStyle/>
+          <a:p>
+            <a:pPr indent="0" marL="0">
+              <a:buNone/>
+            </a:pPr>
+            <a:r>
+              <a:rPr lang="en-US" sz="1600" dirty="0">
                 <a:solidFill>
                   <a:srgbClr val="5A6B7B"/>
                 </a:solidFill>
@@ -7896,7 +7810,7 @@
               </a:rPr>
               <a:t>one trial, six animals, and a broken decoder</a:t>
             </a:r>
-            <a:endParaRPr lang="en-US" sz="1350" dirty="0"/>
+            <a:endParaRPr lang="en-US" sz="1600" dirty="0"/>
           </a:p>
         </p:txBody>
       </p:sp>
@@ -8002,23 +7916,23 @@
         <p:spPr>
           <a:xfrm>
             <a:off x="1572768" y="3913632"/>
-            <a:ext cx="2926080" cy="594360"/>
-          </a:xfrm>
-          <a:prstGeom prst="rect">
-            <a:avLst/>
-          </a:prstGeom>
-          <a:noFill/>
-          <a:ln/>
-        </p:spPr>
-        <p:txBody>
-          <a:bodyPr wrap="square" lIns="0" tIns="0" rIns="0" bIns="0" rtlCol="0" anchor="ctr"/>
-          <a:lstStyle/>
-          <a:p>
-            <a:pPr indent="0" marL="0">
-              <a:buNone/>
-            </a:pPr>
-            <a:r>
-              <a:rPr lang="en-US" sz="1900" b="1" dirty="0">
+            <a:ext cx="3108960" cy="640080"/>
+          </a:xfrm>
+          <a:prstGeom prst="rect">
+            <a:avLst/>
+          </a:prstGeom>
+          <a:noFill/>
+          <a:ln/>
+        </p:spPr>
+        <p:txBody>
+          <a:bodyPr wrap="square" lIns="0" tIns="0" rIns="0" bIns="0" rtlCol="0" anchor="ctr"/>
+          <a:lstStyle/>
+          <a:p>
+            <a:pPr indent="0" marL="0">
+              <a:buNone/>
+            </a:pPr>
+            <a:r>
+              <a:rPr lang="en-US" sz="2300" b="1" dirty="0">
                 <a:solidFill>
                   <a:srgbClr val="14212E"/>
                 </a:solidFill>
@@ -8028,7 +7942,7 @@
               </a:rPr>
               <a:t>How we built it</a:t>
             </a:r>
-            <a:endParaRPr lang="en-US" sz="1900" dirty="0"/>
+            <a:endParaRPr lang="en-US" sz="2300" dirty="0"/>
           </a:p>
         </p:txBody>
       </p:sp>
@@ -8041,23 +7955,23 @@
         <p:spPr>
           <a:xfrm>
             <a:off x="4663440" y="3913632"/>
-            <a:ext cx="6583680" cy="594360"/>
-          </a:xfrm>
-          <a:prstGeom prst="rect">
-            <a:avLst/>
-          </a:prstGeom>
-          <a:noFill/>
-          <a:ln/>
-        </p:spPr>
-        <p:txBody>
-          <a:bodyPr wrap="square" lIns="0" tIns="0" rIns="0" bIns="0" rtlCol="0" anchor="ctr"/>
-          <a:lstStyle/>
-          <a:p>
-            <a:pPr indent="0" marL="0">
-              <a:buNone/>
-            </a:pPr>
-            <a:r>
-              <a:rPr lang="en-US" sz="1350" dirty="0">
+            <a:ext cx="6583680" cy="640080"/>
+          </a:xfrm>
+          <a:prstGeom prst="rect">
+            <a:avLst/>
+          </a:prstGeom>
+          <a:noFill/>
+          <a:ln/>
+        </p:spPr>
+        <p:txBody>
+          <a:bodyPr wrap="square" lIns="0" tIns="0" rIns="0" bIns="0" rtlCol="0" anchor="ctr"/>
+          <a:lstStyle/>
+          <a:p>
+            <a:pPr indent="0" marL="0">
+              <a:buNone/>
+            </a:pPr>
+            <a:r>
+              <a:rPr lang="en-US" sz="1600" dirty="0">
                 <a:solidFill>
                   <a:srgbClr val="5A6B7B"/>
                 </a:solidFill>
@@ -8067,7 +7981,7 @@
               </a:rPr>
               <a:t>the model, the stack, the daily workflow</a:t>
             </a:r>
-            <a:endParaRPr lang="en-US" sz="1350" dirty="0"/>
+            <a:endParaRPr lang="en-US" sz="1600" dirty="0"/>
           </a:p>
         </p:txBody>
       </p:sp>
@@ -8173,23 +8087,23 @@
         <p:spPr>
           <a:xfrm>
             <a:off x="1572768" y="4892040"/>
-            <a:ext cx="2926080" cy="594360"/>
-          </a:xfrm>
-          <a:prstGeom prst="rect">
-            <a:avLst/>
-          </a:prstGeom>
-          <a:noFill/>
-          <a:ln/>
-        </p:spPr>
-        <p:txBody>
-          <a:bodyPr wrap="square" lIns="0" tIns="0" rIns="0" bIns="0" rtlCol="0" anchor="ctr"/>
-          <a:lstStyle/>
-          <a:p>
-            <a:pPr indent="0" marL="0">
-              <a:buNone/>
-            </a:pPr>
-            <a:r>
-              <a:rPr lang="en-US" sz="1900" b="1" dirty="0">
+            <a:ext cx="3108960" cy="640080"/>
+          </a:xfrm>
+          <a:prstGeom prst="rect">
+            <a:avLst/>
+          </a:prstGeom>
+          <a:noFill/>
+          <a:ln/>
+        </p:spPr>
+        <p:txBody>
+          <a:bodyPr wrap="square" lIns="0" tIns="0" rIns="0" bIns="0" rtlCol="0" anchor="ctr"/>
+          <a:lstStyle/>
+          <a:p>
+            <a:pPr indent="0" marL="0">
+              <a:buNone/>
+            </a:pPr>
+            <a:r>
+              <a:rPr lang="en-US" sz="2300" b="1" dirty="0">
                 <a:solidFill>
                   <a:srgbClr val="14212E"/>
                 </a:solidFill>
@@ -8199,7 +8113,7 @@
               </a:rPr>
               <a:t>What we found</a:t>
             </a:r>
-            <a:endParaRPr lang="en-US" sz="1900" dirty="0"/>
+            <a:endParaRPr lang="en-US" sz="2300" dirty="0"/>
           </a:p>
         </p:txBody>
       </p:sp>
@@ -8212,23 +8126,23 @@
         <p:spPr>
           <a:xfrm>
             <a:off x="4663440" y="4892040"/>
-            <a:ext cx="6583680" cy="594360"/>
-          </a:xfrm>
-          <a:prstGeom prst="rect">
-            <a:avLst/>
-          </a:prstGeom>
-          <a:noFill/>
-          <a:ln/>
-        </p:spPr>
-        <p:txBody>
-          <a:bodyPr wrap="square" lIns="0" tIns="0" rIns="0" bIns="0" rtlCol="0" anchor="ctr"/>
-          <a:lstStyle/>
-          <a:p>
-            <a:pPr indent="0" marL="0">
-              <a:buNone/>
-            </a:pPr>
-            <a:r>
-              <a:rPr lang="en-US" sz="1350" dirty="0">
+            <a:ext cx="6583680" cy="640080"/>
+          </a:xfrm>
+          <a:prstGeom prst="rect">
+            <a:avLst/>
+          </a:prstGeom>
+          <a:noFill/>
+          <a:ln/>
+        </p:spPr>
+        <p:txBody>
+          <a:bodyPr wrap="square" lIns="0" tIns="0" rIns="0" bIns="0" rtlCol="0" anchor="ctr"/>
+          <a:lstStyle/>
+          <a:p>
+            <a:pPr indent="0" marL="0">
+              <a:buNone/>
+            </a:pPr>
+            <a:r>
+              <a:rPr lang="en-US" sz="1600" dirty="0">
                 <a:solidFill>
                   <a:srgbClr val="5A6B7B"/>
                 </a:solidFill>
@@ -8238,7 +8152,7 @@
               </a:rPr>
               <a:t>two results, one negative, and the controls</a:t>
             </a:r>
-            <a:endParaRPr lang="en-US" sz="1350" dirty="0"/>
+            <a:endParaRPr lang="en-US" sz="1600" dirty="0"/>
           </a:p>
         </p:txBody>
       </p:sp>
@@ -8344,23 +8258,23 @@
         <p:spPr>
           <a:xfrm>
             <a:off x="1572768" y="5870448"/>
-            <a:ext cx="2926080" cy="594360"/>
-          </a:xfrm>
-          <a:prstGeom prst="rect">
-            <a:avLst/>
-          </a:prstGeom>
-          <a:noFill/>
-          <a:ln/>
-        </p:spPr>
-        <p:txBody>
-          <a:bodyPr wrap="square" lIns="0" tIns="0" rIns="0" bIns="0" rtlCol="0" anchor="ctr"/>
-          <a:lstStyle/>
-          <a:p>
-            <a:pPr indent="0" marL="0">
-              <a:buNone/>
-            </a:pPr>
-            <a:r>
-              <a:rPr lang="en-US" sz="1900" b="1" dirty="0">
+            <a:ext cx="3108960" cy="640080"/>
+          </a:xfrm>
+          <a:prstGeom prst="rect">
+            <a:avLst/>
+          </a:prstGeom>
+          <a:noFill/>
+          <a:ln/>
+        </p:spPr>
+        <p:txBody>
+          <a:bodyPr wrap="square" lIns="0" tIns="0" rIns="0" bIns="0" rtlCol="0" anchor="ctr"/>
+          <a:lstStyle/>
+          <a:p>
+            <a:pPr indent="0" marL="0">
+              <a:buNone/>
+            </a:pPr>
+            <a:r>
+              <a:rPr lang="en-US" sz="2300" b="1" dirty="0">
                 <a:solidFill>
                   <a:srgbClr val="14212E"/>
                 </a:solidFill>
@@ -8370,7 +8284,7 @@
               </a:rPr>
               <a:t>Where it goes</a:t>
             </a:r>
-            <a:endParaRPr lang="en-US" sz="1900" dirty="0"/>
+            <a:endParaRPr lang="en-US" sz="2300" dirty="0"/>
           </a:p>
         </p:txBody>
       </p:sp>
@@ -8383,23 +8297,23 @@
         <p:spPr>
           <a:xfrm>
             <a:off x="4663440" y="5870448"/>
-            <a:ext cx="6583680" cy="594360"/>
-          </a:xfrm>
-          <a:prstGeom prst="rect">
-            <a:avLst/>
-          </a:prstGeom>
-          <a:noFill/>
-          <a:ln/>
-        </p:spPr>
-        <p:txBody>
-          <a:bodyPr wrap="square" lIns="0" tIns="0" rIns="0" bIns="0" rtlCol="0" anchor="ctr"/>
-          <a:lstStyle/>
-          <a:p>
-            <a:pPr indent="0" marL="0">
-              <a:buNone/>
-            </a:pPr>
-            <a:r>
-              <a:rPr lang="en-US" sz="1350" dirty="0">
+            <a:ext cx="6583680" cy="640080"/>
+          </a:xfrm>
+          <a:prstGeom prst="rect">
+            <a:avLst/>
+          </a:prstGeom>
+          <a:noFill/>
+          <a:ln/>
+        </p:spPr>
+        <p:txBody>
+          <a:bodyPr wrap="square" lIns="0" tIns="0" rIns="0" bIns="0" rtlCol="0" anchor="ctr"/>
+          <a:lstStyle/>
+          <a:p>
+            <a:pPr indent="0" marL="0">
+              <a:buNone/>
+            </a:pPr>
+            <a:r>
+              <a:rPr lang="en-US" sz="1600" dirty="0">
                 <a:solidFill>
                   <a:srgbClr val="5A6B7B"/>
                 </a:solidFill>
@@ -8409,7 +8323,7 @@
               </a:rPr>
               <a:t>what we'd publish, and what it's useful for</a:t>
             </a:r>
-            <a:endParaRPr lang="en-US" sz="1350" dirty="0"/>
+            <a:endParaRPr lang="en-US" sz="1600" dirty="0"/>
           </a:p>
         </p:txBody>
       </p:sp>
@@ -8470,7 +8384,7 @@
               <a:buNone/>
             </a:pPr>
             <a:r>
-              <a:rPr lang="en-US" sz="1150" b="1" spc="320" kern="0" dirty="0">
+              <a:rPr lang="en-US" sz="1300" b="1" spc="320" kern="0" dirty="0">
                 <a:solidFill>
                   <a:srgbClr val="15718F"/>
                 </a:solidFill>
@@ -8480,7 +8394,7 @@
               </a:rPr>
               <a:t>PART 4 · THE CONTROL</a:t>
             </a:r>
-            <a:endParaRPr lang="en-US" sz="1150" dirty="0"/>
+            <a:endParaRPr lang="en-US" sz="1300" dirty="0"/>
           </a:p>
         </p:txBody>
       </p:sp>
@@ -8533,13 +8447,14 @@
         </p:nvPicPr>
         <p:blipFill>
           <a:blip r:embed="rId1"/>
-          <a:srcRect l="0" r="0" t="0" b="0"/>
-          <a:stretch/>
+          <a:stretch>
+            <a:fillRect/>
+          </a:stretch>
         </p:blipFill>
         <p:spPr>
           <a:xfrm>
-            <a:off x="955548" y="1920240"/>
-            <a:ext cx="10341864" cy="3566160"/>
+            <a:off x="1317187" y="1920240"/>
+            <a:ext cx="9618586" cy="3566160"/>
           </a:xfrm>
           <a:prstGeom prst="rect">
             <a:avLst/>
@@ -8605,7 +8520,7 @@
               <a:buNone/>
             </a:pPr>
             <a:r>
-              <a:rPr lang="en-US" sz="1350" dirty="0">
+              <a:rPr lang="en-US" sz="1550" dirty="0">
                 <a:solidFill>
                   <a:srgbClr val="14212E"/>
                 </a:solidFill>
@@ -8613,9 +8528,9 @@
                 <a:ea typeface="Calibri" pitchFamily="34" charset="-122"/>
                 <a:cs typeface="Calibri" pitchFamily="34" charset="-120"/>
               </a:rPr>
-              <a:t>We repeat this in all 101 windows across five animals. A window only counts if the real data beats its own shuffled twin.</a:t>
-            </a:r>
-            <a:endParaRPr lang="en-US" sz="1350" dirty="0"/>
+              <a:t>We repeat this in all 101 windows across five animals. A window counts only if the real data beats its own shuffled version.</a:t>
+            </a:r>
+            <a:endParaRPr lang="en-US" sz="1550" dirty="0"/>
           </a:p>
         </p:txBody>
       </p:sp>
@@ -8676,7 +8591,7 @@
               <a:buNone/>
             </a:pPr>
             <a:r>
-              <a:rPr lang="en-US" sz="1150" b="1" spc="320" kern="0" dirty="0">
+              <a:rPr lang="en-US" sz="1300" b="1" spc="320" kern="0" dirty="0">
                 <a:solidFill>
                   <a:srgbClr val="3B6E43"/>
                 </a:solidFill>
@@ -8686,7 +8601,7 @@
               </a:rPr>
               <a:t>PART 4 · RESULT THREE, THE FINDING</a:t>
             </a:r>
-            <a:endParaRPr lang="en-US" sz="1150" dirty="0"/>
+            <a:endParaRPr lang="en-US" sz="1300" dirty="0"/>
           </a:p>
         </p:txBody>
       </p:sp>
@@ -8739,13 +8654,14 @@
         </p:nvPicPr>
         <p:blipFill>
           <a:blip r:embed="rId1"/>
-          <a:srcRect l="0" r="0" t="0" b="0"/>
-          <a:stretch/>
+          <a:stretch>
+            <a:fillRect/>
+          </a:stretch>
         </p:blipFill>
         <p:spPr>
           <a:xfrm>
             <a:off x="566928" y="1920240"/>
-            <a:ext cx="6327648" cy="3657600"/>
+            <a:ext cx="6327648" cy="3655974"/>
           </a:xfrm>
           <a:prstGeom prst="rect">
             <a:avLst/>
@@ -8853,7 +8769,7 @@
               <a:buNone/>
             </a:pPr>
             <a:r>
-              <a:rPr lang="en-US" sz="1250" dirty="0">
+              <a:rPr lang="en-US" sz="1400" dirty="0">
                 <a:solidFill>
                   <a:srgbClr val="5A6B7B"/>
                 </a:solidFill>
@@ -8863,7 +8779,7 @@
               </a:rPr>
               <a:t>windows where the real data beat its own shuffled version</a:t>
             </a:r>
-            <a:endParaRPr lang="en-US" sz="1250" dirty="0"/>
+            <a:endParaRPr lang="en-US" sz="1400" dirty="0"/>
           </a:p>
         </p:txBody>
       </p:sp>
@@ -8892,7 +8808,7 @@
               <a:buNone/>
             </a:pPr>
             <a:r>
-              <a:rPr lang="en-US" sz="1350" b="1" dirty="0">
+              <a:rPr lang="en-US" sz="1550" b="1" dirty="0">
                 <a:solidFill>
                   <a:srgbClr val="14212E"/>
                 </a:solidFill>
@@ -8902,7 +8818,7 @@
               </a:rPr>
               <a:t>Present in all five animals.</a:t>
             </a:r>
-            <a:endParaRPr lang="en-US" sz="1350" dirty="0"/>
+            <a:endParaRPr lang="en-US" sz="1550" dirty="0"/>
           </a:p>
         </p:txBody>
       </p:sp>
@@ -8931,7 +8847,7 @@
               <a:buNone/>
             </a:pPr>
             <a:r>
-              <a:rPr lang="en-US" sz="1200" dirty="0">
+              <a:rPr lang="en-US" sz="1350" dirty="0">
                 <a:solidFill>
                   <a:srgbClr val="5A6B7B"/>
                 </a:solidFill>
@@ -8941,7 +8857,7 @@
               </a:rPr>
               <a:t>Counting the animal as the unit of analysis:</a:t>
             </a:r>
-            <a:endParaRPr lang="en-US" sz="1200" dirty="0"/>
+            <a:endParaRPr lang="en-US" sz="1350" dirty="0"/>
           </a:p>
         </p:txBody>
       </p:sp>
@@ -8970,7 +8886,7 @@
               <a:buNone/>
             </a:pPr>
             <a:r>
-              <a:rPr lang="en-US" sz="1500" b="1" dirty="0">
+              <a:rPr lang="en-US" sz="1700" b="1" dirty="0">
                 <a:solidFill>
                   <a:srgbClr val="14212E"/>
                 </a:solidFill>
@@ -8980,7 +8896,7 @@
               </a:rPr>
               <a:t>t(4) = 3.81,  p = 0.019</a:t>
             </a:r>
-            <a:endParaRPr lang="en-US" sz="1500" dirty="0"/>
+            <a:endParaRPr lang="en-US" sz="1700" dirty="0"/>
           </a:p>
         </p:txBody>
       </p:sp>
@@ -9012,7 +8928,7 @@
               <a:buNone/>
             </a:pPr>
             <a:r>
-              <a:rPr lang="en-US" sz="1250" i="1" dirty="0">
+              <a:rPr lang="en-US" sz="1400" i="1" dirty="0">
                 <a:solidFill>
                   <a:srgbClr val="3B6E43"/>
                 </a:solidFill>
@@ -9022,7 +8938,7 @@
               </a:rPr>
               <a:t>Small in size, but almost never absent.</a:t>
             </a:r>
-            <a:endParaRPr lang="en-US" sz="1250" dirty="0"/>
+            <a:endParaRPr lang="en-US" sz="1400" dirty="0"/>
           </a:p>
         </p:txBody>
       </p:sp>
@@ -9083,7 +8999,7 @@
               <a:buNone/>
             </a:pPr>
             <a:r>
-              <a:rPr lang="en-US" sz="1150" b="1" spc="320" kern="0" dirty="0">
+              <a:rPr lang="en-US" sz="1300" b="1" spc="320" kern="0" dirty="0">
                 <a:solidFill>
                   <a:srgbClr val="9AA8B4"/>
                 </a:solidFill>
@@ -9093,7 +9009,7 @@
               </a:rPr>
               <a:t>PART 4 · IN PROPORTION</a:t>
             </a:r>
-            <a:endParaRPr lang="en-US" sz="1150" dirty="0"/>
+            <a:endParaRPr lang="en-US" sz="1300" dirty="0"/>
           </a:p>
         </p:txBody>
       </p:sp>
@@ -9164,7 +9080,7 @@
               <a:buNone/>
             </a:pPr>
             <a:r>
-              <a:rPr lang="en-US" sz="1500" dirty="0">
+              <a:rPr lang="en-US" sz="1700" dirty="0">
                 <a:solidFill>
                   <a:srgbClr val="5A6B7B"/>
                 </a:solidFill>
@@ -9172,9 +9088,9 @@
                 <a:ea typeface="Calibri" pitchFamily="34" charset="-122"/>
                 <a:cs typeface="Calibri" pitchFamily="34" charset="-120"/>
               </a:rPr>
-              <a:t>Dr. Carp asked us to split the variance up. The stimulus dominates, and the brain overlaps with it heavily.</a:t>
-            </a:r>
-            <a:endParaRPr lang="en-US" sz="1500" dirty="0"/>
+              <a:t>When parsing the variance in reflex size, the stimulus dominates, and the brain overlaps with it heavily.</a:t>
+            </a:r>
+            <a:endParaRPr lang="en-US" sz="1700" dirty="0"/>
           </a:p>
         </p:txBody>
       </p:sp>
@@ -9188,13 +9104,14 @@
         </p:nvPicPr>
         <p:blipFill>
           <a:blip r:embed="rId1"/>
-          <a:srcRect l="0" r="0" t="0" b="0"/>
-          <a:stretch/>
+          <a:stretch>
+            <a:fillRect/>
+          </a:stretch>
         </p:blipFill>
         <p:spPr>
           <a:xfrm>
-            <a:off x="685800" y="2240280"/>
-            <a:ext cx="10881360" cy="2615712"/>
+            <a:off x="1263288" y="2240280"/>
+            <a:ext cx="9726384" cy="2615712"/>
           </a:xfrm>
           <a:prstGeom prst="rect">
             <a:avLst/>
@@ -9260,7 +9177,7 @@
               <a:buNone/>
             </a:pPr>
             <a:r>
-              <a:rPr lang="en-US" sz="1400" b="1" dirty="0">
+              <a:rPr lang="en-US" sz="1600" b="1" dirty="0">
                 <a:solidFill>
                   <a:srgbClr val="15718F"/>
                 </a:solidFill>
@@ -9270,7 +9187,7 @@
               </a:rPr>
               <a:t>Why the brain's own 21% collapses to 2%</a:t>
             </a:r>
-            <a:endParaRPr lang="en-US" sz="1400" dirty="0"/>
+            <a:endParaRPr lang="en-US" sz="1600" dirty="0"/>
           </a:p>
         </p:txBody>
       </p:sp>
@@ -9302,7 +9219,7 @@
               <a:buNone/>
             </a:pPr>
             <a:r>
-              <a:rPr lang="en-US" sz="1350" dirty="0">
+              <a:rPr lang="en-US" sz="1550" dirty="0">
                 <a:solidFill>
                   <a:srgbClr val="14212E"/>
                 </a:solidFill>
@@ -9310,9 +9227,9 @@
                 <a:ea typeface="Calibri" pitchFamily="34" charset="-122"/>
                 <a:cs typeface="Calibri" pitchFamily="34" charset="-120"/>
               </a:rPr>
-              <a:t>The stimulus drives both the cortical evoked response and the reflex, so most of what the brain appears to explain is the stimulus wearing a different hat. Only the part that survives once stimulus and background are already in the model counts as a genuine cortical contribution.</a:t>
-            </a:r>
-            <a:endParaRPr lang="en-US" sz="1350" dirty="0"/>
+              <a:t>The stimulus drives both the cortical evoked response and the reflex, so most of what the brain appears to explain is really the stimulus. Only the part that survives once stimulus and background are already in the model counts as a genuine cortical contribution.</a:t>
+            </a:r>
+            <a:endParaRPr lang="en-US" sz="1550" dirty="0"/>
           </a:p>
         </p:txBody>
       </p:sp>
@@ -9373,7 +9290,7 @@
               <a:buNone/>
             </a:pPr>
             <a:r>
-              <a:rPr lang="en-US" sz="1150" b="1" spc="320" kern="0" dirty="0">
+              <a:rPr lang="en-US" sz="1300" b="1" spc="320" kern="0" dirty="0">
                 <a:solidFill>
                   <a:srgbClr val="3B6E43"/>
                 </a:solidFill>
@@ -9383,7 +9300,7 @@
               </a:rPr>
               <a:t>PART 4 · EVERYTHING AT ONCE</a:t>
             </a:r>
-            <a:endParaRPr lang="en-US" sz="1150" dirty="0"/>
+            <a:endParaRPr lang="en-US" sz="1300" dirty="0"/>
           </a:p>
         </p:txBody>
       </p:sp>
@@ -9436,13 +9353,14 @@
         </p:nvPicPr>
         <p:blipFill>
           <a:blip r:embed="rId1"/>
-          <a:srcRect l="0" r="0" t="0" b="0"/>
-          <a:stretch/>
+          <a:stretch>
+            <a:fillRect/>
+          </a:stretch>
         </p:blipFill>
         <p:spPr>
           <a:xfrm>
             <a:off x="685800" y="1783080"/>
-            <a:ext cx="10881360" cy="3914158"/>
+            <a:ext cx="10881360" cy="3312121"/>
           </a:xfrm>
           <a:prstGeom prst="rect">
             <a:avLst/>
@@ -9506,7 +9424,7 @@
               <a:buNone/>
             </a:pPr>
             <a:r>
-              <a:rPr lang="en-US" sz="1150" b="1" spc="320" kern="0" dirty="0">
+              <a:rPr lang="en-US" sz="1300" b="1" spc="320" kern="0" dirty="0">
                 <a:solidFill>
                   <a:srgbClr val="15718F"/>
                 </a:solidFill>
@@ -9516,7 +9434,7 @@
               </a:rPr>
               <a:t>PART 4 · RIGOUR</a:t>
             </a:r>
-            <a:endParaRPr lang="en-US" sz="1150" dirty="0"/>
+            <a:endParaRPr lang="en-US" sz="1300" dirty="0"/>
           </a:p>
         </p:txBody>
       </p:sp>
@@ -9553,7 +9471,7 @@
                 <a:ea typeface="Cambria" pitchFamily="34" charset="-122"/>
                 <a:cs typeface="Cambria" pitchFamily="34" charset="-120"/>
               </a:rPr>
-              <a:t>Everything we tried to kill it with</a:t>
+              <a:t>Every control we applied</a:t>
             </a:r>
             <a:endParaRPr lang="en-US" sz="3000" dirty="0"/>
           </a:p>
@@ -9618,7 +9536,7 @@
               <a:buNone/>
             </a:pPr>
             <a:r>
-              <a:rPr lang="en-US" sz="1300" b="1" dirty="0">
+              <a:rPr lang="en-US" sz="1450" b="1" dirty="0">
                 <a:solidFill>
                   <a:srgbClr val="14212E"/>
                 </a:solidFill>
@@ -9628,7 +9546,7 @@
               </a:rPr>
               <a:t>Baseline sham</a:t>
             </a:r>
-            <a:endParaRPr lang="en-US" sz="1300" dirty="0"/>
+            <a:endParaRPr lang="en-US" sz="1450" dirty="0"/>
           </a:p>
         </p:txBody>
       </p:sp>
@@ -9657,7 +9575,7 @@
               <a:buNone/>
             </a:pPr>
             <a:r>
-              <a:rPr lang="en-US" sz="1200" dirty="0">
+              <a:rPr lang="en-US" sz="1350" dirty="0">
                 <a:solidFill>
                   <a:srgbClr val="5A6B7B"/>
                 </a:solidFill>
@@ -9667,7 +9585,7 @@
               </a:rPr>
               <a:t>Pretend part of the baseline was training</a:t>
             </a:r>
-            <a:endParaRPr lang="en-US" sz="1200" dirty="0"/>
+            <a:endParaRPr lang="en-US" sz="1350" dirty="0"/>
           </a:p>
         </p:txBody>
       </p:sp>
@@ -9696,7 +9614,7 @@
               <a:buNone/>
             </a:pPr>
             <a:r>
-              <a:rPr lang="en-US" sz="1250" b="1" dirty="0">
+              <a:rPr lang="en-US" sz="1400" b="1" dirty="0">
                 <a:solidFill>
                   <a:srgbClr val="A44430"/>
                 </a:solidFill>
@@ -9706,7 +9624,7 @@
               </a:rPr>
               <a:t>drift fails</a:t>
             </a:r>
-            <a:endParaRPr lang="en-US" sz="1250" dirty="0"/>
+            <a:endParaRPr lang="en-US" sz="1400" dirty="0"/>
           </a:p>
         </p:txBody>
       </p:sp>
@@ -9769,7 +9687,7 @@
               <a:buNone/>
             </a:pPr>
             <a:r>
-              <a:rPr lang="en-US" sz="1300" b="1" dirty="0">
+              <a:rPr lang="en-US" sz="1450" b="1" dirty="0">
                 <a:solidFill>
                   <a:srgbClr val="14212E"/>
                 </a:solidFill>
@@ -9779,7 +9697,7 @@
               </a:rPr>
               <a:t>Shuffled trial order</a:t>
             </a:r>
-            <a:endParaRPr lang="en-US" sz="1300" dirty="0"/>
+            <a:endParaRPr lang="en-US" sz="1450" dirty="0"/>
           </a:p>
         </p:txBody>
       </p:sp>
@@ -9808,7 +9726,7 @@
               <a:buNone/>
             </a:pPr>
             <a:r>
-              <a:rPr lang="en-US" sz="1200" dirty="0">
+              <a:rPr lang="en-US" sz="1350" dirty="0">
                 <a:solidFill>
                   <a:srgbClr val="5A6B7B"/>
                 </a:solidFill>
@@ -9818,7 +9736,7 @@
               </a:rPr>
               <a:t>Keep the numbers, destroy the timeline</a:t>
             </a:r>
-            <a:endParaRPr lang="en-US" sz="1200" dirty="0"/>
+            <a:endParaRPr lang="en-US" sz="1350" dirty="0"/>
           </a:p>
         </p:txBody>
       </p:sp>
@@ -9847,7 +9765,7 @@
               <a:buNone/>
             </a:pPr>
             <a:r>
-              <a:rPr lang="en-US" sz="1250" b="1" dirty="0">
+              <a:rPr lang="en-US" sz="1400" b="1" dirty="0">
                 <a:solidFill>
                   <a:srgbClr val="3B6E43"/>
                 </a:solidFill>
@@ -9857,7 +9775,7 @@
               </a:rPr>
               <a:t>null ≈ 0</a:t>
             </a:r>
-            <a:endParaRPr lang="en-US" sz="1250" dirty="0"/>
+            <a:endParaRPr lang="en-US" sz="1400" dirty="0"/>
           </a:p>
         </p:txBody>
       </p:sp>
@@ -9920,7 +9838,7 @@
               <a:buNone/>
             </a:pPr>
             <a:r>
-              <a:rPr lang="en-US" sz="1300" b="1" dirty="0">
+              <a:rPr lang="en-US" sz="1450" b="1" dirty="0">
                 <a:solidFill>
                   <a:srgbClr val="14212E"/>
                 </a:solidFill>
@@ -9930,7 +9848,7 @@
               </a:rPr>
               <a:t>Stimulus strength</a:t>
             </a:r>
-            <a:endParaRPr lang="en-US" sz="1300" dirty="0"/>
+            <a:endParaRPr lang="en-US" sz="1450" dirty="0"/>
           </a:p>
         </p:txBody>
       </p:sp>
@@ -9959,7 +9877,7 @@
               <a:buNone/>
             </a:pPr>
             <a:r>
-              <a:rPr lang="en-US" sz="1200" dirty="0">
+              <a:rPr lang="en-US" sz="1350" dirty="0">
                 <a:solidFill>
                   <a:srgbClr val="5A6B7B"/>
                 </a:solidFill>
@@ -9967,9 +9885,9 @@
                 <a:ea typeface="Calibri" pitchFamily="34" charset="-122"/>
                 <a:cs typeface="Calibri" pitchFamily="34" charset="-120"/>
               </a:rPr>
-              <a:t>Is it just how hard we shocked?</a:t>
-            </a:r>
-            <a:endParaRPr lang="en-US" sz="1200" dirty="0"/>
+              <a:t>Is it just how strong the stimulus was?</a:t>
+            </a:r>
+            <a:endParaRPr lang="en-US" sz="1350" dirty="0"/>
           </a:p>
         </p:txBody>
       </p:sp>
@@ -9998,7 +9916,7 @@
               <a:buNone/>
             </a:pPr>
             <a:r>
-              <a:rPr lang="en-US" sz="1250" b="1" dirty="0">
+              <a:rPr lang="en-US" sz="1400" b="1" dirty="0">
                 <a:solidFill>
                   <a:srgbClr val="3B6E43"/>
                 </a:solidFill>
@@ -10008,7 +9926,7 @@
               </a:rPr>
               <a:t>survives</a:t>
             </a:r>
-            <a:endParaRPr lang="en-US" sz="1250" dirty="0"/>
+            <a:endParaRPr lang="en-US" sz="1400" dirty="0"/>
           </a:p>
         </p:txBody>
       </p:sp>
@@ -10071,7 +9989,7 @@
               <a:buNone/>
             </a:pPr>
             <a:r>
-              <a:rPr lang="en-US" sz="1300" b="1" dirty="0">
+              <a:rPr lang="en-US" sz="1450" b="1" dirty="0">
                 <a:solidFill>
                   <a:srgbClr val="14212E"/>
                 </a:solidFill>
@@ -10081,7 +9999,7 @@
               </a:rPr>
               <a:t>Pre-stimulus background</a:t>
             </a:r>
-            <a:endParaRPr lang="en-US" sz="1300" dirty="0"/>
+            <a:endParaRPr lang="en-US" sz="1450" dirty="0"/>
           </a:p>
         </p:txBody>
       </p:sp>
@@ -10110,7 +10028,7 @@
               <a:buNone/>
             </a:pPr>
             <a:r>
-              <a:rPr lang="en-US" sz="1200" dirty="0">
+              <a:rPr lang="en-US" sz="1350" dirty="0">
                 <a:solidFill>
                   <a:srgbClr val="5A6B7B"/>
                 </a:solidFill>
@@ -10120,7 +10038,7 @@
               </a:rPr>
               <a:t>Is it muscle tone rather than brain?</a:t>
             </a:r>
-            <a:endParaRPr lang="en-US" sz="1200" dirty="0"/>
+            <a:endParaRPr lang="en-US" sz="1350" dirty="0"/>
           </a:p>
         </p:txBody>
       </p:sp>
@@ -10149,7 +10067,7 @@
               <a:buNone/>
             </a:pPr>
             <a:r>
-              <a:rPr lang="en-US" sz="1250" b="1" dirty="0">
+              <a:rPr lang="en-US" sz="1400" b="1" dirty="0">
                 <a:solidFill>
                   <a:srgbClr val="3B6E43"/>
                 </a:solidFill>
@@ -10159,7 +10077,7 @@
               </a:rPr>
               <a:t>survives</a:t>
             </a:r>
-            <a:endParaRPr lang="en-US" sz="1250" dirty="0"/>
+            <a:endParaRPr lang="en-US" sz="1400" dirty="0"/>
           </a:p>
         </p:txBody>
       </p:sp>
@@ -10222,7 +10140,7 @@
               <a:buNone/>
             </a:pPr>
             <a:r>
-              <a:rPr lang="en-US" sz="1300" b="1" dirty="0">
+              <a:rPr lang="en-US" sz="1450" b="1" dirty="0">
                 <a:solidFill>
                   <a:srgbClr val="14212E"/>
                 </a:solidFill>
@@ -10232,7 +10150,7 @@
               </a:rPr>
               <a:t>Within-window testing</a:t>
             </a:r>
-            <a:endParaRPr lang="en-US" sz="1300" dirty="0"/>
+            <a:endParaRPr lang="en-US" sz="1450" dirty="0"/>
           </a:p>
         </p:txBody>
       </p:sp>
@@ -10261,7 +10179,7 @@
               <a:buNone/>
             </a:pPr>
             <a:r>
-              <a:rPr lang="en-US" sz="1200" dirty="0">
+              <a:rPr lang="en-US" sz="1350" dirty="0">
                 <a:solidFill>
                   <a:srgbClr val="5A6B7B"/>
                 </a:solidFill>
@@ -10271,7 +10189,7 @@
               </a:rPr>
               <a:t>Could electrode drift manufacture it?</a:t>
             </a:r>
-            <a:endParaRPr lang="en-US" sz="1200" dirty="0"/>
+            <a:endParaRPr lang="en-US" sz="1350" dirty="0"/>
           </a:p>
         </p:txBody>
       </p:sp>
@@ -10300,7 +10218,7 @@
               <a:buNone/>
             </a:pPr>
             <a:r>
-              <a:rPr lang="en-US" sz="1250" b="1" dirty="0">
+              <a:rPr lang="en-US" sz="1400" b="1" dirty="0">
                 <a:solidFill>
                   <a:srgbClr val="3B6E43"/>
                 </a:solidFill>
@@ -10310,7 +10228,7 @@
               </a:rPr>
               <a:t>drift cancels</a:t>
             </a:r>
-            <a:endParaRPr lang="en-US" sz="1250" dirty="0"/>
+            <a:endParaRPr lang="en-US" sz="1400" dirty="0"/>
           </a:p>
         </p:txBody>
       </p:sp>
@@ -10373,7 +10291,7 @@
               <a:buNone/>
             </a:pPr>
             <a:r>
-              <a:rPr lang="en-US" sz="1300" b="1" dirty="0">
+              <a:rPr lang="en-US" sz="1450" b="1" dirty="0">
                 <a:solidFill>
                   <a:srgbClr val="14212E"/>
                 </a:solidFill>
@@ -10383,7 +10301,7 @@
               </a:rPr>
               <a:t>Muscle crosstalk</a:t>
             </a:r>
-            <a:endParaRPr lang="en-US" sz="1300" dirty="0"/>
+            <a:endParaRPr lang="en-US" sz="1450" dirty="0"/>
           </a:p>
         </p:txBody>
       </p:sp>
@@ -10412,7 +10330,7 @@
               <a:buNone/>
             </a:pPr>
             <a:r>
-              <a:rPr lang="en-US" sz="1200" dirty="0">
+              <a:rPr lang="en-US" sz="1350" dirty="0">
                 <a:solidFill>
                   <a:srgbClr val="5A6B7B"/>
                 </a:solidFill>
@@ -10422,7 +10340,7 @@
               </a:rPr>
               <a:t>Is the brain electrode picking up EMG?</a:t>
             </a:r>
-            <a:endParaRPr lang="en-US" sz="1200" dirty="0"/>
+            <a:endParaRPr lang="en-US" sz="1350" dirty="0"/>
           </a:p>
         </p:txBody>
       </p:sp>
@@ -10451,7 +10369,7 @@
               <a:buNone/>
             </a:pPr>
             <a:r>
-              <a:rPr lang="en-US" sz="1250" b="1" dirty="0">
+              <a:rPr lang="en-US" sz="1400" b="1" dirty="0">
                 <a:solidFill>
                   <a:srgbClr val="3B6E43"/>
                 </a:solidFill>
@@ -10461,7 +10379,7 @@
               </a:rPr>
               <a:t>r = +0.06</a:t>
             </a:r>
-            <a:endParaRPr lang="en-US" sz="1250" dirty="0"/>
+            <a:endParaRPr lang="en-US" sz="1400" dirty="0"/>
           </a:p>
         </p:txBody>
       </p:sp>
@@ -10524,7 +10442,7 @@
               <a:buNone/>
             </a:pPr>
             <a:r>
-              <a:rPr lang="en-US" sz="1300" b="1" dirty="0">
+              <a:rPr lang="en-US" sz="1450" b="1" dirty="0">
                 <a:solidFill>
                   <a:srgbClr val="14212E"/>
                 </a:solidFill>
@@ -10534,7 +10452,7 @@
               </a:rPr>
               <a:t>Up versus down</a:t>
             </a:r>
-            <a:endParaRPr lang="en-US" sz="1300" dirty="0"/>
+            <a:endParaRPr lang="en-US" sz="1450" dirty="0"/>
           </a:p>
         </p:txBody>
       </p:sp>
@@ -10563,7 +10481,7 @@
               <a:buNone/>
             </a:pPr>
             <a:r>
-              <a:rPr lang="en-US" sz="1200" dirty="0">
+              <a:rPr lang="en-US" sz="1350" dirty="0">
                 <a:solidFill>
                   <a:srgbClr val="5A6B7B"/>
                 </a:solidFill>
@@ -10573,7 +10491,7 @@
               </a:rPr>
               <a:t>Does it depend on training direction?</a:t>
             </a:r>
-            <a:endParaRPr lang="en-US" sz="1200" dirty="0"/>
+            <a:endParaRPr lang="en-US" sz="1350" dirty="0"/>
           </a:p>
         </p:txBody>
       </p:sp>
@@ -10602,7 +10520,7 @@
               <a:buNone/>
             </a:pPr>
             <a:r>
-              <a:rPr lang="en-US" sz="1250" b="1" dirty="0">
+              <a:rPr lang="en-US" sz="1400" b="1" dirty="0">
                 <a:solidFill>
                   <a:srgbClr val="A44430"/>
                 </a:solidFill>
@@ -10612,47 +10530,13 @@
               </a:rPr>
               <a:t>no difference</a:t>
             </a:r>
-            <a:endParaRPr lang="en-US" sz="1250" dirty="0"/>
-          </a:p>
-        </p:txBody>
-      </p:sp>
-      <p:sp>
-        <p:nvSpPr>
-          <p:cNvPr id="32" name="Shape 30"/>
-          <p:cNvSpPr/>
-          <p:nvPr/>
-        </p:nvSpPr>
-        <p:spPr>
-          <a:xfrm>
-            <a:off x="685800" y="6446520"/>
-            <a:ext cx="10881360" cy="0"/>
-          </a:xfrm>
-          <a:prstGeom prst="roundRect">
-            <a:avLst>
-              <a:gd name="adj" fmla="val Infinity"/>
-            </a:avLst>
-          </a:prstGeom>
-          <a:solidFill>
-            <a:srgbClr val="FFFFFF"/>
-          </a:solidFill>
-          <a:ln w="12700">
-            <a:solidFill>
-              <a:srgbClr val="DDE4EA"/>
-            </a:solidFill>
-            <a:prstDash val="solid"/>
-          </a:ln>
-          <a:effectLst>
-            <a:outerShdw sx="100000" sy="100000" kx="0" ky="0" algn="bl" rotWithShape="0" blurRad="127000" dist="38100" dir="5400000">
-              <a:srgbClr val="0C1620">
-                <a:alpha val="11000"/>
-              </a:srgbClr>
-            </a:outerShdw>
-          </a:effectLst>
-        </p:spPr>
-      </p:sp>
-      <p:sp>
-        <p:nvSpPr>
-          <p:cNvPr id="33" name="Text 31"/>
+            <a:endParaRPr lang="en-US" sz="1400" dirty="0"/>
+          </a:p>
+        </p:txBody>
+      </p:sp>
+      <p:sp>
+        <p:nvSpPr>
+          <p:cNvPr id="32" name="Text 30"/>
           <p:cNvSpPr/>
           <p:nvPr/>
         </p:nvSpPr>
@@ -10675,7 +10559,7 @@
               <a:buNone/>
             </a:pPr>
             <a:r>
-              <a:rPr lang="en-US" sz="1250" i="1" dirty="0">
+              <a:rPr lang="en-US" sz="1400" i="1" dirty="0">
                 <a:solidFill>
                   <a:srgbClr val="5A6B7B"/>
                 </a:solidFill>
@@ -10685,7 +10569,7 @@
               </a:rPr>
               <a:t>Five it survives, two it fails — and the two failures are what told us the average-state approach was the wrong question.</a:t>
             </a:r>
-            <a:endParaRPr lang="en-US" sz="1250" dirty="0"/>
+            <a:endParaRPr lang="en-US" sz="1400" dirty="0"/>
           </a:p>
         </p:txBody>
       </p:sp>
@@ -10746,7 +10630,7 @@
               <a:buNone/>
             </a:pPr>
             <a:r>
-              <a:rPr lang="en-US" sz="1150" b="1" spc="320" kern="0" dirty="0">
+              <a:rPr lang="en-US" sz="1300" b="1" spc="320" kern="0" dirty="0">
                 <a:solidFill>
                   <a:srgbClr val="15718F"/>
                 </a:solidFill>
@@ -10756,7 +10640,7 @@
               </a:rPr>
               <a:t>PART 4 · THE OBVIOUS OBJECTION</a:t>
             </a:r>
-            <a:endParaRPr lang="en-US" sz="1150" dirty="0"/>
+            <a:endParaRPr lang="en-US" sz="1300" dirty="0"/>
           </a:p>
         </p:txBody>
       </p:sp>
@@ -10809,13 +10693,14 @@
         </p:nvPicPr>
         <p:blipFill>
           <a:blip r:embed="rId1"/>
-          <a:srcRect l="0" r="0" t="0" b="0"/>
-          <a:stretch/>
+          <a:stretch>
+            <a:fillRect/>
+          </a:stretch>
         </p:blipFill>
         <p:spPr>
           <a:xfrm>
             <a:off x="566928" y="1965960"/>
-            <a:ext cx="6858000" cy="2637692"/>
+            <a:ext cx="6858000" cy="2540649"/>
           </a:xfrm>
           <a:prstGeom prst="rect">
             <a:avLst/>
@@ -10881,7 +10766,7 @@
               <a:buNone/>
             </a:pPr>
             <a:r>
-              <a:rPr lang="en-US" sz="1400" b="1" dirty="0">
+              <a:rPr lang="en-US" sz="1600" b="1" dirty="0">
                 <a:solidFill>
                   <a:srgbClr val="15718F"/>
                 </a:solidFill>
@@ -10891,7 +10776,7 @@
               </a:rPr>
               <a:t>The test</a:t>
             </a:r>
-            <a:endParaRPr lang="en-US" sz="1400" dirty="0"/>
+            <a:endParaRPr lang="en-US" sz="1600" dirty="0"/>
           </a:p>
         </p:txBody>
       </p:sp>
@@ -10923,7 +10808,7 @@
               <a:buNone/>
             </a:pPr>
             <a:r>
-              <a:rPr lang="en-US" sz="1300" dirty="0">
+              <a:rPr lang="en-US" sz="1450" dirty="0">
                 <a:solidFill>
                   <a:srgbClr val="14212E"/>
                 </a:solidFill>
@@ -10933,7 +10818,7 @@
               </a:rPr>
               <a:t>Both channels record at once, so the cortical electrode could in principle be registering muscle activity. Muscle artefact lives at high frequency, so that is where contamination would appear.</a:t>
             </a:r>
-            <a:endParaRPr lang="en-US" sz="1300" dirty="0"/>
+            <a:endParaRPr lang="en-US" sz="1450" dirty="0"/>
           </a:p>
         </p:txBody>
       </p:sp>
@@ -10962,7 +10847,7 @@
               <a:buNone/>
             </a:pPr>
             <a:r>
-              <a:rPr lang="en-US" sz="1500" b="1" dirty="0">
+              <a:rPr lang="en-US" sz="1700" b="1" dirty="0">
                 <a:solidFill>
                   <a:srgbClr val="3B6E43"/>
                 </a:solidFill>
@@ -10972,7 +10857,7 @@
               </a:rPr>
               <a:t>Above 100 Hz:  r = +0.06</a:t>
             </a:r>
-            <a:endParaRPr lang="en-US" sz="1500" dirty="0"/>
+            <a:endParaRPr lang="en-US" sz="1700" dirty="0"/>
           </a:p>
         </p:txBody>
       </p:sp>
@@ -11004,7 +10889,7 @@
               <a:buNone/>
             </a:pPr>
             <a:r>
-              <a:rPr lang="en-US" sz="1200" i="1" dirty="0">
+              <a:rPr lang="en-US" sz="1350" i="1" dirty="0">
                 <a:solidFill>
                   <a:srgbClr val="5A6B7B"/>
                 </a:solidFill>
@@ -11014,7 +10899,7 @@
               </a:rPr>
               <a:t>Essentially zero, and the low bands are slightly negative. The cortical signal also marginally leads the muscle, which is the acceptable direction.</a:t>
             </a:r>
-            <a:endParaRPr lang="en-US" sz="1200" dirty="0"/>
+            <a:endParaRPr lang="en-US" sz="1350" dirty="0"/>
           </a:p>
         </p:txBody>
       </p:sp>
@@ -11075,7 +10960,7 @@
               <a:buNone/>
             </a:pPr>
             <a:r>
-              <a:rPr lang="en-US" sz="1150" b="1" spc="320" kern="0" dirty="0">
+              <a:rPr lang="en-US" sz="1300" b="1" spc="320" kern="0" dirty="0">
                 <a:solidFill>
                   <a:srgbClr val="15718F"/>
                 </a:solidFill>
@@ -11085,7 +10970,7 @@
               </a:rPr>
               <a:t>PART 5 · THE MOST PROMISING THREAD</a:t>
             </a:r>
-            <a:endParaRPr lang="en-US" sz="1150" dirty="0"/>
+            <a:endParaRPr lang="en-US" sz="1300" dirty="0"/>
           </a:p>
         </p:txBody>
       </p:sp>
@@ -11138,8 +11023,9 @@
         </p:nvPicPr>
         <p:blipFill>
           <a:blip r:embed="rId1"/>
-          <a:srcRect l="0" r="0" t="0" b="0"/>
-          <a:stretch/>
+          <a:stretch>
+            <a:fillRect/>
+          </a:stretch>
         </p:blipFill>
         <p:spPr>
           <a:xfrm>
@@ -11218,7 +11104,7 @@
                 <a:ea typeface="Cambria" pitchFamily="34" charset="-122"/>
                 <a:cs typeface="Cambria" pitchFamily="34" charset="-120"/>
               </a:rPr>
-              <a:t>r = +0.71</a:t>
+              <a:t>r = +0.64</a:t>
             </a:r>
             <a:endParaRPr lang="en-US" sz="2800" dirty="0"/>
           </a:p>
@@ -11252,7 +11138,7 @@
               <a:buNone/>
             </a:pPr>
             <a:r>
-              <a:rPr lang="en-US" sz="1300" dirty="0">
+              <a:rPr lang="en-US" sz="1450" dirty="0">
                 <a:solidFill>
                   <a:srgbClr val="14212E"/>
                 </a:solidFill>
@@ -11262,7 +11148,7 @@
               </a:rPr>
               <a:t>between how much an animal learned and how much its cortical coupling changed</a:t>
             </a:r>
-            <a:endParaRPr lang="en-US" sz="1300" dirty="0"/>
+            <a:endParaRPr lang="en-US" sz="1450" dirty="0"/>
           </a:p>
         </p:txBody>
       </p:sp>
@@ -11294,7 +11180,7 @@
               <a:buNone/>
             </a:pPr>
             <a:r>
-              <a:rPr lang="en-US" sz="1250" dirty="0">
+              <a:rPr lang="en-US" sz="1400" dirty="0">
                 <a:solidFill>
                   <a:srgbClr val="5A6B7B"/>
                 </a:solidFill>
@@ -11304,7 +11190,7 @@
               </a:rPr>
               <a:t>The two animals that failed to learn show no increase — a built-in negative control.</a:t>
             </a:r>
-            <a:endParaRPr lang="en-US" sz="1250" dirty="0"/>
+            <a:endParaRPr lang="en-US" sz="1400" dirty="0"/>
           </a:p>
         </p:txBody>
       </p:sp>
@@ -11336,7 +11222,7 @@
               <a:buNone/>
             </a:pPr>
             <a:r>
-              <a:rPr lang="en-US" sz="1250" b="1" i="1" dirty="0">
+              <a:rPr lang="en-US" sz="1400" b="1" i="1" dirty="0">
                 <a:solidFill>
                   <a:srgbClr val="B4671A"/>
                 </a:solidFill>
@@ -11344,9 +11230,9 @@
                 <a:ea typeface="Calibri" pitchFamily="34" charset="-122"/>
                 <a:cs typeface="Calibri" pitchFamily="34" charset="-120"/>
               </a:rPr>
-              <a:t>With five animals this is a direction, not a result. Five more are ready to process.</a:t>
-            </a:r>
-            <a:endParaRPr lang="en-US" sz="1250" dirty="0"/>
+              <a:t>With five animals this is a direction, not a result. Four more are next.</a:t>
+            </a:r>
+            <a:endParaRPr lang="en-US" sz="1400" dirty="0"/>
           </a:p>
         </p:txBody>
       </p:sp>
@@ -11407,7 +11293,7 @@
               <a:buNone/>
             </a:pPr>
             <a:r>
-              <a:rPr lang="en-US" sz="1150" b="1" spc="320" kern="0" dirty="0">
+              <a:rPr lang="en-US" sz="1300" b="1" spc="320" kern="0" dirty="0">
                 <a:solidFill>
                   <a:srgbClr val="6B4E8F"/>
                 </a:solidFill>
@@ -11417,7 +11303,7 @@
               </a:rPr>
               <a:t>PART 5 · A NEW THREAD</a:t>
             </a:r>
-            <a:endParaRPr lang="en-US" sz="1150" dirty="0"/>
+            <a:endParaRPr lang="en-US" sz="1300" dirty="0"/>
           </a:p>
         </p:txBody>
       </p:sp>
@@ -11488,7 +11374,7 @@
               <a:buNone/>
             </a:pPr>
             <a:r>
-              <a:rPr lang="en-US" sz="1500" dirty="0">
+              <a:rPr lang="en-US" sz="1700" dirty="0">
                 <a:solidFill>
                   <a:srgbClr val="5A6B7B"/>
                 </a:solidFill>
@@ -11498,7 +11384,7 @@
               </a:rPr>
               <a:t>An idea that came out of the last meeting, and one we think is worth pursuing.</a:t>
             </a:r>
-            <a:endParaRPr lang="en-US" sz="1500" dirty="0"/>
+            <a:endParaRPr lang="en-US" sz="1700" dirty="0"/>
           </a:p>
         </p:txBody>
       </p:sp>
@@ -11561,7 +11447,7 @@
               <a:buNone/>
             </a:pPr>
             <a:r>
-              <a:rPr lang="en-US" sz="1450" b="1" dirty="0">
+              <a:rPr lang="en-US" sz="1650" b="1" dirty="0">
                 <a:solidFill>
                   <a:srgbClr val="6B4E8F"/>
                 </a:solidFill>
@@ -11571,7 +11457,7 @@
               </a:rPr>
               <a:t>What the reward threshold is</a:t>
             </a:r>
-            <a:endParaRPr lang="en-US" sz="1450" dirty="0"/>
+            <a:endParaRPr lang="en-US" sz="1650" dirty="0"/>
           </a:p>
         </p:txBody>
       </p:sp>
@@ -11603,7 +11489,7 @@
               <a:buNone/>
             </a:pPr>
             <a:r>
-              <a:rPr lang="en-US" sz="1350" dirty="0">
+              <a:rPr lang="en-US" sz="1550" dirty="0">
                 <a:solidFill>
                   <a:srgbClr val="14212E"/>
                 </a:solidFill>
@@ -11611,9 +11497,9 @@
                 <a:ea typeface="Calibri" pitchFamily="34" charset="-122"/>
                 <a:cs typeface="Calibri" pitchFamily="34" charset="-120"/>
               </a:rPr>
-              <a:t>The experimenter raises it when the rat is beating the task and lowers it when the rat is struggling. It is adjusted by hand, day by day, across the whole experiment.</a:t>
-            </a:r>
-            <a:endParaRPr lang="en-US" sz="1350" dirty="0"/>
+              <a:t>The experimenter raises it when the rat exceeds it and lowers it when the rat is struggling. It is adjusted by hand, day by day, across the whole experiment.</a:t>
+            </a:r>
+            <a:endParaRPr lang="en-US" sz="1550" dirty="0"/>
           </a:p>
         </p:txBody>
       </p:sp>
@@ -11642,7 +11528,7 @@
               <a:buNone/>
             </a:pPr>
             <a:r>
-              <a:rPr lang="en-US" sz="1250" i="1" dirty="0">
+              <a:rPr lang="en-US" sz="1400" i="1" dirty="0">
                 <a:solidFill>
                   <a:srgbClr val="5A6B7B"/>
                 </a:solidFill>
@@ -11652,7 +11538,7 @@
               </a:rPr>
               <a:t>It is, in effect, a staircase procedure.</a:t>
             </a:r>
-            <a:endParaRPr lang="en-US" sz="1250" dirty="0"/>
+            <a:endParaRPr lang="en-US" sz="1400" dirty="0"/>
           </a:p>
         </p:txBody>
       </p:sp>
@@ -11715,7 +11601,7 @@
               <a:buNone/>
             </a:pPr>
             <a:r>
-              <a:rPr lang="en-US" sz="1450" b="1" dirty="0">
+              <a:rPr lang="en-US" sz="1650" b="1" dirty="0">
                 <a:solidFill>
                   <a:srgbClr val="15718F"/>
                 </a:solidFill>
@@ -11725,7 +11611,7 @@
               </a:rPr>
               <a:t>Why that is interesting</a:t>
             </a:r>
-            <a:endParaRPr lang="en-US" sz="1450" dirty="0"/>
+            <a:endParaRPr lang="en-US" sz="1650" dirty="0"/>
           </a:p>
         </p:txBody>
       </p:sp>
@@ -11757,7 +11643,7 @@
               <a:buNone/>
             </a:pPr>
             <a:r>
-              <a:rPr lang="en-US" sz="1350" dirty="0">
+              <a:rPr lang="en-US" sz="1550" dirty="0">
                 <a:solidFill>
                   <a:srgbClr val="14212E"/>
                 </a:solidFill>
@@ -11767,7 +11653,7 @@
               </a:rPr>
               <a:t>It is a record of how hard the task was for that animal — its engagement and effort — written down independently of anything we measure from the electrodes.</a:t>
             </a:r>
-            <a:endParaRPr lang="en-US" sz="1350" dirty="0"/>
+            <a:endParaRPr lang="en-US" sz="1550" dirty="0"/>
           </a:p>
         </p:txBody>
       </p:sp>
@@ -11796,7 +11682,7 @@
               <a:buNone/>
             </a:pPr>
             <a:r>
-              <a:rPr lang="en-US" sz="1250" b="1" i="1" dirty="0">
+              <a:rPr lang="en-US" sz="1400" b="1" i="1" dirty="0">
                 <a:solidFill>
                   <a:srgbClr val="3B6E43"/>
                 </a:solidFill>
@@ -11806,7 +11692,7 @@
               </a:rPr>
               <a:t>No shared noise with our signal processing.</a:t>
             </a:r>
-            <a:endParaRPr lang="en-US" sz="1250" dirty="0"/>
+            <a:endParaRPr lang="en-US" sz="1400" dirty="0"/>
           </a:p>
         </p:txBody>
       </p:sp>
@@ -11869,7 +11755,7 @@
               <a:buNone/>
             </a:pPr>
             <a:r>
-              <a:rPr lang="en-US" sz="1400" b="1" dirty="0">
+              <a:rPr lang="en-US" sz="1600" b="1" dirty="0">
                 <a:solidFill>
                   <a:srgbClr val="FFFFFF"/>
                 </a:solidFill>
@@ -11879,7 +11765,7 @@
               </a:rPr>
               <a:t>Right now our scaling result correlates two things measured from the same electrodes.</a:t>
             </a:r>
-            <a:endParaRPr lang="en-US" sz="1400" dirty="0"/>
+            <a:endParaRPr lang="en-US" sz="1600" dirty="0"/>
           </a:p>
         </p:txBody>
       </p:sp>
@@ -11911,7 +11797,7 @@
               <a:buNone/>
             </a:pPr>
             <a:r>
-              <a:rPr lang="en-US" sz="1350" dirty="0">
+              <a:rPr lang="en-US" sz="1550" dirty="0">
                 <a:solidFill>
                   <a:srgbClr val="D5DFE7"/>
                 </a:solidFill>
@@ -11921,7 +11807,7 @@
               </a:rPr>
               <a:t>If cortical coupling instead tracks a behavioural record kept by hand at the time, that is a far harder result to dismiss. We would like to build this next.</a:t>
             </a:r>
-            <a:endParaRPr lang="en-US" sz="1350" dirty="0"/>
+            <a:endParaRPr lang="en-US" sz="1550" dirty="0"/>
           </a:p>
         </p:txBody>
       </p:sp>
@@ -11982,7 +11868,7 @@
               <a:buNone/>
             </a:pPr>
             <a:r>
-              <a:rPr lang="en-US" sz="1150" b="1" spc="320" kern="0" dirty="0">
+              <a:rPr lang="en-US" sz="1300" b="1" spc="320" kern="0" dirty="0">
                 <a:solidFill>
                   <a:srgbClr val="15718F"/>
                 </a:solidFill>
@@ -11992,7 +11878,7 @@
               </a:rPr>
               <a:t>PART 5 · WHAT WE WOULD WRITE</a:t>
             </a:r>
-            <a:endParaRPr lang="en-US" sz="1150" dirty="0"/>
+            <a:endParaRPr lang="en-US" sz="1300" dirty="0"/>
           </a:p>
         </p:txBody>
       </p:sp>
@@ -12136,7 +12022,7 @@
               <a:buNone/>
             </a:pPr>
             <a:r>
-              <a:rPr lang="en-US" sz="1300" dirty="0">
+              <a:rPr lang="en-US" sz="1450" dirty="0">
                 <a:solidFill>
                   <a:srgbClr val="14212E"/>
                 </a:solidFill>
@@ -12146,7 +12032,7 @@
               </a:rPr>
               <a:t>A reproducible pipeline that recovers a twenty-year-old archive and learns a representation from it, on a laptop.</a:t>
             </a:r>
-            <a:endParaRPr lang="en-US" sz="1300" dirty="0"/>
+            <a:endParaRPr lang="en-US" sz="1450" dirty="0"/>
           </a:p>
         </p:txBody>
       </p:sp>
@@ -12178,7 +12064,7 @@
               <a:buNone/>
             </a:pPr>
             <a:r>
-              <a:rPr lang="en-US" sz="1200" i="1" dirty="0">
+              <a:rPr lang="en-US" sz="1350" i="1" dirty="0">
                 <a:solidFill>
                   <a:srgbClr val="5A6B7B"/>
                 </a:solidFill>
@@ -12188,7 +12074,7 @@
               </a:rPr>
               <a:t>Useful to anyone with old chronic recordings sitting on a shelf.</a:t>
             </a:r>
-            <a:endParaRPr lang="en-US" sz="1200" dirty="0"/>
+            <a:endParaRPr lang="en-US" sz="1350" dirty="0"/>
           </a:p>
         </p:txBody>
       </p:sp>
@@ -12293,7 +12179,7 @@
               <a:buNone/>
             </a:pPr>
             <a:r>
-              <a:rPr lang="en-US" sz="1300" dirty="0">
+              <a:rPr lang="en-US" sz="1450" dirty="0">
                 <a:solidFill>
                   <a:srgbClr val="14212E"/>
                 </a:solidFill>
@@ -12303,7 +12189,7 @@
               </a:rPr>
               <a:t>Cortical activity carries a small, highly reliable single-trial signal about reflex size, independent of stimulus and excitability.</a:t>
             </a:r>
-            <a:endParaRPr lang="en-US" sz="1300" dirty="0"/>
+            <a:endParaRPr lang="en-US" sz="1450" dirty="0"/>
           </a:p>
         </p:txBody>
       </p:sp>
@@ -12335,7 +12221,7 @@
               <a:buNone/>
             </a:pPr>
             <a:r>
-              <a:rPr lang="en-US" sz="1200" i="1" dirty="0">
+              <a:rPr lang="en-US" sz="1350" i="1" dirty="0">
                 <a:solidFill>
                   <a:srgbClr val="5A6B7B"/>
                 </a:solidFill>
@@ -12345,7 +12231,7 @@
               </a:rPr>
               <a:t>Extends Boulay et al. from a population relationship to a single-trial one.</a:t>
             </a:r>
-            <a:endParaRPr lang="en-US" sz="1200" dirty="0"/>
+            <a:endParaRPr lang="en-US" sz="1350" dirty="0"/>
           </a:p>
         </p:txBody>
       </p:sp>
@@ -12450,7 +12336,7 @@
               <a:buNone/>
             </a:pPr>
             <a:r>
-              <a:rPr lang="en-US" sz="1300" dirty="0">
+              <a:rPr lang="en-US" sz="1450" dirty="0">
                 <a:solidFill>
                   <a:srgbClr val="14212E"/>
                 </a:solidFill>
@@ -12460,7 +12346,7 @@
               </a:rPr>
               <a:t>The intuitive drift analysis produces a convincing result that three controls reject.</a:t>
             </a:r>
-            <a:endParaRPr lang="en-US" sz="1300" dirty="0"/>
+            <a:endParaRPr lang="en-US" sz="1450" dirty="0"/>
           </a:p>
         </p:txBody>
       </p:sp>
@@ -12492,7 +12378,7 @@
               <a:buNone/>
             </a:pPr>
             <a:r>
-              <a:rPr lang="en-US" sz="1200" i="1" dirty="0">
+              <a:rPr lang="en-US" sz="1350" i="1" dirty="0">
                 <a:solidFill>
                   <a:srgbClr val="5A6B7B"/>
                 </a:solidFill>
@@ -12502,47 +12388,13 @@
               </a:rPr>
               <a:t>We would want to save the next group from spending months on it.</a:t>
             </a:r>
-            <a:endParaRPr lang="en-US" sz="1200" dirty="0"/>
-          </a:p>
-        </p:txBody>
-      </p:sp>
-      <p:sp>
-        <p:nvSpPr>
-          <p:cNvPr id="16" name="Shape 14"/>
-          <p:cNvSpPr/>
-          <p:nvPr/>
-        </p:nvSpPr>
-        <p:spPr>
-          <a:xfrm>
-            <a:off x="685800" y="6309360"/>
-            <a:ext cx="10881360" cy="0"/>
-          </a:xfrm>
-          <a:prstGeom prst="roundRect">
-            <a:avLst>
-              <a:gd name="adj" fmla="val Infinity"/>
-            </a:avLst>
-          </a:prstGeom>
-          <a:solidFill>
-            <a:srgbClr val="FFFFFF"/>
-          </a:solidFill>
-          <a:ln w="12700">
-            <a:solidFill>
-              <a:srgbClr val="DDE4EA"/>
-            </a:solidFill>
-            <a:prstDash val="solid"/>
-          </a:ln>
-          <a:effectLst>
-            <a:outerShdw sx="100000" sy="100000" kx="0" ky="0" algn="bl" rotWithShape="0" blurRad="127000" dist="38100" dir="5400000">
-              <a:srgbClr val="0C1620">
-                <a:alpha val="11000"/>
-              </a:srgbClr>
-            </a:outerShdw>
-          </a:effectLst>
-        </p:spPr>
-      </p:sp>
-      <p:sp>
-        <p:nvSpPr>
-          <p:cNvPr id="17" name="Text 15"/>
+            <a:endParaRPr lang="en-US" sz="1350" dirty="0"/>
+          </a:p>
+        </p:txBody>
+      </p:sp>
+      <p:sp>
+        <p:nvSpPr>
+          <p:cNvPr id="16" name="Text 14"/>
           <p:cNvSpPr/>
           <p:nvPr/>
         </p:nvSpPr>
@@ -12565,7 +12417,7 @@
               <a:buNone/>
             </a:pPr>
             <a:r>
-              <a:rPr lang="en-US" sz="1250" i="1" dirty="0">
+              <a:rPr lang="en-US" sz="1400" i="1" dirty="0">
                 <a:solidFill>
                   <a:srgbClr val="15718F"/>
                 </a:solidFill>
@@ -12573,9 +12425,9 @@
                 <a:ea typeface="Calibri" pitchFamily="34" charset="-122"/>
                 <a:cs typeface="Calibri" pitchFamily="34" charset="-120"/>
               </a:rPr>
-              <a:t>Target: a machine-learning venue, framed as an extension of the existing cortical–spinal work.</a:t>
-            </a:r>
-            <a:endParaRPr lang="en-US" sz="1250" dirty="0"/>
+              <a:t>Target: a peer-reviewed machine-learning venue, framed as an extension of the existing cortical–spinal work.</a:t>
+            </a:r>
+            <a:endParaRPr lang="en-US" sz="1400" dirty="0"/>
           </a:p>
         </p:txBody>
       </p:sp>
@@ -12636,7 +12488,7 @@
               <a:buNone/>
             </a:pPr>
             <a:r>
-              <a:rPr lang="en-US" sz="1150" b="1" spc="320" kern="0" dirty="0">
+              <a:rPr lang="en-US" sz="1300" b="1" spc="320" kern="0" dirty="0">
                 <a:solidFill>
                   <a:srgbClr val="15718F"/>
                 </a:solidFill>
@@ -12646,7 +12498,7 @@
               </a:rPr>
               <a:t>PART 5 · WHY IT MIGHT MATTER</a:t>
             </a:r>
-            <a:endParaRPr lang="en-US" sz="1150" dirty="0"/>
+            <a:endParaRPr lang="en-US" sz="1300" dirty="0"/>
           </a:p>
         </p:txBody>
       </p:sp>
@@ -12813,7 +12665,7 @@
               <a:buNone/>
             </a:pPr>
             <a:r>
-              <a:rPr lang="en-US" sz="1300" dirty="0">
+              <a:rPr lang="en-US" sz="1450" dirty="0">
                 <a:solidFill>
                   <a:srgbClr val="5A6B7B"/>
                 </a:solidFill>
@@ -12823,7 +12675,7 @@
               </a:rPr>
               <a:t>If cortex predicts the reflex before the fact, conditioning protocols could adapt trial by trial rather than day by day.</a:t>
             </a:r>
-            <a:endParaRPr lang="en-US" sz="1300" dirty="0"/>
+            <a:endParaRPr lang="en-US" sz="1450" dirty="0"/>
           </a:p>
         </p:txBody>
       </p:sp>
@@ -12951,7 +12803,7 @@
               <a:buNone/>
             </a:pPr>
             <a:r>
-              <a:rPr lang="en-US" sz="1300" dirty="0">
+              <a:rPr lang="en-US" sz="1450" dirty="0">
                 <a:solidFill>
                   <a:srgbClr val="5A6B7B"/>
                 </a:solidFill>
@@ -12961,7 +12813,7 @@
               </a:rPr>
               <a:t>Roughly a third of animals — and people — don't respond to conditioning. A cortical readout might show why, early.</a:t>
             </a:r>
-            <a:endParaRPr lang="en-US" sz="1300" dirty="0"/>
+            <a:endParaRPr lang="en-US" sz="1450" dirty="0"/>
           </a:p>
         </p:txBody>
       </p:sp>
@@ -13089,7 +12941,7 @@
               <a:buNone/>
             </a:pPr>
             <a:r>
-              <a:rPr lang="en-US" sz="1300" dirty="0">
+              <a:rPr lang="en-US" sz="1450" dirty="0">
                 <a:solidFill>
                   <a:srgbClr val="5A6B7B"/>
                 </a:solidFill>
@@ -13099,7 +12951,7 @@
               </a:rPr>
               <a:t>Reflex conditioning is already used clinically after spinal cord injury. Any handle on the cortical side is a handle on individualising it.</a:t>
             </a:r>
-            <a:endParaRPr lang="en-US" sz="1300" dirty="0"/>
+            <a:endParaRPr lang="en-US" sz="1450" dirty="0"/>
           </a:p>
         </p:txBody>
       </p:sp>
@@ -13165,7 +13017,7 @@
               <a:buNone/>
             </a:pPr>
             <a:r>
-              <a:rPr lang="en-US" sz="1350" dirty="0">
+              <a:rPr lang="en-US" sz="1550" dirty="0">
                 <a:solidFill>
                   <a:srgbClr val="14212E"/>
                 </a:solidFill>
@@ -13175,7 +13027,7 @@
               </a:rPr>
               <a:t>All three depend on the effect being larger and more reliable than what we can currently demonstrate. We are not there yet — but this is the direction that would make it worth getting there.</a:t>
             </a:r>
-            <a:endParaRPr lang="en-US" sz="1350" dirty="0"/>
+            <a:endParaRPr lang="en-US" sz="1550" dirty="0"/>
           </a:p>
         </p:txBody>
       </p:sp>
@@ -13236,7 +13088,7 @@
               <a:buNone/>
             </a:pPr>
             <a:r>
-              <a:rPr lang="en-US" sz="1150" b="1" spc="320" kern="0" dirty="0">
+              <a:rPr lang="en-US" sz="1300" b="1" spc="320" kern="0" dirty="0">
                 <a:solidFill>
                   <a:srgbClr val="15718F"/>
                 </a:solidFill>
@@ -13246,7 +13098,7 @@
               </a:rPr>
               <a:t>PART 1 · THE QUESTION</a:t>
             </a:r>
-            <a:endParaRPr lang="en-US" sz="1150" dirty="0"/>
+            <a:endParaRPr lang="en-US" sz="1300" dirty="0"/>
           </a:p>
         </p:txBody>
       </p:sp>
@@ -13298,11 +13150,11 @@
         <p:spPr>
           <a:xfrm>
             <a:off x="685800" y="2011680"/>
-            <a:ext cx="3566160" cy="2880360"/>
+            <a:ext cx="3566160" cy="3931920"/>
           </a:xfrm>
           <a:prstGeom prst="roundRect">
             <a:avLst>
-              <a:gd name="adj" fmla="val 2540"/>
+              <a:gd name="adj" fmla="val 2051"/>
             </a:avLst>
           </a:prstGeom>
           <a:solidFill>
@@ -13391,23 +13243,23 @@
         <p:spPr>
           <a:xfrm>
             <a:off x="978408" y="2971800"/>
-            <a:ext cx="3017520" cy="457200"/>
-          </a:xfrm>
-          <a:prstGeom prst="rect">
-            <a:avLst/>
-          </a:prstGeom>
-          <a:noFill/>
-          <a:ln/>
-        </p:spPr>
-        <p:txBody>
-          <a:bodyPr wrap="square" lIns="0" tIns="0" rIns="0" bIns="0" rtlCol="0" anchor="ctr"/>
-          <a:lstStyle/>
-          <a:p>
-            <a:pPr indent="0" marL="0">
-              <a:buNone/>
-            </a:pPr>
-            <a:r>
-              <a:rPr lang="en-US" sz="2100" b="1" dirty="0">
+            <a:ext cx="3017520" cy="502920"/>
+          </a:xfrm>
+          <a:prstGeom prst="rect">
+            <a:avLst/>
+          </a:prstGeom>
+          <a:noFill/>
+          <a:ln/>
+        </p:spPr>
+        <p:txBody>
+          <a:bodyPr wrap="square" lIns="0" tIns="0" rIns="0" bIns="0" rtlCol="0" anchor="ctr"/>
+          <a:lstStyle/>
+          <a:p>
+            <a:pPr indent="0" marL="0">
+              <a:buNone/>
+            </a:pPr>
+            <a:r>
+              <a:rPr lang="en-US" sz="2300" b="1" dirty="0">
                 <a:solidFill>
                   <a:srgbClr val="14212E"/>
                 </a:solidFill>
@@ -13417,7 +13269,7 @@
               </a:rPr>
               <a:t>The reflex</a:t>
             </a:r>
-            <a:endParaRPr lang="en-US" sz="2100" dirty="0"/>
+            <a:endParaRPr lang="en-US" sz="2300" dirty="0"/>
           </a:p>
         </p:txBody>
       </p:sp>
@@ -13429,8 +13281,8 @@
         </p:nvSpPr>
         <p:spPr>
           <a:xfrm>
-            <a:off x="978408" y="3520440"/>
-            <a:ext cx="3017520" cy="1234440"/>
+            <a:off x="978408" y="3566160"/>
+            <a:ext cx="3017520" cy="2240280"/>
           </a:xfrm>
           <a:prstGeom prst="rect">
             <a:avLst/>
@@ -13449,7 +13301,7 @@
               <a:buNone/>
             </a:pPr>
             <a:r>
-              <a:rPr lang="en-US" sz="1350" dirty="0">
+              <a:rPr lang="en-US" sz="1750" dirty="0">
                 <a:solidFill>
                   <a:srgbClr val="5A6B7B"/>
                 </a:solidFill>
@@ -13457,9 +13309,9 @@
                 <a:ea typeface="Calibri" pitchFamily="34" charset="-122"/>
                 <a:cs typeface="Calibri" pitchFamily="34" charset="-120"/>
               </a:rPr>
-              <a:t>A small shock to the leg nerve produces a reflex in the soleus muscle. Its size is what we measure.</a:t>
-            </a:r>
-            <a:endParaRPr lang="en-US" sz="1350" dirty="0"/>
+              <a:t>A small electrical stimulus to the leg nerve produces a reflex in the soleus muscle. Its size is what we measure.</a:t>
+            </a:r>
+            <a:endParaRPr lang="en-US" sz="1750" dirty="0"/>
           </a:p>
         </p:txBody>
       </p:sp>
@@ -13472,11 +13324,11 @@
         <p:spPr>
           <a:xfrm>
             <a:off x="4416552" y="2011680"/>
-            <a:ext cx="3566160" cy="2880360"/>
+            <a:ext cx="3566160" cy="3931920"/>
           </a:xfrm>
           <a:prstGeom prst="roundRect">
             <a:avLst>
-              <a:gd name="adj" fmla="val 2540"/>
+              <a:gd name="adj" fmla="val 2051"/>
             </a:avLst>
           </a:prstGeom>
           <a:solidFill>
@@ -13565,23 +13417,23 @@
         <p:spPr>
           <a:xfrm>
             <a:off x="4709160" y="2971800"/>
-            <a:ext cx="3017520" cy="457200"/>
-          </a:xfrm>
-          <a:prstGeom prst="rect">
-            <a:avLst/>
-          </a:prstGeom>
-          <a:noFill/>
-          <a:ln/>
-        </p:spPr>
-        <p:txBody>
-          <a:bodyPr wrap="square" lIns="0" tIns="0" rIns="0" bIns="0" rtlCol="0" anchor="ctr"/>
-          <a:lstStyle/>
-          <a:p>
-            <a:pPr indent="0" marL="0">
-              <a:buNone/>
-            </a:pPr>
-            <a:r>
-              <a:rPr lang="en-US" sz="2100" b="1" dirty="0">
+            <a:ext cx="3017520" cy="502920"/>
+          </a:xfrm>
+          <a:prstGeom prst="rect">
+            <a:avLst/>
+          </a:prstGeom>
+          <a:noFill/>
+          <a:ln/>
+        </p:spPr>
+        <p:txBody>
+          <a:bodyPr wrap="square" lIns="0" tIns="0" rIns="0" bIns="0" rtlCol="0" anchor="ctr"/>
+          <a:lstStyle/>
+          <a:p>
+            <a:pPr indent="0" marL="0">
+              <a:buNone/>
+            </a:pPr>
+            <a:r>
+              <a:rPr lang="en-US" sz="2300" b="1" dirty="0">
                 <a:solidFill>
                   <a:srgbClr val="14212E"/>
                 </a:solidFill>
@@ -13591,7 +13443,7 @@
               </a:rPr>
               <a:t>The training</a:t>
             </a:r>
-            <a:endParaRPr lang="en-US" sz="2100" dirty="0"/>
+            <a:endParaRPr lang="en-US" sz="2300" dirty="0"/>
           </a:p>
         </p:txBody>
       </p:sp>
@@ -13603,8 +13455,8 @@
         </p:nvSpPr>
         <p:spPr>
           <a:xfrm>
-            <a:off x="4709160" y="3520440"/>
-            <a:ext cx="3017520" cy="1234440"/>
+            <a:off x="4709160" y="3566160"/>
+            <a:ext cx="3017520" cy="2240280"/>
           </a:xfrm>
           <a:prstGeom prst="rect">
             <a:avLst/>
@@ -13623,7 +13475,7 @@
               <a:buNone/>
             </a:pPr>
             <a:r>
-              <a:rPr lang="en-US" sz="1350" dirty="0">
+              <a:rPr lang="en-US" sz="1750" dirty="0">
                 <a:solidFill>
                   <a:srgbClr val="5A6B7B"/>
                 </a:solidFill>
@@ -13633,7 +13485,7 @@
               </a:rPr>
               <a:t>The rat is rewarded whenever that reflex is bigger than a threshold — or smaller, depending on the group.</a:t>
             </a:r>
-            <a:endParaRPr lang="en-US" sz="1350" dirty="0"/>
+            <a:endParaRPr lang="en-US" sz="1750" dirty="0"/>
           </a:p>
         </p:txBody>
       </p:sp>
@@ -13646,11 +13498,11 @@
         <p:spPr>
           <a:xfrm>
             <a:off x="8147304" y="2011680"/>
-            <a:ext cx="3566160" cy="2880360"/>
+            <a:ext cx="3566160" cy="3931920"/>
           </a:xfrm>
           <a:prstGeom prst="roundRect">
             <a:avLst>
-              <a:gd name="adj" fmla="val 2540"/>
+              <a:gd name="adj" fmla="val 2051"/>
             </a:avLst>
           </a:prstGeom>
           <a:solidFill>
@@ -13739,23 +13591,23 @@
         <p:spPr>
           <a:xfrm>
             <a:off x="8439912" y="2971800"/>
-            <a:ext cx="3017520" cy="457200"/>
-          </a:xfrm>
-          <a:prstGeom prst="rect">
-            <a:avLst/>
-          </a:prstGeom>
-          <a:noFill/>
-          <a:ln/>
-        </p:spPr>
-        <p:txBody>
-          <a:bodyPr wrap="square" lIns="0" tIns="0" rIns="0" bIns="0" rtlCol="0" anchor="ctr"/>
-          <a:lstStyle/>
-          <a:p>
-            <a:pPr indent="0" marL="0">
-              <a:buNone/>
-            </a:pPr>
-            <a:r>
-              <a:rPr lang="en-US" sz="2100" b="1" dirty="0">
+            <a:ext cx="3017520" cy="502920"/>
+          </a:xfrm>
+          <a:prstGeom prst="rect">
+            <a:avLst/>
+          </a:prstGeom>
+          <a:noFill/>
+          <a:ln/>
+        </p:spPr>
+        <p:txBody>
+          <a:bodyPr wrap="square" lIns="0" tIns="0" rIns="0" bIns="0" rtlCol="0" anchor="ctr"/>
+          <a:lstStyle/>
+          <a:p>
+            <a:pPr indent="0" marL="0">
+              <a:buNone/>
+            </a:pPr>
+            <a:r>
+              <a:rPr lang="en-US" sz="2300" b="1" dirty="0">
                 <a:solidFill>
                   <a:srgbClr val="14212E"/>
                 </a:solidFill>
@@ -13765,7 +13617,7 @@
               </a:rPr>
               <a:t>The learning</a:t>
             </a:r>
-            <a:endParaRPr lang="en-US" sz="2100" dirty="0"/>
+            <a:endParaRPr lang="en-US" sz="2300" dirty="0"/>
           </a:p>
         </p:txBody>
       </p:sp>
@@ -13777,8 +13629,8 @@
         </p:nvSpPr>
         <p:spPr>
           <a:xfrm>
-            <a:off x="8439912" y="3520440"/>
-            <a:ext cx="3017520" cy="1234440"/>
+            <a:off x="8439912" y="3566160"/>
+            <a:ext cx="3017520" cy="2240280"/>
           </a:xfrm>
           <a:prstGeom prst="rect">
             <a:avLst/>
@@ -13797,7 +13649,7 @@
               <a:buNone/>
             </a:pPr>
             <a:r>
-              <a:rPr lang="en-US" sz="1350" dirty="0">
+              <a:rPr lang="en-US" sz="1750" dirty="0">
                 <a:solidFill>
                   <a:srgbClr val="5A6B7B"/>
                 </a:solidFill>
@@ -13805,124 +13657,9 @@
                 <a:ea typeface="Calibri" pitchFamily="34" charset="-122"/>
                 <a:cs typeface="Calibri" pitchFamily="34" charset="-120"/>
               </a:rPr>
-              <a:t>Over weeks the reflex shifts in the trained direction. A 20% change counts as success, and the change is in the spinal cord.</a:t>
-            </a:r>
-            <a:endParaRPr lang="en-US" sz="1350" dirty="0"/>
-          </a:p>
-        </p:txBody>
-      </p:sp>
-      <p:sp>
-        <p:nvSpPr>
-          <p:cNvPr id="19" name="Shape 17"/>
-          <p:cNvSpPr/>
-          <p:nvPr/>
-        </p:nvSpPr>
-        <p:spPr>
-          <a:xfrm>
-            <a:off x="685800" y="5120640"/>
-            <a:ext cx="10881360" cy="914400"/>
-          </a:xfrm>
-          <a:prstGeom prst="roundRect">
-            <a:avLst>
-              <a:gd name="adj" fmla="val 8000"/>
-            </a:avLst>
-          </a:prstGeom>
-          <a:solidFill>
-            <a:srgbClr val="F4F7F9"/>
-          </a:solidFill>
-          <a:ln w="12700">
-            <a:solidFill>
-              <a:srgbClr val="DDE4EA"/>
-            </a:solidFill>
-            <a:prstDash val="solid"/>
-          </a:ln>
-          <a:effectLst>
-            <a:outerShdw sx="100000" sy="100000" kx="0" ky="0" algn="bl" rotWithShape="0" blurRad="127000" dist="38100" dir="5400000">
-              <a:srgbClr val="0C1620">
-                <a:alpha val="11000"/>
-              </a:srgbClr>
-            </a:outerShdw>
-          </a:effectLst>
-        </p:spPr>
-      </p:sp>
-      <p:sp>
-        <p:nvSpPr>
-          <p:cNvPr id="20" name="Text 18"/>
-          <p:cNvSpPr/>
-          <p:nvPr/>
-        </p:nvSpPr>
-        <p:spPr>
-          <a:xfrm>
-            <a:off x="1005840" y="5285232"/>
-            <a:ext cx="10241280" cy="594360"/>
-          </a:xfrm>
-          <a:prstGeom prst="rect">
-            <a:avLst/>
-          </a:prstGeom>
-          <a:noFill/>
-          <a:ln/>
-        </p:spPr>
-        <p:txBody>
-          <a:bodyPr wrap="square" lIns="0" tIns="0" rIns="0" bIns="0" rtlCol="0" anchor="ctr"/>
-          <a:lstStyle/>
-          <a:p>
-            <a:pPr indent="0" marL="0">
-              <a:buNone/>
-            </a:pPr>
-            <a:r>
-              <a:rPr lang="en-US" sz="1400" b="1" dirty="0">
-                <a:solidFill>
-                  <a:srgbClr val="15718F"/>
-                </a:solidFill>
-                <a:latin typeface="Calibri" pitchFamily="34" charset="0"/>
-                <a:ea typeface="Calibri" pitchFamily="34" charset="-122"/>
-                <a:cs typeface="Calibri" pitchFamily="34" charset="-120"/>
-              </a:rPr>
-              <a:t>Already known:  </a:t>
-            </a:r>
-            <a:pPr indent="0" marL="0">
-              <a:buNone/>
-            </a:pPr>
-            <a:r>
-              <a:rPr lang="en-US" sz="1400" dirty="0">
-                <a:solidFill>
-                  <a:srgbClr val="14212E"/>
-                </a:solidFill>
-                <a:latin typeface="Calibri" pitchFamily="34" charset="0"/>
-                <a:ea typeface="Calibri" pitchFamily="34" charset="-122"/>
-                <a:cs typeface="Calibri" pitchFamily="34" charset="-120"/>
-              </a:rPr>
-              <a:t>cortical activity influences reflex size (Boulay, Chen &amp; Wolpaw, 2015).      </a:t>
-            </a:r>
-            <a:pPr indent="0" marL="0">
-              <a:buNone/>
-            </a:pPr>
-            <a:r>
-              <a:rPr lang="en-US" sz="1400" b="1" dirty="0">
-                <a:solidFill>
-                  <a:srgbClr val="15718F"/>
-                </a:solidFill>
-                <a:latin typeface="Calibri" pitchFamily="34" charset="0"/>
-                <a:ea typeface="Calibri" pitchFamily="34" charset="-122"/>
-                <a:cs typeface="Calibri" pitchFamily="34" charset="-120"/>
-              </a:rPr>
-              <a:t>Our question:  </a:t>
-            </a:r>
-            <a:pPr indent="0" marL="0">
-              <a:buNone/>
-            </a:pPr>
-            <a:r>
-              <a:rPr lang="en-US" sz="1400" dirty="0">
-                <a:solidFill>
-                  <a:srgbClr val="14212E"/>
-                </a:solidFill>
-                <a:latin typeface="Calibri" pitchFamily="34" charset="0"/>
-                <a:ea typeface="Calibri" pitchFamily="34" charset="-122"/>
-                <a:cs typeface="Calibri" pitchFamily="34" charset="-120"/>
-              </a:rPr>
-              <a:t>is it visible on a single trial, and does it change as the animal learns?</a:t>
-            </a:r>
-            <a:endParaRPr lang="en-US" sz="1400" dirty="0"/>
+              <a:t>Over weeks the reflex shifts in the trained direction. A 20% change counts as success, and the long-term change is in the spinal cord.</a:t>
+            </a:r>
+            <a:endParaRPr lang="en-US" sz="1750" dirty="0"/>
           </a:p>
         </p:txBody>
       </p:sp>
@@ -13983,7 +13720,7 @@
               <a:buNone/>
             </a:pPr>
             <a:r>
-              <a:rPr lang="en-US" sz="1150" b="1" spc="320" kern="0" dirty="0">
+              <a:rPr lang="en-US" sz="1300" b="1" spc="320" kern="0" dirty="0">
                 <a:solidFill>
                   <a:srgbClr val="3B6E43"/>
                 </a:solidFill>
@@ -13993,7 +13730,7 @@
               </a:rPr>
               <a:t>PART 5 · NEXT</a:t>
             </a:r>
-            <a:endParaRPr lang="en-US" sz="1150" dirty="0"/>
+            <a:endParaRPr lang="en-US" sz="1300" dirty="0"/>
           </a:p>
         </p:txBody>
       </p:sp>
@@ -14154,7 +13891,7 @@
               <a:buNone/>
             </a:pPr>
             <a:r>
-              <a:rPr lang="en-US" sz="1400" b="1" dirty="0">
+              <a:rPr lang="en-US" sz="1600" b="1" dirty="0">
                 <a:solidFill>
                   <a:srgbClr val="14212E"/>
                 </a:solidFill>
@@ -14164,7 +13901,7 @@
               </a:rPr>
               <a:t>Process the remaining animals</a:t>
             </a:r>
-            <a:endParaRPr lang="en-US" sz="1400" dirty="0"/>
+            <a:endParaRPr lang="en-US" sz="1600" dirty="0"/>
           </a:p>
         </p:txBody>
       </p:sp>
@@ -14196,7 +13933,7 @@
               <a:buNone/>
             </a:pPr>
             <a:r>
-              <a:rPr lang="en-US" sz="1250" dirty="0">
+              <a:rPr lang="en-US" sz="1400" dirty="0">
                 <a:solidFill>
                   <a:srgbClr val="5A6B7B"/>
                 </a:solidFill>
@@ -14204,9 +13941,9 @@
                 <a:ea typeface="Calibri" pitchFamily="34" charset="-122"/>
                 <a:cs typeface="Calibri" pitchFamily="34" charset="-120"/>
               </a:rPr>
-              <a:t>Five are downloaded and ready. Takes the sample from five to about ten.</a:t>
-            </a:r>
-            <a:endParaRPr lang="en-US" sz="1250" dirty="0"/>
+              <a:t>Animals 7, 8, 13 and 14, all down-conditioned. Takes the sample from five to nine.</a:t>
+            </a:r>
+            <a:endParaRPr lang="en-US" sz="1400" dirty="0"/>
           </a:p>
         </p:txBody>
       </p:sp>
@@ -14235,7 +13972,7 @@
               <a:buNone/>
             </a:pPr>
             <a:r>
-              <a:rPr lang="en-US" sz="1150" i="1" dirty="0">
+              <a:rPr lang="en-US" sz="1300" i="1" dirty="0">
                 <a:solidFill>
                   <a:srgbClr val="9AA8B4"/>
                 </a:solidFill>
@@ -14243,9 +13980,9 @@
                 <a:ea typeface="Calibri" pitchFamily="34" charset="-122"/>
                 <a:cs typeface="Calibri" pitchFamily="34" charset="-120"/>
               </a:rPr>
-              <a:t>this week</a:t>
-            </a:r>
-            <a:endParaRPr lang="en-US" sz="1150" dirty="0"/>
+              <a:t>next</a:t>
+            </a:r>
+            <a:endParaRPr lang="en-US" sz="1300" dirty="0"/>
           </a:p>
         </p:txBody>
       </p:sp>
@@ -14367,7 +14104,7 @@
               <a:buNone/>
             </a:pPr>
             <a:r>
-              <a:rPr lang="en-US" sz="1400" b="1" dirty="0">
+              <a:rPr lang="en-US" sz="1600" b="1" dirty="0">
                 <a:solidFill>
                   <a:srgbClr val="14212E"/>
                 </a:solidFill>
@@ -14377,7 +14114,7 @@
               </a:rPr>
               <a:t>Power the scaling test</a:t>
             </a:r>
-            <a:endParaRPr lang="en-US" sz="1400" dirty="0"/>
+            <a:endParaRPr lang="en-US" sz="1600" dirty="0"/>
           </a:p>
         </p:txBody>
       </p:sp>
@@ -14409,7 +14146,7 @@
               <a:buNone/>
             </a:pPr>
             <a:r>
-              <a:rPr lang="en-US" sz="1250" dirty="0">
+              <a:rPr lang="en-US" sz="1400" dirty="0">
                 <a:solidFill>
                   <a:srgbClr val="5A6B7B"/>
                 </a:solidFill>
@@ -14417,9 +14154,9 @@
                 <a:ea typeface="Calibri" pitchFamily="34" charset="-122"/>
                 <a:cs typeface="Calibri" pitchFamily="34" charset="-120"/>
               </a:rPr>
-              <a:t>With ten animals the learning-versus-coupling correlation becomes a real test.</a:t>
-            </a:r>
-            <a:endParaRPr lang="en-US" sz="1250" dirty="0"/>
+              <a:t>With nine animals the learning-versus-coupling correlation becomes a real test.</a:t>
+            </a:r>
+            <a:endParaRPr lang="en-US" sz="1400" dirty="0"/>
           </a:p>
         </p:txBody>
       </p:sp>
@@ -14448,7 +14185,7 @@
               <a:buNone/>
             </a:pPr>
             <a:r>
-              <a:rPr lang="en-US" sz="1150" i="1" dirty="0">
+              <a:rPr lang="en-US" sz="1300" i="1" dirty="0">
                 <a:solidFill>
                   <a:srgbClr val="9AA8B4"/>
                 </a:solidFill>
@@ -14458,7 +14195,7 @@
               </a:rPr>
               <a:t>next</a:t>
             </a:r>
-            <a:endParaRPr lang="en-US" sz="1150" dirty="0"/>
+            <a:endParaRPr lang="en-US" sz="1300" dirty="0"/>
           </a:p>
         </p:txBody>
       </p:sp>
@@ -14580,7 +14317,7 @@
               <a:buNone/>
             </a:pPr>
             <a:r>
-              <a:rPr lang="en-US" sz="1400" b="1" dirty="0">
+              <a:rPr lang="en-US" sz="1600" b="1" dirty="0">
                 <a:solidFill>
                   <a:srgbClr val="14212E"/>
                 </a:solidFill>
@@ -14590,7 +14327,7 @@
               </a:rPr>
               <a:t>Frequency-resolved coupling</a:t>
             </a:r>
-            <a:endParaRPr lang="en-US" sz="1400" dirty="0"/>
+            <a:endParaRPr lang="en-US" sz="1600" dirty="0"/>
           </a:p>
         </p:txBody>
       </p:sp>
@@ -14622,7 +14359,7 @@
               <a:buNone/>
             </a:pPr>
             <a:r>
-              <a:rPr lang="en-US" sz="1250" dirty="0">
+              <a:rPr lang="en-US" sz="1400" dirty="0">
                 <a:solidFill>
                   <a:srgbClr val="5A6B7B"/>
                 </a:solidFill>
@@ -14632,7 +14369,7 @@
               </a:rPr>
               <a:t>Which bands carry the reflex information? Sharpens the finding and the contamination argument.</a:t>
             </a:r>
-            <a:endParaRPr lang="en-US" sz="1250" dirty="0"/>
+            <a:endParaRPr lang="en-US" sz="1400" dirty="0"/>
           </a:p>
         </p:txBody>
       </p:sp>
@@ -14661,7 +14398,7 @@
               <a:buNone/>
             </a:pPr>
             <a:r>
-              <a:rPr lang="en-US" sz="1150" i="1" dirty="0">
+              <a:rPr lang="en-US" sz="1300" i="1" dirty="0">
                 <a:solidFill>
                   <a:srgbClr val="9AA8B4"/>
                 </a:solidFill>
@@ -14671,7 +14408,7 @@
               </a:rPr>
               <a:t>next</a:t>
             </a:r>
-            <a:endParaRPr lang="en-US" sz="1150" dirty="0"/>
+            <a:endParaRPr lang="en-US" sz="1300" dirty="0"/>
           </a:p>
         </p:txBody>
       </p:sp>
@@ -14793,7 +14530,7 @@
               <a:buNone/>
             </a:pPr>
             <a:r>
-              <a:rPr lang="en-US" sz="1400" b="1" dirty="0">
+              <a:rPr lang="en-US" sz="1600" b="1" dirty="0">
                 <a:solidFill>
                   <a:srgbClr val="14212E"/>
                 </a:solidFill>
@@ -14803,7 +14540,7 @@
               </a:rPr>
               <a:t>The reward-criterion measure</a:t>
             </a:r>
-            <a:endParaRPr lang="en-US" sz="1400" dirty="0"/>
+            <a:endParaRPr lang="en-US" sz="1600" dirty="0"/>
           </a:p>
         </p:txBody>
       </p:sp>
@@ -14835,7 +14572,7 @@
               <a:buNone/>
             </a:pPr>
             <a:r>
-              <a:rPr lang="en-US" sz="1250" dirty="0">
+              <a:rPr lang="en-US" sz="1400" dirty="0">
                 <a:solidFill>
                   <a:srgbClr val="5A6B7B"/>
                 </a:solidFill>
@@ -14845,7 +14582,7 @@
               </a:rPr>
               <a:t>An independent behavioural record to correlate against.</a:t>
             </a:r>
-            <a:endParaRPr lang="en-US" sz="1250" dirty="0"/>
+            <a:endParaRPr lang="en-US" sz="1400" dirty="0"/>
           </a:p>
         </p:txBody>
       </p:sp>
@@ -14874,7 +14611,7 @@
               <a:buNone/>
             </a:pPr>
             <a:r>
-              <a:rPr lang="en-US" sz="1150" i="1" dirty="0">
+              <a:rPr lang="en-US" sz="1300" i="1" dirty="0">
                 <a:solidFill>
                   <a:srgbClr val="9AA8B4"/>
                 </a:solidFill>
@@ -14884,7 +14621,7 @@
               </a:rPr>
               <a:t>new thread</a:t>
             </a:r>
-            <a:endParaRPr lang="en-US" sz="1150" dirty="0"/>
+            <a:endParaRPr lang="en-US" sz="1300" dirty="0"/>
           </a:p>
         </p:txBody>
       </p:sp>
@@ -15006,7 +14743,7 @@
               <a:buNone/>
             </a:pPr>
             <a:r>
-              <a:rPr lang="en-US" sz="1400" b="1" dirty="0">
+              <a:rPr lang="en-US" sz="1600" b="1" dirty="0">
                 <a:solidFill>
                   <a:srgbClr val="14212E"/>
                 </a:solidFill>
@@ -15016,7 +14753,7 @@
               </a:rPr>
               <a:t>Write it up</a:t>
             </a:r>
-            <a:endParaRPr lang="en-US" sz="1400" dirty="0"/>
+            <a:endParaRPr lang="en-US" sz="1600" dirty="0"/>
           </a:p>
         </p:txBody>
       </p:sp>
@@ -15048,7 +14785,7 @@
               <a:buNone/>
             </a:pPr>
             <a:r>
-              <a:rPr lang="en-US" sz="1250" dirty="0">
+              <a:rPr lang="en-US" sz="1400" dirty="0">
                 <a:solidFill>
                   <a:srgbClr val="5A6B7B"/>
                 </a:solidFill>
@@ -15058,7 +14795,7 @@
               </a:rPr>
               <a:t>Method, finding and warning.</a:t>
             </a:r>
-            <a:endParaRPr lang="en-US" sz="1250" dirty="0"/>
+            <a:endParaRPr lang="en-US" sz="1400" dirty="0"/>
           </a:p>
         </p:txBody>
       </p:sp>
@@ -15087,7 +14824,7 @@
               <a:buNone/>
             </a:pPr>
             <a:r>
-              <a:rPr lang="en-US" sz="1150" i="1" dirty="0">
+              <a:rPr lang="en-US" sz="1300" i="1" dirty="0">
                 <a:solidFill>
                   <a:srgbClr val="9AA8B4"/>
                 </a:solidFill>
@@ -15097,7 +14834,7 @@
               </a:rPr>
               <a:t>after that</a:t>
             </a:r>
-            <a:endParaRPr lang="en-US" sz="1150" dirty="0"/>
+            <a:endParaRPr lang="en-US" sz="1300" dirty="0"/>
           </a:p>
         </p:txBody>
       </p:sp>
@@ -15158,7 +14895,7 @@
               <a:buNone/>
             </a:pPr>
             <a:r>
-              <a:rPr lang="en-US" sz="1150" b="1" spc="320" kern="0" dirty="0">
+              <a:rPr lang="en-US" sz="1300" b="1" spc="320" kern="0" dirty="0">
                 <a:solidFill>
                   <a:srgbClr val="15718F"/>
                 </a:solidFill>
@@ -15168,7 +14905,7 @@
               </a:rPr>
               <a:t>IN SUMMARY</a:t>
             </a:r>
-            <a:endParaRPr lang="en-US" sz="1150" dirty="0"/>
+            <a:endParaRPr lang="en-US" sz="1300" dirty="0"/>
           </a:p>
         </p:txBody>
       </p:sp>
@@ -15292,7 +15029,7 @@
               <a:buNone/>
             </a:pPr>
             <a:r>
-              <a:rPr lang="en-US" sz="1050" b="1" dirty="0">
+              <a:rPr lang="en-US" sz="1200" b="1" dirty="0">
                 <a:solidFill>
                   <a:srgbClr val="FFFFFF"/>
                 </a:solidFill>
@@ -15302,7 +15039,7 @@
               </a:rPr>
               <a:t>SOLID</a:t>
             </a:r>
-            <a:endParaRPr lang="en-US" sz="1050" dirty="0"/>
+            <a:endParaRPr lang="en-US" sz="1200" dirty="0"/>
           </a:p>
         </p:txBody>
       </p:sp>
@@ -15373,7 +15110,7 @@
               <a:buNone/>
             </a:pPr>
             <a:r>
-              <a:rPr lang="en-US" sz="1300" dirty="0">
+              <a:rPr lang="en-US" sz="1450" dirty="0">
                 <a:solidFill>
                   <a:srgbClr val="5A6B7B"/>
                 </a:solidFill>
@@ -15383,7 +15120,7 @@
               </a:rPr>
               <a:t>Both directions, after controlling for stimulus strength and muscle excitability. Three of five animals met the lab's criterion.</a:t>
             </a:r>
-            <a:endParaRPr lang="en-US" sz="1300" dirty="0"/>
+            <a:endParaRPr lang="en-US" sz="1450" dirty="0"/>
           </a:p>
         </p:txBody>
       </p:sp>
@@ -15468,7 +15205,7 @@
               <a:buNone/>
             </a:pPr>
             <a:r>
-              <a:rPr lang="en-US" sz="1050" b="1" dirty="0">
+              <a:rPr lang="en-US" sz="1200" b="1" dirty="0">
                 <a:solidFill>
                   <a:srgbClr val="FFFFFF"/>
                 </a:solidFill>
@@ -15478,7 +15215,7 @@
               </a:rPr>
               <a:t>REAL</a:t>
             </a:r>
-            <a:endParaRPr lang="en-US" sz="1050" dirty="0"/>
+            <a:endParaRPr lang="en-US" sz="1200" dirty="0"/>
           </a:p>
         </p:txBody>
       </p:sp>
@@ -15549,7 +15286,7 @@
               <a:buNone/>
             </a:pPr>
             <a:r>
-              <a:rPr lang="en-US" sz="1300" dirty="0">
+              <a:rPr lang="en-US" sz="1450" dirty="0">
                 <a:solidFill>
                   <a:srgbClr val="5A6B7B"/>
                 </a:solidFill>
@@ -15559,7 +15296,7 @@
               </a:rPr>
               <a:t>It predicts reflex size above its own shuffled control in 99 of 101 windows and in every animal. Small — about 2% of variance uniquely — but almost never absent.</a:t>
             </a:r>
-            <a:endParaRPr lang="en-US" sz="1300" dirty="0"/>
+            <a:endParaRPr lang="en-US" sz="1450" dirty="0"/>
           </a:p>
         </p:txBody>
       </p:sp>
@@ -15644,7 +15381,7 @@
               <a:buNone/>
             </a:pPr>
             <a:r>
-              <a:rPr lang="en-US" sz="1050" b="1" dirty="0">
+              <a:rPr lang="en-US" sz="1200" b="1" dirty="0">
                 <a:solidFill>
                   <a:srgbClr val="FFFFFF"/>
                 </a:solidFill>
@@ -15654,7 +15391,7 @@
               </a:rPr>
               <a:t>USEFUL NEGATIVE</a:t>
             </a:r>
-            <a:endParaRPr lang="en-US" sz="1050" dirty="0"/>
+            <a:endParaRPr lang="en-US" sz="1200" dirty="0"/>
           </a:p>
         </p:txBody>
       </p:sp>
@@ -15725,7 +15462,7 @@
               <a:buNone/>
             </a:pPr>
             <a:r>
-              <a:rPr lang="en-US" sz="1300" dirty="0">
+              <a:rPr lang="en-US" sz="1450" dirty="0">
                 <a:solidFill>
                   <a:srgbClr val="5A6B7B"/>
                 </a:solidFill>
@@ -15735,47 +15472,13 @@
               </a:rPr>
               <a:t>The intuitive analysis produces a convincing result that three separate controls reject.</a:t>
             </a:r>
-            <a:endParaRPr lang="en-US" sz="1300" dirty="0"/>
-          </a:p>
-        </p:txBody>
-      </p:sp>
-      <p:sp>
-        <p:nvSpPr>
-          <p:cNvPr id="19" name="Shape 17"/>
-          <p:cNvSpPr/>
-          <p:nvPr/>
-        </p:nvSpPr>
-        <p:spPr>
-          <a:xfrm>
-            <a:off x="685800" y="6400800"/>
-            <a:ext cx="10881360" cy="0"/>
-          </a:xfrm>
-          <a:prstGeom prst="roundRect">
-            <a:avLst>
-              <a:gd name="adj" fmla="val Infinity"/>
-            </a:avLst>
-          </a:prstGeom>
-          <a:solidFill>
-            <a:srgbClr val="FFFFFF"/>
-          </a:solidFill>
-          <a:ln w="12700">
-            <a:solidFill>
-              <a:srgbClr val="DDE4EA"/>
-            </a:solidFill>
-            <a:prstDash val="solid"/>
-          </a:ln>
-          <a:effectLst>
-            <a:outerShdw sx="100000" sy="100000" kx="0" ky="0" algn="bl" rotWithShape="0" blurRad="127000" dist="38100" dir="5400000">
-              <a:srgbClr val="0C1620">
-                <a:alpha val="11000"/>
-              </a:srgbClr>
-            </a:outerShdw>
-          </a:effectLst>
-        </p:spPr>
-      </p:sp>
-      <p:sp>
-        <p:nvSpPr>
-          <p:cNvPr id="20" name="Text 18"/>
+            <a:endParaRPr lang="en-US" sz="1450" dirty="0"/>
+          </a:p>
+        </p:txBody>
+      </p:sp>
+      <p:sp>
+        <p:nvSpPr>
+          <p:cNvPr id="19" name="Text 17"/>
           <p:cNvSpPr/>
           <p:nvPr/>
         </p:nvSpPr>
@@ -15798,7 +15501,7 @@
               <a:buNone/>
             </a:pPr>
             <a:r>
-              <a:rPr lang="en-US" sz="1250" i="1" dirty="0">
+              <a:rPr lang="en-US" sz="1400" i="1" dirty="0">
                 <a:solidFill>
                   <a:srgbClr val="5A6B7B"/>
                 </a:solidFill>
@@ -15808,7 +15511,7 @@
               </a:rPr>
               <a:t>Every number above is corrected for stimulus intensity and pre-stimulus muscle activity, and survives a shuffle control.</a:t>
             </a:r>
-            <a:endParaRPr lang="en-US" sz="1250" dirty="0"/>
+            <a:endParaRPr lang="en-US" sz="1400" dirty="0"/>
           </a:p>
         </p:txBody>
       </p:sp>
@@ -15869,7 +15572,7 @@
               <a:buNone/>
             </a:pPr>
             <a:r>
-              <a:rPr lang="en-US" sz="1150" b="1" spc="320" kern="0" dirty="0">
+              <a:rPr lang="en-US" sz="1300" b="1" spc="320" kern="0" dirty="0">
                 <a:solidFill>
                   <a:srgbClr val="B4671A"/>
                 </a:solidFill>
@@ -15879,7 +15582,7 @@
               </a:rPr>
               <a:t>STILL OPEN</a:t>
             </a:r>
-            <a:endParaRPr lang="en-US" sz="1150" dirty="0"/>
+            <a:endParaRPr lang="en-US" sz="1300" dirty="0"/>
           </a:p>
         </p:txBody>
       </p:sp>
@@ -16043,7 +15746,7 @@
               <a:buNone/>
             </a:pPr>
             <a:r>
-              <a:rPr lang="en-US" sz="1400" b="1" dirty="0">
+              <a:rPr lang="en-US" sz="1600" b="1" dirty="0">
                 <a:solidFill>
                   <a:srgbClr val="14212E"/>
                 </a:solidFill>
@@ -16053,7 +15756,7 @@
               </a:rPr>
               <a:t>Does the coupling grow with learning?</a:t>
             </a:r>
-            <a:endParaRPr lang="en-US" sz="1400" dirty="0"/>
+            <a:endParaRPr lang="en-US" sz="1600" dirty="0"/>
           </a:p>
         </p:txBody>
       </p:sp>
@@ -16085,7 +15788,7 @@
               <a:buNone/>
             </a:pPr>
             <a:r>
-              <a:rPr lang="en-US" sz="1250" dirty="0">
+              <a:rPr lang="en-US" sz="1400" dirty="0">
                 <a:solidFill>
                   <a:srgbClr val="5A6B7B"/>
                 </a:solidFill>
@@ -16093,9 +15796,9 @@
                 <a:ea typeface="Calibri" pitchFamily="34" charset="-122"/>
                 <a:cs typeface="Calibri" pitchFamily="34" charset="-120"/>
               </a:rPr>
-              <a:t>The correlation points the right way (r = +0.71) but five animals cannot settle it. Five more are processed and waiting.</a:t>
-            </a:r>
-            <a:endParaRPr lang="en-US" sz="1250" dirty="0"/>
+              <a:t>The correlation points the right way (r = +0.64) but five animals cannot settle it. Four more are next.</a:t>
+            </a:r>
+            <a:endParaRPr lang="en-US" sz="1400" dirty="0"/>
           </a:p>
         </p:txBody>
       </p:sp>
@@ -16220,7 +15923,7 @@
               <a:buNone/>
             </a:pPr>
             <a:r>
-              <a:rPr lang="en-US" sz="1400" b="1" dirty="0">
+              <a:rPr lang="en-US" sz="1600" b="1" dirty="0">
                 <a:solidFill>
                   <a:srgbClr val="14212E"/>
                 </a:solidFill>
@@ -16230,7 +15933,7 @@
               </a:rPr>
               <a:t>Which frequencies carry it?</a:t>
             </a:r>
-            <a:endParaRPr lang="en-US" sz="1400" dirty="0"/>
+            <a:endParaRPr lang="en-US" sz="1600" dirty="0"/>
           </a:p>
         </p:txBody>
       </p:sp>
@@ -16262,7 +15965,7 @@
               <a:buNone/>
             </a:pPr>
             <a:r>
-              <a:rPr lang="en-US" sz="1250" dirty="0">
+              <a:rPr lang="en-US" sz="1400" dirty="0">
                 <a:solidFill>
                   <a:srgbClr val="5A6B7B"/>
                 </a:solidFill>
@@ -16272,7 +15975,7 @@
               </a:rPr>
               <a:t>Would sharpen both the finding and the argument against muscle contamination.</a:t>
             </a:r>
-            <a:endParaRPr lang="en-US" sz="1250" dirty="0"/>
+            <a:endParaRPr lang="en-US" sz="1400" dirty="0"/>
           </a:p>
         </p:txBody>
       </p:sp>
@@ -16397,7 +16100,7 @@
               <a:buNone/>
             </a:pPr>
             <a:r>
-              <a:rPr lang="en-US" sz="1400" b="1" dirty="0">
+              <a:rPr lang="en-US" sz="1600" b="1" dirty="0">
                 <a:solidFill>
                   <a:srgbClr val="14212E"/>
                 </a:solidFill>
@@ -16407,7 +16110,7 @@
               </a:rPr>
               <a:t>Is 2% of variance biologically meaningful?</a:t>
             </a:r>
-            <a:endParaRPr lang="en-US" sz="1400" dirty="0"/>
+            <a:endParaRPr lang="en-US" sz="1600" dirty="0"/>
           </a:p>
         </p:txBody>
       </p:sp>
@@ -16439,7 +16142,7 @@
               <a:buNone/>
             </a:pPr>
             <a:r>
-              <a:rPr lang="en-US" sz="1250" dirty="0">
+              <a:rPr lang="en-US" sz="1400" dirty="0">
                 <a:solidFill>
                   <a:srgbClr val="5A6B7B"/>
                 </a:solidFill>
@@ -16449,7 +16152,7 @@
               </a:rPr>
               <a:t>It is reliable. Whether it matters is a question for this room more than for us.</a:t>
             </a:r>
-            <a:endParaRPr lang="en-US" sz="1250" dirty="0"/>
+            <a:endParaRPr lang="en-US" sz="1400" dirty="0"/>
           </a:p>
         </p:txBody>
       </p:sp>
@@ -16574,7 +16277,7 @@
               <a:buNone/>
             </a:pPr>
             <a:r>
-              <a:rPr lang="en-US" sz="1400" b="1" dirty="0">
+              <a:rPr lang="en-US" sz="1600" b="1" dirty="0">
                 <a:solidFill>
                   <a:srgbClr val="14212E"/>
                 </a:solidFill>
@@ -16584,7 +16287,7 @@
               </a:rPr>
               <a:t>What else could produce it?</a:t>
             </a:r>
-            <a:endParaRPr lang="en-US" sz="1400" dirty="0"/>
+            <a:endParaRPr lang="en-US" sz="1600" dirty="0"/>
           </a:p>
         </p:txBody>
       </p:sp>
@@ -16616,7 +16319,7 @@
               <a:buNone/>
             </a:pPr>
             <a:r>
-              <a:rPr lang="en-US" sz="1250" dirty="0">
+              <a:rPr lang="en-US" sz="1400" dirty="0">
                 <a:solidFill>
                   <a:srgbClr val="5A6B7B"/>
                 </a:solidFill>
@@ -16626,7 +16329,7 @@
               </a:rPr>
               <a:t>We have excluded stimulus, muscle tone, drift and crosstalk. We would genuinely like to know what we are missing.</a:t>
             </a:r>
-            <a:endParaRPr lang="en-US" sz="1250" dirty="0"/>
+            <a:endParaRPr lang="en-US" sz="1400" dirty="0"/>
           </a:p>
         </p:txBody>
       </p:sp>
@@ -16687,7 +16390,7 @@
               <a:buNone/>
             </a:pPr>
             <a:r>
-              <a:rPr lang="en-US" sz="1150" b="1" spc="320" kern="0" dirty="0">
+              <a:rPr lang="en-US" sz="1300" b="1" spc="320" kern="0" dirty="0">
                 <a:solidFill>
                   <a:srgbClr val="15718F"/>
                 </a:solidFill>
@@ -16697,7 +16400,7 @@
               </a:rPr>
               <a:t>EVERYTHING IS PUBLIC</a:t>
             </a:r>
-            <a:endParaRPr lang="en-US" sz="1150" dirty="0"/>
+            <a:endParaRPr lang="en-US" sz="1300" dirty="0"/>
           </a:p>
         </p:txBody>
       </p:sp>
@@ -16861,7 +16564,7 @@
               <a:buNone/>
             </a:pPr>
             <a:r>
-              <a:rPr lang="en-US" sz="1100" dirty="0">
+              <a:rPr lang="en-US" sz="1250" dirty="0">
                 <a:solidFill>
                   <a:srgbClr val="15718F"/>
                 </a:solidFill>
@@ -16871,7 +16574,7 @@
               </a:rPr>
               <a:t>switchrao777.github.io/hroc-ncan</a:t>
             </a:r>
-            <a:endParaRPr lang="en-US" sz="1100" dirty="0"/>
+            <a:endParaRPr lang="en-US" sz="1250" dirty="0"/>
           </a:p>
         </p:txBody>
       </p:sp>
@@ -16903,7 +16606,7 @@
               <a:buNone/>
             </a:pPr>
             <a:r>
-              <a:rPr lang="en-US" sz="1250" dirty="0">
+              <a:rPr lang="en-US" sz="1400" dirty="0">
                 <a:solidFill>
                   <a:srgbClr val="5A6B7B"/>
                 </a:solidFill>
@@ -16913,7 +16616,7 @@
               </a:rPr>
               <a:t>Findings, figures and links in one place.</a:t>
             </a:r>
-            <a:endParaRPr lang="en-US" sz="1250" dirty="0"/>
+            <a:endParaRPr lang="en-US" sz="1400" dirty="0"/>
           </a:p>
         </p:txBody>
       </p:sp>
@@ -17038,7 +16741,7 @@
               <a:buNone/>
             </a:pPr>
             <a:r>
-              <a:rPr lang="en-US" sz="1100" dirty="0">
+              <a:rPr lang="en-US" sz="1250" dirty="0">
                 <a:solidFill>
                   <a:srgbClr val="6B4E8F"/>
                 </a:solidFill>
@@ -17048,7 +16751,7 @@
               </a:rPr>
               <a:t>github.com/switchrao777/hroc-ncan</a:t>
             </a:r>
-            <a:endParaRPr lang="en-US" sz="1100" dirty="0"/>
+            <a:endParaRPr lang="en-US" sz="1250" dirty="0"/>
           </a:p>
         </p:txBody>
       </p:sp>
@@ -17080,7 +16783,7 @@
               <a:buNone/>
             </a:pPr>
             <a:r>
-              <a:rPr lang="en-US" sz="1250" dirty="0">
+              <a:rPr lang="en-US" sz="1400" dirty="0">
                 <a:solidFill>
                   <a:srgbClr val="5A6B7B"/>
                 </a:solidFill>
@@ -17090,7 +16793,7 @@
               </a:rPr>
               <a:t>The full pipeline. Two commands per animal, reproducible end to end.</a:t>
             </a:r>
-            <a:endParaRPr lang="en-US" sz="1250" dirty="0"/>
+            <a:endParaRPr lang="en-US" sz="1400" dirty="0"/>
           </a:p>
         </p:txBody>
       </p:sp>
@@ -17215,7 +16918,7 @@
               <a:buNone/>
             </a:pPr>
             <a:r>
-              <a:rPr lang="en-US" sz="1100" dirty="0">
+              <a:rPr lang="en-US" sz="1250" dirty="0">
                 <a:solidFill>
                   <a:srgbClr val="3B6E43"/>
                 </a:solidFill>
@@ -17225,7 +16928,7 @@
               </a:rPr>
               <a:t>docs/HROC_Report.pdf</a:t>
             </a:r>
-            <a:endParaRPr lang="en-US" sz="1100" dirty="0"/>
+            <a:endParaRPr lang="en-US" sz="1250" dirty="0"/>
           </a:p>
         </p:txBody>
       </p:sp>
@@ -17257,7 +16960,7 @@
               <a:buNone/>
             </a:pPr>
             <a:r>
-              <a:rPr lang="en-US" sz="1250" dirty="0">
+              <a:rPr lang="en-US" sz="1400" dirty="0">
                 <a:solidFill>
                   <a:srgbClr val="5A6B7B"/>
                 </a:solidFill>
@@ -17267,7 +16970,7 @@
               </a:rPr>
               <a:t>Six pages: background, methods, results, limitations, references.</a:t>
             </a:r>
-            <a:endParaRPr lang="en-US" sz="1250" dirty="0"/>
+            <a:endParaRPr lang="en-US" sz="1400" dirty="0"/>
           </a:p>
         </p:txBody>
       </p:sp>
@@ -17330,7 +17033,7 @@
               <a:buNone/>
             </a:pPr>
             <a:r>
-              <a:rPr lang="en-US" sz="1400" b="1" dirty="0">
+              <a:rPr lang="en-US" sz="1600" b="1" dirty="0">
                 <a:solidFill>
                   <a:srgbClr val="14212E"/>
                 </a:solidFill>
@@ -17340,7 +17043,7 @@
               </a:rPr>
               <a:t>What is in the repository</a:t>
             </a:r>
-            <a:endParaRPr lang="en-US" sz="1400" dirty="0"/>
+            <a:endParaRPr lang="en-US" sz="1600" dirty="0"/>
           </a:p>
         </p:txBody>
       </p:sp>
@@ -17372,7 +17075,7 @@
               <a:buNone/>
             </a:pPr>
             <a:r>
-              <a:rPr lang="en-US" sz="1300" dirty="0">
+              <a:rPr lang="en-US" sz="1450" dirty="0">
                 <a:solidFill>
                   <a:srgbClr val="5A6B7B"/>
                 </a:solidFill>
@@ -17380,9 +17083,9 @@
                 <a:ea typeface="Calibri" pitchFamily="34" charset="-122"/>
                 <a:cs typeface="Calibri" pitchFamily="34" charset="-120"/>
               </a:rPr>
-              <a:t>Every decoding and analysis script, the trained encoder, all 90+ figures, per-animal numerical results, a starter notebook, and setup instructions. No raw recordings — those stay with NCAN.</a:t>
-            </a:r>
-            <a:endParaRPr lang="en-US" sz="1300" dirty="0"/>
+              <a:t>Every decoding and analysis script, the trained encoder, all 90+ figures, per-animal numerical results, a starter notebook, and setup instructions. Raw recordings are available through NCAN.</a:t>
+            </a:r>
+            <a:endParaRPr lang="en-US" sz="1450" dirty="0"/>
           </a:p>
         </p:txBody>
       </p:sp>
@@ -17529,7 +17232,7 @@
               <a:buNone/>
             </a:pPr>
             <a:r>
-              <a:rPr lang="en-US" sz="1550" dirty="0">
+              <a:rPr lang="en-US" sz="1750" dirty="0">
                 <a:solidFill>
                   <a:srgbClr val="C3D0DA"/>
                 </a:solidFill>
@@ -17537,29 +17240,9 @@
                 <a:ea typeface="Calibri" pitchFamily="34" charset="-122"/>
                 <a:cs typeface="Calibri" pitchFamily="34" charset="-120"/>
               </a:rPr>
-              <a:t>With thanks to Dr. Jonathan Carp and Teresa, whose suggestions — the sham control, the</a:t>
-            </a:r>
-            <a:endParaRPr lang="en-US" sz="1550" dirty="0"/>
-          </a:p>
-          <a:p>
-            <a:pPr indent="0" marL="0">
-              <a:lnSpc>
-                <a:spcPct val="125000"/>
-              </a:lnSpc>
-              <a:buNone/>
-            </a:pPr>
-            <a:r>
-              <a:rPr lang="en-US" sz="1550" dirty="0">
-                <a:solidFill>
-                  <a:srgbClr val="C3D0DA"/>
-                </a:solidFill>
-                <a:latin typeface="Calibri" pitchFamily="34" charset="0"/>
-                <a:ea typeface="Calibri" pitchFamily="34" charset="-122"/>
-                <a:cs typeface="Calibri" pitchFamily="34" charset="-120"/>
-              </a:rPr>
-              <a:t>randomised order test, and the pre-stimulus covariate — changed what this project concluded.</a:t>
-            </a:r>
-            <a:endParaRPr lang="en-US" sz="1550" dirty="0"/>
+              <a:t>With thanks to Dr. Jonathan Carp and Theresa Vaughan for their guidance throughout this project.</a:t>
+            </a:r>
+            <a:endParaRPr lang="en-US" sz="1750" dirty="0"/>
           </a:p>
         </p:txBody>
       </p:sp>
@@ -17588,7 +17271,7 @@
               <a:buNone/>
             </a:pPr>
             <a:r>
-              <a:rPr lang="en-US" sz="1500" b="1" dirty="0">
+              <a:rPr lang="en-US" sz="1700" b="1" dirty="0">
                 <a:solidFill>
                   <a:srgbClr val="FFFFFF"/>
                 </a:solidFill>
@@ -17598,7 +17281,7 @@
               </a:rPr>
               <a:t>Suchith Rao  ·  Tarun Senthil</a:t>
             </a:r>
-            <a:endParaRPr lang="en-US" sz="1500" dirty="0"/>
+            <a:endParaRPr lang="en-US" sz="1700" dirty="0"/>
           </a:p>
         </p:txBody>
       </p:sp>
@@ -17627,7 +17310,7 @@
               <a:buNone/>
             </a:pPr>
             <a:r>
-              <a:rPr lang="en-US" sz="1350" dirty="0">
+              <a:rPr lang="en-US" sz="1550" dirty="0">
                 <a:solidFill>
                   <a:srgbClr val="7FB8C9"/>
                 </a:solidFill>
@@ -17637,7 +17320,7 @@
               </a:rPr>
               <a:t>switchrao777.github.io/hroc-ncan</a:t>
             </a:r>
-            <a:endParaRPr lang="en-US" sz="1350" dirty="0"/>
+            <a:endParaRPr lang="en-US" sz="1550" dirty="0"/>
           </a:p>
         </p:txBody>
       </p:sp>
@@ -17666,7 +17349,7 @@
               <a:buNone/>
             </a:pPr>
             <a:r>
-              <a:rPr lang="en-US" sz="1350" i="1" dirty="0">
+              <a:rPr lang="en-US" sz="1550" i="1" dirty="0">
                 <a:solidFill>
                   <a:srgbClr val="8B9AA6"/>
                 </a:solidFill>
@@ -17676,7 +17359,7 @@
               </a:rPr>
               <a:t>Happy to take questions.</a:t>
             </a:r>
-            <a:endParaRPr lang="en-US" sz="1350" dirty="0"/>
+            <a:endParaRPr lang="en-US" sz="1550" dirty="0"/>
           </a:p>
         </p:txBody>
       </p:sp>
@@ -17737,7 +17420,7 @@
               <a:buNone/>
             </a:pPr>
             <a:r>
-              <a:rPr lang="en-US" sz="1150" b="1" spc="320" kern="0" dirty="0">
+              <a:rPr lang="en-US" sz="1300" b="1" spc="320" kern="0" dirty="0">
                 <a:solidFill>
                   <a:srgbClr val="15718F"/>
                 </a:solidFill>
@@ -17745,9 +17428,9 @@
                 <a:ea typeface="Calibri" pitchFamily="34" charset="-122"/>
                 <a:cs typeface="Calibri" pitchFamily="34" charset="-120"/>
               </a:rPr>
-              <a:t>PART 1 · THE QUESTION</a:t>
-            </a:r>
-            <a:endParaRPr lang="en-US" sz="1150" dirty="0"/>
+              <a:t>PART 1 · WHAT WAS ALREADY KNOWN</a:t>
+            </a:r>
+            <a:endParaRPr lang="en-US" sz="1300" dirty="0"/>
           </a:p>
         </p:txBody>
       </p:sp>
@@ -17784,26 +17467,89 @@
                 <a:ea typeface="Cambria" pitchFamily="34" charset="-122"/>
                 <a:cs typeface="Cambria" pitchFamily="34" charset="-120"/>
               </a:rPr>
-              <a:t>Why bring machine learning to this</a:t>
+              <a:t>What this builds on: Boulay, Chen &amp; Wolpaw, 2015</a:t>
             </a:r>
             <a:endParaRPr lang="en-US" sz="3000" dirty="0"/>
           </a:p>
         </p:txBody>
       </p:sp>
-      <p:sp>
-        <p:nvSpPr>
-          <p:cNvPr id="4" name="Shape 2"/>
-          <p:cNvSpPr/>
-          <p:nvPr/>
-        </p:nvSpPr>
-        <p:spPr>
-          <a:xfrm>
-            <a:off x="685800" y="1965960"/>
-            <a:ext cx="5349240" cy="2377440"/>
+      <p:pic>
+        <p:nvPicPr>
+          <p:cNvPr id="4" name="Image 0" descr="/Users/suchithrao/Downloads/hroc-training/outputs/diagrams/boulay_titlepage.png">    </p:cNvPr>
+          <p:cNvPicPr>
+            <a:picLocks noChangeAspect="1"/>
+          </p:cNvPicPr>
+          <p:nvPr/>
+        </p:nvPicPr>
+        <p:blipFill>
+          <a:blip r:embed="rId1"/>
+          <a:stretch>
+            <a:fillRect/>
+          </a:stretch>
+        </p:blipFill>
+        <p:spPr>
+          <a:xfrm>
+            <a:off x="689928" y="1828800"/>
+            <a:ext cx="5112384" cy="2788920"/>
+          </a:xfrm>
+          <a:prstGeom prst="rect">
+            <a:avLst/>
+          </a:prstGeom>
+        </p:spPr>
+      </p:pic>
+      <p:sp>
+        <p:nvSpPr>
+          <p:cNvPr id="5" name="Text 2"/>
+          <p:cNvSpPr/>
+          <p:nvPr/>
+        </p:nvSpPr>
+        <p:spPr>
+          <a:xfrm>
+            <a:off x="685800" y="4681728"/>
+            <a:ext cx="5120640" cy="320040"/>
+          </a:xfrm>
+          <a:prstGeom prst="rect">
+            <a:avLst/>
+          </a:prstGeom>
+          <a:noFill/>
+          <a:ln/>
+        </p:spPr>
+        <p:txBody>
+          <a:bodyPr wrap="square" lIns="0" tIns="0" rIns="0" bIns="0" rtlCol="0" anchor="ctr"/>
+          <a:lstStyle/>
+          <a:p>
+            <a:pPr indent="0" marL="0">
+              <a:buNone/>
+            </a:pPr>
+            <a:r>
+              <a:rPr lang="en-US" sz="1350" i="1" dirty="0">
+                <a:solidFill>
+                  <a:srgbClr val="5A6B7B"/>
+                </a:solidFill>
+                <a:latin typeface="Calibri" pitchFamily="34" charset="0"/>
+                <a:ea typeface="Calibri" pitchFamily="34" charset="-122"/>
+                <a:cs typeface="Calibri" pitchFamily="34" charset="-120"/>
+              </a:rPr>
+              <a:t>J Neurophysiol 113:2232–2241, 2015</a:t>
+            </a:r>
+            <a:endParaRPr lang="en-US" sz="1350" dirty="0"/>
+          </a:p>
+        </p:txBody>
+      </p:sp>
+      <p:sp>
+        <p:nvSpPr>
+          <p:cNvPr id="6" name="Shape 3"/>
+          <p:cNvSpPr/>
+          <p:nvPr/>
+        </p:nvSpPr>
+        <p:spPr>
+          <a:xfrm>
+            <a:off x="6080760" y="1783080"/>
+            <a:ext cx="5486400" cy="3749040"/>
           </a:xfrm>
           <a:prstGeom prst="roundRect">
             <a:avLst>
-              <a:gd name="adj" fmla="val 3077"/>
+              <a:gd name="adj" fmla="val 1951"/>
             </a:avLst>
           </a:prstGeom>
           <a:solidFill>
@@ -17826,38 +17572,80 @@
       </p:sp>
       <p:sp>
         <p:nvSpPr>
-          <p:cNvPr id="5" name="Text 3"/>
-          <p:cNvSpPr/>
-          <p:nvPr/>
-        </p:nvSpPr>
-        <p:spPr>
-          <a:xfrm>
-            <a:off x="960120" y="2176272"/>
-            <a:ext cx="4572000" cy="320040"/>
-          </a:xfrm>
-          <a:prstGeom prst="rect">
-            <a:avLst/>
-          </a:prstGeom>
-          <a:noFill/>
-          <a:ln/>
-        </p:spPr>
-        <p:txBody>
-          <a:bodyPr wrap="square" lIns="0" tIns="0" rIns="0" bIns="0" rtlCol="0" anchor="ctr"/>
-          <a:lstStyle/>
-          <a:p>
-            <a:pPr indent="0" marL="0">
-              <a:buNone/>
-            </a:pPr>
-            <a:r>
-              <a:rPr lang="en-US" sz="1450" b="1" dirty="0">
-                <a:solidFill>
-                  <a:srgbClr val="5A6B7B"/>
-                </a:solidFill>
-                <a:latin typeface="Calibri" pitchFamily="34" charset="0"/>
-                <a:ea typeface="Calibri" pitchFamily="34" charset="-122"/>
-                <a:cs typeface="Calibri" pitchFamily="34" charset="-120"/>
-              </a:rPr>
-              <a:t>The usual approach</a:t>
+          <p:cNvPr id="7" name="Text 4"/>
+          <p:cNvSpPr/>
+          <p:nvPr/>
+        </p:nvSpPr>
+        <p:spPr>
+          <a:xfrm>
+            <a:off x="6355080" y="1920240"/>
+            <a:ext cx="4937760" cy="320040"/>
+          </a:xfrm>
+          <a:prstGeom prst="rect">
+            <a:avLst/>
+          </a:prstGeom>
+          <a:noFill/>
+          <a:ln/>
+        </p:spPr>
+        <p:txBody>
+          <a:bodyPr wrap="square" lIns="0" tIns="0" rIns="0" bIns="0" rtlCol="0" anchor="ctr"/>
+          <a:lstStyle/>
+          <a:p>
+            <a:pPr indent="0" marL="0">
+              <a:buNone/>
+            </a:pPr>
+            <a:r>
+              <a:rPr lang="en-US" sz="1650" b="1" dirty="0">
+                <a:solidFill>
+                  <a:srgbClr val="15718F"/>
+                </a:solidFill>
+                <a:latin typeface="Calibri" pitchFamily="34" charset="0"/>
+                <a:ea typeface="Calibri" pitchFamily="34" charset="-122"/>
+                <a:cs typeface="Calibri" pitchFamily="34" charset="-120"/>
+              </a:rPr>
+              <a:t>Their question</a:t>
+            </a:r>
+            <a:endParaRPr lang="en-US" sz="1650" dirty="0"/>
+          </a:p>
+        </p:txBody>
+      </p:sp>
+      <p:sp>
+        <p:nvSpPr>
+          <p:cNvPr id="8" name="Text 5"/>
+          <p:cNvSpPr/>
+          <p:nvPr/>
+        </p:nvSpPr>
+        <p:spPr>
+          <a:xfrm>
+            <a:off x="6355080" y="2240280"/>
+            <a:ext cx="4983480" cy="777240"/>
+          </a:xfrm>
+          <a:prstGeom prst="rect">
+            <a:avLst/>
+          </a:prstGeom>
+          <a:noFill/>
+          <a:ln/>
+        </p:spPr>
+        <p:txBody>
+          <a:bodyPr wrap="square" lIns="0" tIns="0" rIns="0" bIns="0" rtlCol="0" anchor="ctr"/>
+          <a:lstStyle/>
+          <a:p>
+            <a:pPr indent="0" marL="0">
+              <a:lnSpc>
+                <a:spcPct val="105000"/>
+              </a:lnSpc>
+              <a:buNone/>
+            </a:pPr>
+            <a:r>
+              <a:rPr lang="en-US" sz="1450" dirty="0">
+                <a:solidFill>
+                  <a:srgbClr val="14212E"/>
+                </a:solidFill>
+                <a:latin typeface="Calibri" pitchFamily="34" charset="0"/>
+                <a:ea typeface="Calibri" pitchFamily="34" charset="-122"/>
+                <a:cs typeface="Calibri" pitchFamily="34" charset="-120"/>
+              </a:rPr>
+              <a:t>How does ongoing sensorimotor cortex activity affect H-reflex size? 41 awake rats; ECoG, soleus EMG and H-reflex recorded together.</a:t>
             </a:r>
             <a:endParaRPr lang="en-US" sz="1450" dirty="0"/>
           </a:p>
@@ -17865,30 +17653,73 @@
       </p:sp>
       <p:sp>
         <p:nvSpPr>
-          <p:cNvPr id="6" name="Text 4"/>
-          <p:cNvSpPr/>
-          <p:nvPr/>
-        </p:nvSpPr>
-        <p:spPr>
-          <a:xfrm>
-            <a:off x="960120" y="2560320"/>
-            <a:ext cx="4846320" cy="1097280"/>
-          </a:xfrm>
-          <a:prstGeom prst="rect">
-            <a:avLst/>
-          </a:prstGeom>
-          <a:noFill/>
-          <a:ln/>
-        </p:spPr>
-        <p:txBody>
-          <a:bodyPr wrap="square" lIns="0" tIns="0" rIns="0" bIns="0" rtlCol="0" anchor="ctr"/>
-          <a:lstStyle/>
-          <a:p>
-            <a:pPr indent="0" marL="0">
+          <p:cNvPr id="9" name="Text 6"/>
+          <p:cNvSpPr/>
+          <p:nvPr/>
+        </p:nvSpPr>
+        <p:spPr>
+          <a:xfrm>
+            <a:off x="6355080" y="3090672"/>
+            <a:ext cx="4937760" cy="320040"/>
+          </a:xfrm>
+          <a:prstGeom prst="rect">
+            <a:avLst/>
+          </a:prstGeom>
+          <a:noFill/>
+          <a:ln/>
+        </p:spPr>
+        <p:txBody>
+          <a:bodyPr wrap="square" lIns="0" tIns="0" rIns="0" bIns="0" rtlCol="0" anchor="ctr"/>
+          <a:lstStyle/>
+          <a:p>
+            <a:pPr indent="0" marL="0">
+              <a:buNone/>
+            </a:pPr>
+            <a:r>
+              <a:rPr lang="en-US" sz="1650" b="1" dirty="0">
+                <a:solidFill>
+                  <a:srgbClr val="15718F"/>
+                </a:solidFill>
+                <a:latin typeface="Calibri" pitchFamily="34" charset="0"/>
+                <a:ea typeface="Calibri" pitchFamily="34" charset="-122"/>
+                <a:cs typeface="Calibri" pitchFamily="34" charset="-120"/>
+              </a:rPr>
+              <a:t>What they found</a:t>
+            </a:r>
+            <a:endParaRPr lang="en-US" sz="1650" dirty="0"/>
+          </a:p>
+        </p:txBody>
+      </p:sp>
+      <p:sp>
+        <p:nvSpPr>
+          <p:cNvPr id="10" name="Text 7"/>
+          <p:cNvSpPr/>
+          <p:nvPr/>
+        </p:nvSpPr>
+        <p:spPr>
+          <a:xfrm>
+            <a:off x="6355080" y="3429000"/>
+            <a:ext cx="5029200" cy="2011680"/>
+          </a:xfrm>
+          <a:prstGeom prst="rect">
+            <a:avLst/>
+          </a:prstGeom>
+          <a:noFill/>
+          <a:ln/>
+        </p:spPr>
+        <p:txBody>
+          <a:bodyPr wrap="square" lIns="0" tIns="0" rIns="0" bIns="0" rtlCol="0" anchor="ctr"/>
+          <a:lstStyle/>
+          <a:p>
+            <a:pPr marL="342900" indent="-342900">
               <a:lnSpc>
-                <a:spcPct val="106000"/>
+                <a:spcPct val="105000"/>
               </a:lnSpc>
-              <a:buNone/>
+              <a:spcAft>
+                <a:spcPts val="400"/>
+              </a:spcAft>
+              <a:buSzPct val="100000"/>
+              <a:buChar char="•"/>
             </a:pPr>
             <a:r>
               <a:rPr lang="en-US" sz="1400" dirty="0">
@@ -17899,65 +17730,74 @@
                 <a:ea typeface="Calibri" pitchFamily="34" charset="-122"/>
                 <a:cs typeface="Calibri" pitchFamily="34" charset="-120"/>
               </a:rPr>
-              <a:t>Decide in advance which features of the brain trace might matter — a peak here, a band of power there — then measure those.</a:t>
+              <a:t>Cortical activity fell into three bands: μβ (5–30 Hz), low γ (40–85 Hz), high γ (100–200 Hz).</a:t>
             </a:r>
             <a:endParaRPr lang="en-US" sz="1400" dirty="0"/>
           </a:p>
-        </p:txBody>
-      </p:sp>
-      <p:sp>
-        <p:nvSpPr>
-          <p:cNvPr id="7" name="Text 5"/>
-          <p:cNvSpPr/>
-          <p:nvPr/>
-        </p:nvSpPr>
-        <p:spPr>
-          <a:xfrm>
-            <a:off x="960120" y="3749040"/>
-            <a:ext cx="4846320" cy="457200"/>
-          </a:xfrm>
-          <a:prstGeom prst="rect">
-            <a:avLst/>
-          </a:prstGeom>
-          <a:noFill/>
-          <a:ln/>
-        </p:spPr>
-        <p:txBody>
-          <a:bodyPr wrap="square" lIns="0" tIns="0" rIns="0" bIns="0" rtlCol="0" anchor="ctr"/>
-          <a:lstStyle/>
-          <a:p>
-            <a:pPr indent="0" marL="0">
-              <a:buNone/>
-            </a:pPr>
-            <a:r>
-              <a:rPr lang="en-US" sz="1250" i="1" dirty="0">
-                <a:solidFill>
-                  <a:srgbClr val="A44430"/>
-                </a:solidFill>
-                <a:latin typeface="Calibri" pitchFamily="34" charset="0"/>
-                <a:ea typeface="Calibri" pitchFamily="34" charset="-122"/>
-                <a:cs typeface="Calibri" pitchFamily="34" charset="-120"/>
-              </a:rPr>
-              <a:t>Whatever you didn't think of, you don't measure.</a:t>
-            </a:r>
-            <a:endParaRPr lang="en-US" sz="1250" dirty="0"/>
-          </a:p>
-        </p:txBody>
-      </p:sp>
-      <p:sp>
-        <p:nvSpPr>
-          <p:cNvPr id="8" name="Shape 6"/>
-          <p:cNvSpPr/>
-          <p:nvPr/>
-        </p:nvSpPr>
-        <p:spPr>
-          <a:xfrm>
-            <a:off x="6217920" y="1965960"/>
-            <a:ext cx="5349240" cy="2377440"/>
+          <a:p>
+            <a:pPr marL="342900" indent="-342900">
+              <a:lnSpc>
+                <a:spcPct val="105000"/>
+              </a:lnSpc>
+              <a:spcAft>
+                <a:spcPts val="400"/>
+              </a:spcAft>
+              <a:buSzPct val="100000"/>
+              <a:buChar char="•"/>
+            </a:pPr>
+            <a:r>
+              <a:rPr lang="en-US" sz="1400" dirty="0">
+                <a:solidFill>
+                  <a:srgbClr val="14212E"/>
+                </a:solidFill>
+                <a:latin typeface="Calibri" pitchFamily="34" charset="0"/>
+                <a:ea typeface="Calibri" pitchFamily="34" charset="-122"/>
+                <a:cs typeface="Calibri" pitchFamily="34" charset="-120"/>
+              </a:rPr>
+              <a:t>Background soleus EMG tracked cortical state: lower μβ and higher low-γ power went with more muscle activity.</a:t>
+            </a:r>
+            <a:endParaRPr lang="en-US" sz="1400" dirty="0"/>
+          </a:p>
+          <a:p>
+            <a:pPr marL="342900" indent="-342900">
+              <a:lnSpc>
+                <a:spcPct val="105000"/>
+              </a:lnSpc>
+              <a:spcAft>
+                <a:spcPts val="400"/>
+              </a:spcAft>
+              <a:buSzPct val="100000"/>
+              <a:buChar char="•"/>
+            </a:pPr>
+            <a:r>
+              <a:rPr lang="en-US" sz="1400" dirty="0">
+                <a:solidFill>
+                  <a:srgbClr val="14212E"/>
+                </a:solidFill>
+                <a:latin typeface="Calibri" pitchFamily="34" charset="0"/>
+                <a:ea typeface="Calibri" pitchFamily="34" charset="-122"/>
+                <a:cs typeface="Calibri" pitchFamily="34" charset="-120"/>
+              </a:rPr>
+              <a:t>H-reflex size related to the same bands in the opposite direction, but only once background EMG was in the model.</a:t>
+            </a:r>
+            <a:endParaRPr lang="en-US" sz="1400" dirty="0"/>
+          </a:p>
+        </p:txBody>
+      </p:sp>
+      <p:sp>
+        <p:nvSpPr>
+          <p:cNvPr id="11" name="Shape 8"/>
+          <p:cNvSpPr/>
+          <p:nvPr/>
+        </p:nvSpPr>
+        <p:spPr>
+          <a:xfrm>
+            <a:off x="685800" y="5669280"/>
+            <a:ext cx="10881360" cy="777240"/>
           </a:xfrm>
           <a:prstGeom prst="roundRect">
             <a:avLst>
-              <a:gd name="adj" fmla="val 3077"/>
+              <a:gd name="adj" fmla="val 9412"/>
             </a:avLst>
           </a:prstGeom>
           <a:solidFill>
@@ -17980,30 +17820,30 @@
       </p:sp>
       <p:sp>
         <p:nvSpPr>
-          <p:cNvPr id="9" name="Text 7"/>
-          <p:cNvSpPr/>
-          <p:nvPr/>
-        </p:nvSpPr>
-        <p:spPr>
-          <a:xfrm>
-            <a:off x="6492240" y="2176272"/>
-            <a:ext cx="4572000" cy="320040"/>
-          </a:xfrm>
-          <a:prstGeom prst="rect">
-            <a:avLst/>
-          </a:prstGeom>
-          <a:noFill/>
-          <a:ln/>
-        </p:spPr>
-        <p:txBody>
-          <a:bodyPr wrap="square" lIns="0" tIns="0" rIns="0" bIns="0" rtlCol="0" anchor="ctr"/>
-          <a:lstStyle/>
-          <a:p>
-            <a:pPr indent="0" marL="0">
-              <a:buNone/>
-            </a:pPr>
-            <a:r>
-              <a:rPr lang="en-US" sz="1450" b="1" dirty="0">
+          <p:cNvPr id="12" name="Text 9"/>
+          <p:cNvSpPr/>
+          <p:nvPr/>
+        </p:nvSpPr>
+        <p:spPr>
+          <a:xfrm>
+            <a:off x="960120" y="5742432"/>
+            <a:ext cx="10332720" cy="640080"/>
+          </a:xfrm>
+          <a:prstGeom prst="rect">
+            <a:avLst/>
+          </a:prstGeom>
+          <a:noFill/>
+          <a:ln/>
+        </p:spPr>
+        <p:txBody>
+          <a:bodyPr wrap="square" lIns="0" tIns="0" rIns="0" bIns="0" rtlCol="0" anchor="ctr"/>
+          <a:lstStyle/>
+          <a:p>
+            <a:pPr indent="0" marL="0">
+              <a:buNone/>
+            </a:pPr>
+            <a:r>
+              <a:rPr lang="en-US" sz="1600" b="1" dirty="0">
                 <a:solidFill>
                   <a:srgbClr val="15718F"/>
                 </a:solidFill>
@@ -18011,41 +17851,13 @@
                 <a:ea typeface="Calibri" pitchFamily="34" charset="-122"/>
                 <a:cs typeface="Calibri" pitchFamily="34" charset="-120"/>
               </a:rPr>
-              <a:t>What we did instead</a:t>
-            </a:r>
-            <a:endParaRPr lang="en-US" sz="1450" dirty="0"/>
-          </a:p>
-        </p:txBody>
-      </p:sp>
-      <p:sp>
-        <p:nvSpPr>
-          <p:cNvPr id="10" name="Text 8"/>
-          <p:cNvSpPr/>
-          <p:nvPr/>
-        </p:nvSpPr>
-        <p:spPr>
-          <a:xfrm>
-            <a:off x="6492240" y="2560320"/>
-            <a:ext cx="4846320" cy="1188720"/>
-          </a:xfrm>
-          <a:prstGeom prst="rect">
-            <a:avLst/>
-          </a:prstGeom>
-          <a:noFill/>
-          <a:ln/>
-        </p:spPr>
-        <p:txBody>
-          <a:bodyPr wrap="square" lIns="0" tIns="0" rIns="0" bIns="0" rtlCol="0" anchor="ctr"/>
-          <a:lstStyle/>
-          <a:p>
-            <a:pPr indent="0" marL="0">
-              <a:lnSpc>
-                <a:spcPct val="106000"/>
-              </a:lnSpc>
-              <a:buNone/>
-            </a:pPr>
-            <a:r>
-              <a:rPr lang="en-US" sz="1400" dirty="0">
+              <a:t>Already known:  </a:t>
+            </a:r>
+            <a:pPr indent="0" marL="0">
+              <a:buNone/>
+            </a:pPr>
+            <a:r>
+              <a:rPr lang="en-US" sz="1600" dirty="0">
                 <a:solidFill>
                   <a:srgbClr val="14212E"/>
                 </a:solidFill>
@@ -18053,38 +17865,13 @@
                 <a:ea typeface="Calibri" pitchFamily="34" charset="-122"/>
                 <a:cs typeface="Calibri" pitchFamily="34" charset="-120"/>
               </a:rPr>
-              <a:t>Let a network learn its own compact description of each trace, with no labels and no assumptions, then test what that description can predict.</a:t>
-            </a:r>
-            <a:endParaRPr lang="en-US" sz="1400" dirty="0"/>
-          </a:p>
-        </p:txBody>
-      </p:sp>
-      <p:sp>
-        <p:nvSpPr>
-          <p:cNvPr id="11" name="Text 9"/>
-          <p:cNvSpPr/>
-          <p:nvPr/>
-        </p:nvSpPr>
-        <p:spPr>
-          <a:xfrm>
-            <a:off x="6492240" y="3794760"/>
-            <a:ext cx="4846320" cy="457200"/>
-          </a:xfrm>
-          <a:prstGeom prst="rect">
-            <a:avLst/>
-          </a:prstGeom>
-          <a:noFill/>
-          <a:ln/>
-        </p:spPr>
-        <p:txBody>
-          <a:bodyPr wrap="square" lIns="0" tIns="0" rIns="0" bIns="0" rtlCol="0" anchor="ctr"/>
-          <a:lstStyle/>
-          <a:p>
-            <a:pPr indent="0" marL="0">
-              <a:buNone/>
-            </a:pPr>
-            <a:r>
-              <a:rPr lang="en-US" sz="1250" i="1" dirty="0">
+              <a:t>cortex influences reflex size.     </a:t>
+            </a:r>
+            <a:pPr indent="0" marL="0">
+              <a:buNone/>
+            </a:pPr>
+            <a:r>
+              <a:rPr lang="en-US" sz="1600" b="1" dirty="0">
                 <a:solidFill>
                   <a:srgbClr val="15718F"/>
                 </a:solidFill>
@@ -18092,114 +17879,13 @@
                 <a:ea typeface="Calibri" pitchFamily="34" charset="-122"/>
                 <a:cs typeface="Calibri" pitchFamily="34" charset="-120"/>
               </a:rPr>
-              <a:t>With 2.7 million trials, that is tractable.</a:t>
-            </a:r>
-            <a:endParaRPr lang="en-US" sz="1250" dirty="0"/>
-          </a:p>
-        </p:txBody>
-      </p:sp>
-      <p:sp>
-        <p:nvSpPr>
-          <p:cNvPr id="12" name="Shape 10"/>
-          <p:cNvSpPr/>
-          <p:nvPr/>
-        </p:nvSpPr>
-        <p:spPr>
-          <a:xfrm>
-            <a:off x="685800" y="4617720"/>
-            <a:ext cx="10881360" cy="1371600"/>
-          </a:xfrm>
-          <a:prstGeom prst="roundRect">
-            <a:avLst>
-              <a:gd name="adj" fmla="val 5333"/>
-            </a:avLst>
-          </a:prstGeom>
-          <a:solidFill>
-            <a:srgbClr val="F4F7F9"/>
-          </a:solidFill>
-          <a:ln w="12700">
-            <a:solidFill>
-              <a:srgbClr val="DDE4EA"/>
-            </a:solidFill>
-            <a:prstDash val="solid"/>
-          </a:ln>
-          <a:effectLst>
-            <a:outerShdw sx="100000" sy="100000" kx="0" ky="0" algn="bl" rotWithShape="0" blurRad="127000" dist="38100" dir="5400000">
-              <a:srgbClr val="0C1620">
-                <a:alpha val="11000"/>
-              </a:srgbClr>
-            </a:outerShdw>
-          </a:effectLst>
-        </p:spPr>
-      </p:sp>
-      <p:sp>
-        <p:nvSpPr>
-          <p:cNvPr id="13" name="Text 11"/>
-          <p:cNvSpPr/>
-          <p:nvPr/>
-        </p:nvSpPr>
-        <p:spPr>
-          <a:xfrm>
-            <a:off x="1005840" y="4800600"/>
-            <a:ext cx="5486400" cy="320040"/>
-          </a:xfrm>
-          <a:prstGeom prst="rect">
-            <a:avLst/>
-          </a:prstGeom>
-          <a:noFill/>
-          <a:ln/>
-        </p:spPr>
-        <p:txBody>
-          <a:bodyPr wrap="square" lIns="0" tIns="0" rIns="0" bIns="0" rtlCol="0" anchor="ctr"/>
-          <a:lstStyle/>
-          <a:p>
-            <a:pPr indent="0" marL="0">
-              <a:buNone/>
-            </a:pPr>
-            <a:r>
-              <a:rPr lang="en-US" sz="1400" b="1" dirty="0">
-                <a:solidFill>
-                  <a:srgbClr val="6B4E8F"/>
-                </a:solidFill>
-                <a:latin typeface="Calibri" pitchFamily="34" charset="0"/>
-                <a:ea typeface="Calibri" pitchFamily="34" charset="-122"/>
-                <a:cs typeface="Calibri" pitchFamily="34" charset="-120"/>
-              </a:rPr>
-              <a:t>The precedent</a:t>
-            </a:r>
-            <a:endParaRPr lang="en-US" sz="1400" dirty="0"/>
-          </a:p>
-        </p:txBody>
-      </p:sp>
-      <p:sp>
-        <p:nvSpPr>
-          <p:cNvPr id="14" name="Text 12"/>
-          <p:cNvSpPr/>
-          <p:nvPr/>
-        </p:nvSpPr>
-        <p:spPr>
-          <a:xfrm>
-            <a:off x="1005840" y="5138928"/>
-            <a:ext cx="10241280" cy="777240"/>
-          </a:xfrm>
-          <a:prstGeom prst="rect">
-            <a:avLst/>
-          </a:prstGeom>
-          <a:noFill/>
-          <a:ln/>
-        </p:spPr>
-        <p:txBody>
-          <a:bodyPr wrap="square" lIns="0" tIns="0" rIns="0" bIns="0" rtlCol="0" anchor="ctr"/>
-          <a:lstStyle/>
-          <a:p>
-            <a:pPr indent="0" marL="0">
-              <a:lnSpc>
-                <a:spcPct val="106000"/>
-              </a:lnSpc>
-              <a:buNone/>
-            </a:pPr>
-            <a:r>
-              <a:rPr lang="en-US" sz="1350" dirty="0">
+              <a:t>Our question:  </a:t>
+            </a:r>
+            <a:pPr indent="0" marL="0">
+              <a:buNone/>
+            </a:pPr>
+            <a:r>
+              <a:rPr lang="en-US" sz="1600" dirty="0">
                 <a:solidFill>
                   <a:srgbClr val="14212E"/>
                 </a:solidFill>
@@ -18207,9 +17893,9 @@
                 <a:ea typeface="Calibri" pitchFamily="34" charset="-122"/>
                 <a:cs typeface="Calibri" pitchFamily="34" charset="-120"/>
               </a:rPr>
-              <a:t>This mirrors what BrainBERT did for human intracranial recordings — learn a general representation of neural signal first, without labels, then use it for whatever downstream question you have. We use a much smaller model, because we have one channel and a 30 ms window rather than a whole electrode array.</a:t>
-            </a:r>
-            <a:endParaRPr lang="en-US" sz="1350" dirty="0"/>
+              <a:t>is it visible on a single trial, and does it change as the animal learns?</a:t>
+            </a:r>
+            <a:endParaRPr lang="en-US" sz="1600" dirty="0"/>
           </a:p>
         </p:txBody>
       </p:sp>
@@ -18270,17 +17956,17 @@
               <a:buNone/>
             </a:pPr>
             <a:r>
-              <a:rPr lang="en-US" sz="1150" b="1" spc="320" kern="0" dirty="0">
-                <a:solidFill>
-                  <a:srgbClr val="B4671A"/>
-                </a:solidFill>
-                <a:latin typeface="Calibri" pitchFamily="34" charset="0"/>
-                <a:ea typeface="Calibri" pitchFamily="34" charset="-122"/>
-                <a:cs typeface="Calibri" pitchFamily="34" charset="-120"/>
-              </a:rPr>
-              <a:t>PART 2 · THE DATA</a:t>
-            </a:r>
-            <a:endParaRPr lang="en-US" sz="1150" dirty="0"/>
+              <a:rPr lang="en-US" sz="1300" b="1" spc="320" kern="0" dirty="0">
+                <a:solidFill>
+                  <a:srgbClr val="15718F"/>
+                </a:solidFill>
+                <a:latin typeface="Calibri" pitchFamily="34" charset="0"/>
+                <a:ea typeface="Calibri" pitchFamily="34" charset="-122"/>
+                <a:cs typeface="Calibri" pitchFamily="34" charset="-120"/>
+              </a:rPr>
+              <a:t>PART 1 · THE QUESTION</a:t>
+            </a:r>
+            <a:endParaRPr lang="en-US" sz="1300" dirty="0"/>
           </a:p>
         </p:txBody>
       </p:sp>
@@ -18317,7 +18003,7 @@
                 <a:ea typeface="Cambria" pitchFamily="34" charset="-122"/>
                 <a:cs typeface="Cambria" pitchFamily="34" charset="-120"/>
               </a:rPr>
-              <a:t>What a single trial looks like</a:t>
+              <a:t>Why bring machine learning to this</a:t>
             </a:r>
             <a:endParaRPr lang="en-US" sz="3000" dirty="0"/>
           </a:p>
@@ -18325,83 +18011,18 @@
       </p:sp>
       <p:sp>
         <p:nvSpPr>
-          <p:cNvPr id="4" name="Text 2"/>
-          <p:cNvSpPr/>
-          <p:nvPr/>
-        </p:nvSpPr>
-        <p:spPr>
-          <a:xfrm>
-            <a:off x="685800" y="1536192"/>
-            <a:ext cx="10881360" cy="566928"/>
-          </a:xfrm>
-          <a:prstGeom prst="rect">
-            <a:avLst/>
-          </a:prstGeom>
-          <a:noFill/>
-          <a:ln/>
-        </p:spPr>
-        <p:txBody>
-          <a:bodyPr wrap="square" lIns="0" tIns="0" rIns="0" bIns="0" rtlCol="0" anchor="ctr"/>
-          <a:lstStyle/>
-          <a:p>
-            <a:pPr indent="0" marL="0">
-              <a:lnSpc>
-                <a:spcPct val="106000"/>
-              </a:lnSpc>
-              <a:buNone/>
-            </a:pPr>
-            <a:r>
-              <a:rPr lang="en-US" sz="1500" dirty="0">
-                <a:solidFill>
-                  <a:srgbClr val="5A6B7B"/>
-                </a:solidFill>
-                <a:latin typeface="Calibri" pitchFamily="34" charset="0"/>
-                <a:ea typeface="Calibri" pitchFamily="34" charset="-122"/>
-                <a:cs typeface="Calibri" pitchFamily="34" charset="-120"/>
-              </a:rPr>
-              <a:t>Every shock produces one trial: a 30-millisecond window, two electrodes recorded at the same moment.</a:t>
-            </a:r>
-            <a:endParaRPr lang="en-US" sz="1500" dirty="0"/>
-          </a:p>
-        </p:txBody>
-      </p:sp>
-      <p:pic>
-        <p:nvPicPr>
-          <p:cNvPr id="5" name="Image 0" descr="/Users/suchithrao/Downloads/hroc-training/outputs/validate/avg_emg.png">    </p:cNvPr>
-          <p:cNvPicPr>
-            <a:picLocks noChangeAspect="1"/>
-          </p:cNvPicPr>
-          <p:nvPr/>
-        </p:nvPicPr>
-        <p:blipFill>
-          <a:blip r:embed="rId1"/>
-          <a:srcRect l="0" r="0" t="0" b="0"/>
-          <a:stretch/>
-        </p:blipFill>
-        <p:spPr>
-          <a:xfrm>
-            <a:off x="685800" y="2148840"/>
-            <a:ext cx="6400800" cy="3200400"/>
-          </a:xfrm>
-          <a:prstGeom prst="rect">
-            <a:avLst/>
-          </a:prstGeom>
-        </p:spPr>
-      </p:pic>
-      <p:sp>
-        <p:nvSpPr>
-          <p:cNvPr id="6" name="Shape 3"/>
-          <p:cNvSpPr/>
-          <p:nvPr/>
-        </p:nvSpPr>
-        <p:spPr>
-          <a:xfrm>
-            <a:off x="7680960" y="2194560"/>
-            <a:ext cx="3886200" cy="3200400"/>
+          <p:cNvPr id="4" name="Shape 2"/>
+          <p:cNvSpPr/>
+          <p:nvPr/>
+        </p:nvSpPr>
+        <p:spPr>
+          <a:xfrm>
+            <a:off x="685800" y="1965960"/>
+            <a:ext cx="5349240" cy="2377440"/>
           </a:xfrm>
           <a:prstGeom prst="roundRect">
             <a:avLst>
-              <a:gd name="adj" fmla="val 2286"/>
+              <a:gd name="adj" fmla="val 3077"/>
             </a:avLst>
           </a:prstGeom>
           <a:solidFill>
@@ -18424,30 +18045,72 @@
       </p:sp>
       <p:sp>
         <p:nvSpPr>
-          <p:cNvPr id="7" name="Text 4"/>
-          <p:cNvSpPr/>
-          <p:nvPr/>
-        </p:nvSpPr>
-        <p:spPr>
-          <a:xfrm>
-            <a:off x="7955280" y="2395728"/>
-            <a:ext cx="3291840" cy="320040"/>
-          </a:xfrm>
-          <a:prstGeom prst="rect">
-            <a:avLst/>
-          </a:prstGeom>
-          <a:noFill/>
-          <a:ln/>
-        </p:spPr>
-        <p:txBody>
-          <a:bodyPr wrap="square" lIns="0" tIns="0" rIns="0" bIns="0" rtlCol="0" anchor="ctr"/>
-          <a:lstStyle/>
-          <a:p>
-            <a:pPr indent="0" marL="0">
-              <a:buNone/>
-            </a:pPr>
-            <a:r>
-              <a:rPr lang="en-US" sz="1400" b="1" dirty="0">
+          <p:cNvPr id="5" name="Text 3"/>
+          <p:cNvSpPr/>
+          <p:nvPr/>
+        </p:nvSpPr>
+        <p:spPr>
+          <a:xfrm>
+            <a:off x="960120" y="2176272"/>
+            <a:ext cx="4572000" cy="320040"/>
+          </a:xfrm>
+          <a:prstGeom prst="rect">
+            <a:avLst/>
+          </a:prstGeom>
+          <a:noFill/>
+          <a:ln/>
+        </p:spPr>
+        <p:txBody>
+          <a:bodyPr wrap="square" lIns="0" tIns="0" rIns="0" bIns="0" rtlCol="0" anchor="ctr"/>
+          <a:lstStyle/>
+          <a:p>
+            <a:pPr indent="0" marL="0">
+              <a:buNone/>
+            </a:pPr>
+            <a:r>
+              <a:rPr lang="en-US" sz="1650" b="1" dirty="0">
+                <a:solidFill>
+                  <a:srgbClr val="5A6B7B"/>
+                </a:solidFill>
+                <a:latin typeface="Calibri" pitchFamily="34" charset="0"/>
+                <a:ea typeface="Calibri" pitchFamily="34" charset="-122"/>
+                <a:cs typeface="Calibri" pitchFamily="34" charset="-120"/>
+              </a:rPr>
+              <a:t>The usual approach</a:t>
+            </a:r>
+            <a:endParaRPr lang="en-US" sz="1650" dirty="0"/>
+          </a:p>
+        </p:txBody>
+      </p:sp>
+      <p:sp>
+        <p:nvSpPr>
+          <p:cNvPr id="6" name="Text 4"/>
+          <p:cNvSpPr/>
+          <p:nvPr/>
+        </p:nvSpPr>
+        <p:spPr>
+          <a:xfrm>
+            <a:off x="960120" y="2560320"/>
+            <a:ext cx="4846320" cy="1097280"/>
+          </a:xfrm>
+          <a:prstGeom prst="rect">
+            <a:avLst/>
+          </a:prstGeom>
+          <a:noFill/>
+          <a:ln/>
+        </p:spPr>
+        <p:txBody>
+          <a:bodyPr wrap="square" lIns="0" tIns="0" rIns="0" bIns="0" rtlCol="0" anchor="ctr"/>
+          <a:lstStyle/>
+          <a:p>
+            <a:pPr indent="0" marL="0">
+              <a:lnSpc>
+                <a:spcPct val="106000"/>
+              </a:lnSpc>
+              <a:buNone/>
+            </a:pPr>
+            <a:r>
+              <a:rPr lang="en-US" sz="1600" dirty="0">
                 <a:solidFill>
                   <a:srgbClr val="14212E"/>
                 </a:solidFill>
@@ -18455,7 +18118,46 @@
                 <a:ea typeface="Calibri" pitchFamily="34" charset="-122"/>
                 <a:cs typeface="Calibri" pitchFamily="34" charset="-120"/>
               </a:rPr>
-              <a:t>Reading the trace</a:t>
+              <a:t>Decide in advance which features of the recording might matter — a peak here, a band of power there — then measure those.</a:t>
+            </a:r>
+            <a:endParaRPr lang="en-US" sz="1600" dirty="0"/>
+          </a:p>
+        </p:txBody>
+      </p:sp>
+      <p:sp>
+        <p:nvSpPr>
+          <p:cNvPr id="7" name="Text 5"/>
+          <p:cNvSpPr/>
+          <p:nvPr/>
+        </p:nvSpPr>
+        <p:spPr>
+          <a:xfrm>
+            <a:off x="960120" y="3749040"/>
+            <a:ext cx="4846320" cy="457200"/>
+          </a:xfrm>
+          <a:prstGeom prst="rect">
+            <a:avLst/>
+          </a:prstGeom>
+          <a:noFill/>
+          <a:ln/>
+        </p:spPr>
+        <p:txBody>
+          <a:bodyPr wrap="square" lIns="0" tIns="0" rIns="0" bIns="0" rtlCol="0" anchor="ctr"/>
+          <a:lstStyle/>
+          <a:p>
+            <a:pPr indent="0" marL="0">
+              <a:buNone/>
+            </a:pPr>
+            <a:r>
+              <a:rPr lang="en-US" sz="1400" i="1" dirty="0">
+                <a:solidFill>
+                  <a:srgbClr val="A44430"/>
+                </a:solidFill>
+                <a:latin typeface="Calibri" pitchFamily="34" charset="0"/>
+                <a:ea typeface="Calibri" pitchFamily="34" charset="-122"/>
+                <a:cs typeface="Calibri" pitchFamily="34" charset="-120"/>
+              </a:rPr>
+              <a:t>Whatever you didn't think of, you don't measure.</a:t>
             </a:r>
             <a:endParaRPr lang="en-US" sz="1400" dirty="0"/>
           </a:p>
@@ -18463,50 +18165,106 @@
       </p:sp>
       <p:sp>
         <p:nvSpPr>
-          <p:cNvPr id="8" name="Shape 5"/>
-          <p:cNvSpPr/>
-          <p:nvPr/>
-        </p:nvSpPr>
-        <p:spPr>
-          <a:xfrm>
-            <a:off x="7991856" y="2926080"/>
-            <a:ext cx="155448" cy="155448"/>
-          </a:xfrm>
-          <a:prstGeom prst="ellipse">
-            <a:avLst/>
+          <p:cNvPr id="8" name="Shape 6"/>
+          <p:cNvSpPr/>
+          <p:nvPr/>
+        </p:nvSpPr>
+        <p:spPr>
+          <a:xfrm>
+            <a:off x="6217920" y="1965960"/>
+            <a:ext cx="5349240" cy="2377440"/>
+          </a:xfrm>
+          <a:prstGeom prst="roundRect">
+            <a:avLst>
+              <a:gd name="adj" fmla="val 3077"/>
+            </a:avLst>
           </a:prstGeom>
           <a:solidFill>
-            <a:srgbClr val="9AA8B4"/>
+            <a:srgbClr val="EAF4F7"/>
           </a:solidFill>
-          <a:ln/>
-        </p:spPr>
-      </p:sp>
-      <p:sp>
-        <p:nvSpPr>
-          <p:cNvPr id="9" name="Text 6"/>
-          <p:cNvSpPr/>
-          <p:nvPr/>
-        </p:nvSpPr>
-        <p:spPr>
-          <a:xfrm>
-            <a:off x="8247888" y="2807208"/>
-            <a:ext cx="3017520" cy="301752"/>
-          </a:xfrm>
-          <a:prstGeom prst="rect">
-            <a:avLst/>
-          </a:prstGeom>
-          <a:noFill/>
-          <a:ln/>
-        </p:spPr>
-        <p:txBody>
-          <a:bodyPr wrap="square" lIns="0" tIns="0" rIns="0" bIns="0" rtlCol="0" anchor="ctr"/>
-          <a:lstStyle/>
-          <a:p>
-            <a:pPr indent="0" marL="0">
-              <a:buNone/>
-            </a:pPr>
-            <a:r>
-              <a:rPr lang="en-US" sz="1250" b="1" dirty="0">
+          <a:ln w="12700">
+            <a:solidFill>
+              <a:srgbClr val="DDE4EA"/>
+            </a:solidFill>
+            <a:prstDash val="solid"/>
+          </a:ln>
+          <a:effectLst>
+            <a:outerShdw sx="100000" sy="100000" kx="0" ky="0" algn="bl" rotWithShape="0" blurRad="127000" dist="38100" dir="5400000">
+              <a:srgbClr val="0C1620">
+                <a:alpha val="11000"/>
+              </a:srgbClr>
+            </a:outerShdw>
+          </a:effectLst>
+        </p:spPr>
+      </p:sp>
+      <p:sp>
+        <p:nvSpPr>
+          <p:cNvPr id="9" name="Text 7"/>
+          <p:cNvSpPr/>
+          <p:nvPr/>
+        </p:nvSpPr>
+        <p:spPr>
+          <a:xfrm>
+            <a:off x="6492240" y="2176272"/>
+            <a:ext cx="4572000" cy="320040"/>
+          </a:xfrm>
+          <a:prstGeom prst="rect">
+            <a:avLst/>
+          </a:prstGeom>
+          <a:noFill/>
+          <a:ln/>
+        </p:spPr>
+        <p:txBody>
+          <a:bodyPr wrap="square" lIns="0" tIns="0" rIns="0" bIns="0" rtlCol="0" anchor="ctr"/>
+          <a:lstStyle/>
+          <a:p>
+            <a:pPr indent="0" marL="0">
+              <a:buNone/>
+            </a:pPr>
+            <a:r>
+              <a:rPr lang="en-US" sz="1650" b="1" dirty="0">
+                <a:solidFill>
+                  <a:srgbClr val="15718F"/>
+                </a:solidFill>
+                <a:latin typeface="Calibri" pitchFamily="34" charset="0"/>
+                <a:ea typeface="Calibri" pitchFamily="34" charset="-122"/>
+                <a:cs typeface="Calibri" pitchFamily="34" charset="-120"/>
+              </a:rPr>
+              <a:t>What we did instead</a:t>
+            </a:r>
+            <a:endParaRPr lang="en-US" sz="1650" dirty="0"/>
+          </a:p>
+        </p:txBody>
+      </p:sp>
+      <p:sp>
+        <p:nvSpPr>
+          <p:cNvPr id="10" name="Text 8"/>
+          <p:cNvSpPr/>
+          <p:nvPr/>
+        </p:nvSpPr>
+        <p:spPr>
+          <a:xfrm>
+            <a:off x="6492240" y="2560320"/>
+            <a:ext cx="4846320" cy="1188720"/>
+          </a:xfrm>
+          <a:prstGeom prst="rect">
+            <a:avLst/>
+          </a:prstGeom>
+          <a:noFill/>
+          <a:ln/>
+        </p:spPr>
+        <p:txBody>
+          <a:bodyPr wrap="square" lIns="0" tIns="0" rIns="0" bIns="0" rtlCol="0" anchor="ctr"/>
+          <a:lstStyle/>
+          <a:p>
+            <a:pPr indent="0" marL="0">
+              <a:lnSpc>
+                <a:spcPct val="106000"/>
+              </a:lnSpc>
+              <a:buNone/>
+            </a:pPr>
+            <a:r>
+              <a:rPr lang="en-US" sz="1600" dirty="0">
                 <a:solidFill>
                   <a:srgbClr val="14212E"/>
                 </a:solidFill>
@@ -18514,22 +18272,134 @@
                 <a:ea typeface="Calibri" pitchFamily="34" charset="-122"/>
                 <a:cs typeface="Calibri" pitchFamily="34" charset="-120"/>
               </a:rPr>
-              <a:t>The spike at zero</a:t>
-            </a:r>
-            <a:endParaRPr lang="en-US" sz="1250" dirty="0"/>
-          </a:p>
-        </p:txBody>
-      </p:sp>
-      <p:sp>
-        <p:nvSpPr>
-          <p:cNvPr id="10" name="Text 7"/>
-          <p:cNvSpPr/>
-          <p:nvPr/>
-        </p:nvSpPr>
-        <p:spPr>
-          <a:xfrm>
-            <a:off x="8247888" y="3099816"/>
-            <a:ext cx="3063240" cy="621792"/>
+              <a:t>Let a network learn its own compact description of each trace, with no labels and no assumptions, then test what that description can predict.</a:t>
+            </a:r>
+            <a:endParaRPr lang="en-US" sz="1600" dirty="0"/>
+          </a:p>
+        </p:txBody>
+      </p:sp>
+      <p:sp>
+        <p:nvSpPr>
+          <p:cNvPr id="11" name="Text 9"/>
+          <p:cNvSpPr/>
+          <p:nvPr/>
+        </p:nvSpPr>
+        <p:spPr>
+          <a:xfrm>
+            <a:off x="6492240" y="3794760"/>
+            <a:ext cx="4846320" cy="457200"/>
+          </a:xfrm>
+          <a:prstGeom prst="rect">
+            <a:avLst/>
+          </a:prstGeom>
+          <a:noFill/>
+          <a:ln/>
+        </p:spPr>
+        <p:txBody>
+          <a:bodyPr wrap="square" lIns="0" tIns="0" rIns="0" bIns="0" rtlCol="0" anchor="ctr"/>
+          <a:lstStyle/>
+          <a:p>
+            <a:pPr indent="0" marL="0">
+              <a:buNone/>
+            </a:pPr>
+            <a:r>
+              <a:rPr lang="en-US" sz="1400" i="1" dirty="0">
+                <a:solidFill>
+                  <a:srgbClr val="15718F"/>
+                </a:solidFill>
+                <a:latin typeface="Calibri" pitchFamily="34" charset="0"/>
+                <a:ea typeface="Calibri" pitchFamily="34" charset="-122"/>
+                <a:cs typeface="Calibri" pitchFamily="34" charset="-120"/>
+              </a:rPr>
+              <a:t>With 2.7 million trials, that is tractable.</a:t>
+            </a:r>
+            <a:endParaRPr lang="en-US" sz="1400" dirty="0"/>
+          </a:p>
+        </p:txBody>
+      </p:sp>
+      <p:sp>
+        <p:nvSpPr>
+          <p:cNvPr id="12" name="Shape 10"/>
+          <p:cNvSpPr/>
+          <p:nvPr/>
+        </p:nvSpPr>
+        <p:spPr>
+          <a:xfrm>
+            <a:off x="685800" y="4572000"/>
+            <a:ext cx="10881360" cy="1645920"/>
+          </a:xfrm>
+          <a:prstGeom prst="roundRect">
+            <a:avLst>
+              <a:gd name="adj" fmla="val 4444"/>
+            </a:avLst>
+          </a:prstGeom>
+          <a:solidFill>
+            <a:srgbClr val="F4F7F9"/>
+          </a:solidFill>
+          <a:ln w="12700">
+            <a:solidFill>
+              <a:srgbClr val="DDE4EA"/>
+            </a:solidFill>
+            <a:prstDash val="solid"/>
+          </a:ln>
+          <a:effectLst>
+            <a:outerShdw sx="100000" sy="100000" kx="0" ky="0" algn="bl" rotWithShape="0" blurRad="127000" dist="38100" dir="5400000">
+              <a:srgbClr val="0C1620">
+                <a:alpha val="11000"/>
+              </a:srgbClr>
+            </a:outerShdw>
+          </a:effectLst>
+        </p:spPr>
+      </p:sp>
+      <p:sp>
+        <p:nvSpPr>
+          <p:cNvPr id="13" name="Text 11"/>
+          <p:cNvSpPr/>
+          <p:nvPr/>
+        </p:nvSpPr>
+        <p:spPr>
+          <a:xfrm>
+            <a:off x="1005840" y="4800600"/>
+            <a:ext cx="5486400" cy="320040"/>
+          </a:xfrm>
+          <a:prstGeom prst="rect">
+            <a:avLst/>
+          </a:prstGeom>
+          <a:noFill/>
+          <a:ln/>
+        </p:spPr>
+        <p:txBody>
+          <a:bodyPr wrap="square" lIns="0" tIns="0" rIns="0" bIns="0" rtlCol="0" anchor="ctr"/>
+          <a:lstStyle/>
+          <a:p>
+            <a:pPr indent="0" marL="0">
+              <a:buNone/>
+            </a:pPr>
+            <a:r>
+              <a:rPr lang="en-US" sz="1600" b="1" dirty="0">
+                <a:solidFill>
+                  <a:srgbClr val="6B4E8F"/>
+                </a:solidFill>
+                <a:latin typeface="Calibri" pitchFamily="34" charset="0"/>
+                <a:ea typeface="Calibri" pitchFamily="34" charset="-122"/>
+                <a:cs typeface="Calibri" pitchFamily="34" charset="-120"/>
+              </a:rPr>
+              <a:t>The precedent: BrainBERT</a:t>
+            </a:r>
+            <a:endParaRPr lang="en-US" sz="1600" dirty="0"/>
+          </a:p>
+        </p:txBody>
+      </p:sp>
+      <p:sp>
+        <p:nvSpPr>
+          <p:cNvPr id="14" name="Text 12"/>
+          <p:cNvSpPr/>
+          <p:nvPr/>
+        </p:nvSpPr>
+        <p:spPr>
+          <a:xfrm>
+            <a:off x="1005840" y="5102352"/>
+            <a:ext cx="10241280" cy="1005840"/>
           </a:xfrm>
           <a:prstGeom prst="rect">
             <a:avLst/>
@@ -18543,71 +18413,12 @@
           <a:p>
             <a:pPr indent="0" marL="0">
               <a:lnSpc>
-                <a:spcPct val="105000"/>
+                <a:spcPct val="106000"/>
               </a:lnSpc>
               <a:buNone/>
             </a:pPr>
             <a:r>
-              <a:rPr lang="en-US" sz="1150" dirty="0">
-                <a:solidFill>
-                  <a:srgbClr val="5A6B7B"/>
-                </a:solidFill>
-                <a:latin typeface="Calibri" pitchFamily="34" charset="0"/>
-                <a:ea typeface="Calibri" pitchFamily="34" charset="-122"/>
-                <a:cs typeface="Calibri" pitchFamily="34" charset="-120"/>
-              </a:rPr>
-              <a:t>the stimulus itself — an electrical artifact</a:t>
-            </a:r>
-            <a:endParaRPr lang="en-US" sz="1150" dirty="0"/>
-          </a:p>
-        </p:txBody>
-      </p:sp>
-      <p:sp>
-        <p:nvSpPr>
-          <p:cNvPr id="11" name="Shape 8"/>
-          <p:cNvSpPr/>
-          <p:nvPr/>
-        </p:nvSpPr>
-        <p:spPr>
-          <a:xfrm>
-            <a:off x="7991856" y="3858768"/>
-            <a:ext cx="155448" cy="155448"/>
-          </a:xfrm>
-          <a:prstGeom prst="ellipse">
-            <a:avLst/>
-          </a:prstGeom>
-          <a:solidFill>
-            <a:srgbClr val="B4671A"/>
-          </a:solidFill>
-          <a:ln/>
-        </p:spPr>
-      </p:sp>
-      <p:sp>
-        <p:nvSpPr>
-          <p:cNvPr id="12" name="Text 9"/>
-          <p:cNvSpPr/>
-          <p:nvPr/>
-        </p:nvSpPr>
-        <p:spPr>
-          <a:xfrm>
-            <a:off x="8247888" y="3739896"/>
-            <a:ext cx="3017520" cy="301752"/>
-          </a:xfrm>
-          <a:prstGeom prst="rect">
-            <a:avLst/>
-          </a:prstGeom>
-          <a:noFill/>
-          <a:ln/>
-        </p:spPr>
-        <p:txBody>
-          <a:bodyPr wrap="square" lIns="0" tIns="0" rIns="0" bIns="0" rtlCol="0" anchor="ctr"/>
-          <a:lstStyle/>
-          <a:p>
-            <a:pPr indent="0" marL="0">
-              <a:buNone/>
-            </a:pPr>
-            <a:r>
-              <a:rPr lang="en-US" sz="1250" b="1" dirty="0">
+              <a:rPr lang="en-US" sz="1550" dirty="0">
                 <a:solidFill>
                   <a:srgbClr val="14212E"/>
                 </a:solidFill>
@@ -18615,152 +18426,9 @@
                 <a:ea typeface="Calibri" pitchFamily="34" charset="-122"/>
                 <a:cs typeface="Calibri" pitchFamily="34" charset="-120"/>
               </a:rPr>
-              <a:t>M-wave, 2–4 ms</a:t>
-            </a:r>
-            <a:endParaRPr lang="en-US" sz="1250" dirty="0"/>
-          </a:p>
-        </p:txBody>
-      </p:sp>
-      <p:sp>
-        <p:nvSpPr>
-          <p:cNvPr id="13" name="Text 10"/>
-          <p:cNvSpPr/>
-          <p:nvPr/>
-        </p:nvSpPr>
-        <p:spPr>
-          <a:xfrm>
-            <a:off x="8247888" y="4032504"/>
-            <a:ext cx="3063240" cy="621792"/>
-          </a:xfrm>
-          <a:prstGeom prst="rect">
-            <a:avLst/>
-          </a:prstGeom>
-          <a:noFill/>
-          <a:ln/>
-        </p:spPr>
-        <p:txBody>
-          <a:bodyPr wrap="square" lIns="0" tIns="0" rIns="0" bIns="0" rtlCol="0" anchor="ctr"/>
-          <a:lstStyle/>
-          <a:p>
-            <a:pPr indent="0" marL="0">
-              <a:lnSpc>
-                <a:spcPct val="105000"/>
-              </a:lnSpc>
-              <a:buNone/>
-            </a:pPr>
-            <a:r>
-              <a:rPr lang="en-US" sz="1150" dirty="0">
-                <a:solidFill>
-                  <a:srgbClr val="5A6B7B"/>
-                </a:solidFill>
-                <a:latin typeface="Calibri" pitchFamily="34" charset="0"/>
-                <a:ea typeface="Calibri" pitchFamily="34" charset="-122"/>
-                <a:cs typeface="Calibri" pitchFamily="34" charset="-120"/>
-              </a:rPr>
-              <a:t>the nerve firing the muscle directly</a:t>
-            </a:r>
-            <a:endParaRPr lang="en-US" sz="1150" dirty="0"/>
-          </a:p>
-        </p:txBody>
-      </p:sp>
-      <p:sp>
-        <p:nvSpPr>
-          <p:cNvPr id="14" name="Shape 11"/>
-          <p:cNvSpPr/>
-          <p:nvPr/>
-        </p:nvSpPr>
-        <p:spPr>
-          <a:xfrm>
-            <a:off x="7991856" y="4791456"/>
-            <a:ext cx="155448" cy="155448"/>
-          </a:xfrm>
-          <a:prstGeom prst="ellipse">
-            <a:avLst/>
-          </a:prstGeom>
-          <a:solidFill>
-            <a:srgbClr val="15718F"/>
-          </a:solidFill>
-          <a:ln/>
-        </p:spPr>
-      </p:sp>
-      <p:sp>
-        <p:nvSpPr>
-          <p:cNvPr id="15" name="Text 12"/>
-          <p:cNvSpPr/>
-          <p:nvPr/>
-        </p:nvSpPr>
-        <p:spPr>
-          <a:xfrm>
-            <a:off x="8247888" y="4672584"/>
-            <a:ext cx="3017520" cy="301752"/>
-          </a:xfrm>
-          <a:prstGeom prst="rect">
-            <a:avLst/>
-          </a:prstGeom>
-          <a:noFill/>
-          <a:ln/>
-        </p:spPr>
-        <p:txBody>
-          <a:bodyPr wrap="square" lIns="0" tIns="0" rIns="0" bIns="0" rtlCol="0" anchor="ctr"/>
-          <a:lstStyle/>
-          <a:p>
-            <a:pPr indent="0" marL="0">
-              <a:buNone/>
-            </a:pPr>
-            <a:r>
-              <a:rPr lang="en-US" sz="1250" b="1" dirty="0">
-                <a:solidFill>
-                  <a:srgbClr val="14212E"/>
-                </a:solidFill>
-                <a:latin typeface="Calibri" pitchFamily="34" charset="0"/>
-                <a:ea typeface="Calibri" pitchFamily="34" charset="-122"/>
-                <a:cs typeface="Calibri" pitchFamily="34" charset="-120"/>
-              </a:rPr>
-              <a:t>H-reflex, 6–9 ms</a:t>
-            </a:r>
-            <a:endParaRPr lang="en-US" sz="1250" dirty="0"/>
-          </a:p>
-        </p:txBody>
-      </p:sp>
-      <p:sp>
-        <p:nvSpPr>
-          <p:cNvPr id="16" name="Text 13"/>
-          <p:cNvSpPr/>
-          <p:nvPr/>
-        </p:nvSpPr>
-        <p:spPr>
-          <a:xfrm>
-            <a:off x="8247888" y="4965192"/>
-            <a:ext cx="3063240" cy="621792"/>
-          </a:xfrm>
-          <a:prstGeom prst="rect">
-            <a:avLst/>
-          </a:prstGeom>
-          <a:noFill/>
-          <a:ln/>
-        </p:spPr>
-        <p:txBody>
-          <a:bodyPr wrap="square" lIns="0" tIns="0" rIns="0" bIns="0" rtlCol="0" anchor="ctr"/>
-          <a:lstStyle/>
-          <a:p>
-            <a:pPr indent="0" marL="0">
-              <a:lnSpc>
-                <a:spcPct val="105000"/>
-              </a:lnSpc>
-              <a:buNone/>
-            </a:pPr>
-            <a:r>
-              <a:rPr lang="en-US" sz="1150" dirty="0">
-                <a:solidFill>
-                  <a:srgbClr val="5A6B7B"/>
-                </a:solidFill>
-                <a:latin typeface="Calibri" pitchFamily="34" charset="0"/>
-                <a:ea typeface="Calibri" pitchFamily="34" charset="-122"/>
-                <a:cs typeface="Calibri" pitchFamily="34" charset="-120"/>
-              </a:rPr>
-              <a:t>the signal that travelled to the spinal cord and back — this is what conditioning changes</a:t>
-            </a:r>
-            <a:endParaRPr lang="en-US" sz="1150" dirty="0"/>
+              <a:t>BrainBERT (Wang et al., ICLR 2023) is a self-supervised model for human intracranial recordings: it learns a general representation of the neural signal first, without labels, and then uses it for downstream questions. We use a much smaller model, because we have one channel and a 30 ms window rather than a whole electrode array.</a:t>
+            </a:r>
+            <a:endParaRPr lang="en-US" sz="1550" dirty="0"/>
           </a:p>
         </p:txBody>
       </p:sp>
@@ -18821,7 +18489,7 @@
               <a:buNone/>
             </a:pPr>
             <a:r>
-              <a:rPr lang="en-US" sz="1150" b="1" spc="320" kern="0" dirty="0">
+              <a:rPr lang="en-US" sz="1300" b="1" spc="320" kern="0" dirty="0">
                 <a:solidFill>
                   <a:srgbClr val="B4671A"/>
                 </a:solidFill>
@@ -18831,7 +18499,7 @@
               </a:rPr>
               <a:t>PART 2 · THE DATA</a:t>
             </a:r>
-            <a:endParaRPr lang="en-US" sz="1150" dirty="0"/>
+            <a:endParaRPr lang="en-US" sz="1300" dirty="0"/>
           </a:p>
         </p:txBody>
       </p:sp>
@@ -18868,7 +18536,7 @@
                 <a:ea typeface="Cambria" pitchFamily="34" charset="-122"/>
                 <a:cs typeface="Cambria" pitchFamily="34" charset="-120"/>
               </a:rPr>
-              <a:t>First problem: the archive would not decode</a:t>
+              <a:t>What a single trial looks like</a:t>
             </a:r>
             <a:endParaRPr lang="en-US" sz="3000" dirty="0"/>
           </a:p>
@@ -18876,18 +18544,84 @@
       </p:sp>
       <p:sp>
         <p:nvSpPr>
-          <p:cNvPr id="4" name="Shape 2"/>
-          <p:cNvSpPr/>
-          <p:nvPr/>
-        </p:nvSpPr>
-        <p:spPr>
-          <a:xfrm>
-            <a:off x="685800" y="2011680"/>
-            <a:ext cx="3566160" cy="2651760"/>
+          <p:cNvPr id="4" name="Text 2"/>
+          <p:cNvSpPr/>
+          <p:nvPr/>
+        </p:nvSpPr>
+        <p:spPr>
+          <a:xfrm>
+            <a:off x="685800" y="1536192"/>
+            <a:ext cx="10881360" cy="566928"/>
+          </a:xfrm>
+          <a:prstGeom prst="rect">
+            <a:avLst/>
+          </a:prstGeom>
+          <a:noFill/>
+          <a:ln/>
+        </p:spPr>
+        <p:txBody>
+          <a:bodyPr wrap="square" lIns="0" tIns="0" rIns="0" bIns="0" rtlCol="0" anchor="ctr"/>
+          <a:lstStyle/>
+          <a:p>
+            <a:pPr indent="0" marL="0">
+              <a:lnSpc>
+                <a:spcPct val="106000"/>
+              </a:lnSpc>
+              <a:buNone/>
+            </a:pPr>
+            <a:r>
+              <a:rPr lang="en-US" sz="1700" dirty="0">
+                <a:solidFill>
+                  <a:srgbClr val="5A6B7B"/>
+                </a:solidFill>
+                <a:latin typeface="Calibri" pitchFamily="34" charset="0"/>
+                <a:ea typeface="Calibri" pitchFamily="34" charset="-122"/>
+                <a:cs typeface="Calibri" pitchFamily="34" charset="-120"/>
+              </a:rPr>
+              <a:t>Every stimulus produces one trial: a 30-millisecond window, recorded from a pair of EMG electrodes in the soleus muscle.</a:t>
+            </a:r>
+            <a:endParaRPr lang="en-US" sz="1700" dirty="0"/>
+          </a:p>
+        </p:txBody>
+      </p:sp>
+      <p:pic>
+        <p:nvPicPr>
+          <p:cNvPr id="5" name="Image 0" descr="/Users/suchithrao/Downloads/hroc-training/outputs/diagrams/evoked_emg.png">    </p:cNvPr>
+          <p:cNvPicPr>
+            <a:picLocks noChangeAspect="1"/>
+          </p:cNvPicPr>
+          <p:nvPr/>
+        </p:nvPicPr>
+        <p:blipFill>
+          <a:blip r:embed="rId1"/>
+          <a:stretch>
+            <a:fillRect/>
+          </a:stretch>
+        </p:blipFill>
+        <p:spPr>
+          <a:xfrm>
+            <a:off x="698722" y="2148840"/>
+            <a:ext cx="6374956" cy="3200400"/>
+          </a:xfrm>
+          <a:prstGeom prst="rect">
+            <a:avLst/>
+          </a:prstGeom>
+        </p:spPr>
+      </p:pic>
+      <p:sp>
+        <p:nvSpPr>
+          <p:cNvPr id="6" name="Shape 3"/>
+          <p:cNvSpPr/>
+          <p:nvPr/>
+        </p:nvSpPr>
+        <p:spPr>
+          <a:xfrm>
+            <a:off x="7680960" y="2194560"/>
+            <a:ext cx="3886200" cy="3749040"/>
           </a:xfrm>
           <a:prstGeom prst="roundRect">
             <a:avLst>
-              <a:gd name="adj" fmla="val 2759"/>
+              <a:gd name="adj" fmla="val 1951"/>
             </a:avLst>
           </a:prstGeom>
           <a:solidFill>
@@ -18910,30 +18644,131 @@
       </p:sp>
       <p:sp>
         <p:nvSpPr>
-          <p:cNvPr id="5" name="Text 3"/>
-          <p:cNvSpPr/>
-          <p:nvPr/>
-        </p:nvSpPr>
-        <p:spPr>
-          <a:xfrm>
-            <a:off x="978408" y="2240280"/>
-            <a:ext cx="3017520" cy="411480"/>
-          </a:xfrm>
-          <a:prstGeom prst="rect">
-            <a:avLst/>
-          </a:prstGeom>
-          <a:noFill/>
-          <a:ln/>
-        </p:spPr>
-        <p:txBody>
-          <a:bodyPr wrap="square" lIns="0" tIns="0" rIns="0" bIns="0" rtlCol="0" anchor="ctr"/>
-          <a:lstStyle/>
-          <a:p>
-            <a:pPr indent="0" marL="0">
-              <a:buNone/>
-            </a:pPr>
-            <a:r>
-              <a:rPr lang="en-US" sz="1450" b="1" dirty="0">
+          <p:cNvPr id="7" name="Text 4"/>
+          <p:cNvSpPr/>
+          <p:nvPr/>
+        </p:nvSpPr>
+        <p:spPr>
+          <a:xfrm>
+            <a:off x="7955280" y="2395728"/>
+            <a:ext cx="3291840" cy="320040"/>
+          </a:xfrm>
+          <a:prstGeom prst="rect">
+            <a:avLst/>
+          </a:prstGeom>
+          <a:noFill/>
+          <a:ln/>
+        </p:spPr>
+        <p:txBody>
+          <a:bodyPr wrap="square" lIns="0" tIns="0" rIns="0" bIns="0" rtlCol="0" anchor="ctr"/>
+          <a:lstStyle/>
+          <a:p>
+            <a:pPr indent="0" marL="0">
+              <a:buNone/>
+            </a:pPr>
+            <a:r>
+              <a:rPr lang="en-US" sz="1600" b="1" dirty="0">
+                <a:solidFill>
+                  <a:srgbClr val="14212E"/>
+                </a:solidFill>
+                <a:latin typeface="Calibri" pitchFamily="34" charset="0"/>
+                <a:ea typeface="Calibri" pitchFamily="34" charset="-122"/>
+                <a:cs typeface="Calibri" pitchFamily="34" charset="-120"/>
+              </a:rPr>
+              <a:t>Reading the trace</a:t>
+            </a:r>
+            <a:endParaRPr lang="en-US" sz="1600" dirty="0"/>
+          </a:p>
+        </p:txBody>
+      </p:sp>
+      <p:sp>
+        <p:nvSpPr>
+          <p:cNvPr id="8" name="Shape 5"/>
+          <p:cNvSpPr/>
+          <p:nvPr/>
+        </p:nvSpPr>
+        <p:spPr>
+          <a:xfrm>
+            <a:off x="7991856" y="2926080"/>
+            <a:ext cx="155448" cy="155448"/>
+          </a:xfrm>
+          <a:prstGeom prst="ellipse">
+            <a:avLst/>
+          </a:prstGeom>
+          <a:solidFill>
+            <a:srgbClr val="9AA8B4"/>
+          </a:solidFill>
+          <a:ln/>
+        </p:spPr>
+      </p:sp>
+      <p:sp>
+        <p:nvSpPr>
+          <p:cNvPr id="9" name="Text 6"/>
+          <p:cNvSpPr/>
+          <p:nvPr/>
+        </p:nvSpPr>
+        <p:spPr>
+          <a:xfrm>
+            <a:off x="8247888" y="2807208"/>
+            <a:ext cx="3017520" cy="301752"/>
+          </a:xfrm>
+          <a:prstGeom prst="rect">
+            <a:avLst/>
+          </a:prstGeom>
+          <a:noFill/>
+          <a:ln/>
+        </p:spPr>
+        <p:txBody>
+          <a:bodyPr wrap="square" lIns="0" tIns="0" rIns="0" bIns="0" rtlCol="0" anchor="ctr"/>
+          <a:lstStyle/>
+          <a:p>
+            <a:pPr indent="0" marL="0">
+              <a:buNone/>
+            </a:pPr>
+            <a:r>
+              <a:rPr lang="en-US" sz="1400" b="1" dirty="0">
+                <a:solidFill>
+                  <a:srgbClr val="14212E"/>
+                </a:solidFill>
+                <a:latin typeface="Calibri" pitchFamily="34" charset="0"/>
+                <a:ea typeface="Calibri" pitchFamily="34" charset="-122"/>
+                <a:cs typeface="Calibri" pitchFamily="34" charset="-120"/>
+              </a:rPr>
+              <a:t>The spike at zero</a:t>
+            </a:r>
+            <a:endParaRPr lang="en-US" sz="1400" dirty="0"/>
+          </a:p>
+        </p:txBody>
+      </p:sp>
+      <p:sp>
+        <p:nvSpPr>
+          <p:cNvPr id="10" name="Text 7"/>
+          <p:cNvSpPr/>
+          <p:nvPr/>
+        </p:nvSpPr>
+        <p:spPr>
+          <a:xfrm>
+            <a:off x="8247888" y="3099816"/>
+            <a:ext cx="3063240" cy="621792"/>
+          </a:xfrm>
+          <a:prstGeom prst="rect">
+            <a:avLst/>
+          </a:prstGeom>
+          <a:noFill/>
+          <a:ln/>
+        </p:spPr>
+        <p:txBody>
+          <a:bodyPr wrap="square" lIns="0" tIns="0" rIns="0" bIns="0" rtlCol="0" anchor="ctr"/>
+          <a:lstStyle/>
+          <a:p>
+            <a:pPr indent="0" marL="0">
+              <a:lnSpc>
+                <a:spcPct val="105000"/>
+              </a:lnSpc>
+              <a:buNone/>
+            </a:pPr>
+            <a:r>
+              <a:rPr lang="en-US" sz="1300" dirty="0">
                 <a:solidFill>
                   <a:srgbClr val="5A6B7B"/>
                 </a:solidFill>
@@ -18941,22 +18776,81 @@
                 <a:ea typeface="Calibri" pitchFamily="34" charset="-122"/>
                 <a:cs typeface="Calibri" pitchFamily="34" charset="-120"/>
               </a:rPr>
-              <a:t>What we were given</a:t>
-            </a:r>
-            <a:endParaRPr lang="en-US" sz="1450" dirty="0"/>
-          </a:p>
-        </p:txBody>
-      </p:sp>
-      <p:sp>
-        <p:nvSpPr>
-          <p:cNvPr id="6" name="Text 4"/>
-          <p:cNvSpPr/>
-          <p:nvPr/>
-        </p:nvSpPr>
-        <p:spPr>
-          <a:xfrm>
-            <a:off x="978408" y="2743200"/>
-            <a:ext cx="3017520" cy="1645920"/>
+              <a:t>the stimulus itself — an electrical artifact</a:t>
+            </a:r>
+            <a:endParaRPr lang="en-US" sz="1300" dirty="0"/>
+          </a:p>
+        </p:txBody>
+      </p:sp>
+      <p:sp>
+        <p:nvSpPr>
+          <p:cNvPr id="11" name="Shape 8"/>
+          <p:cNvSpPr/>
+          <p:nvPr/>
+        </p:nvSpPr>
+        <p:spPr>
+          <a:xfrm>
+            <a:off x="7991856" y="3858768"/>
+            <a:ext cx="155448" cy="155448"/>
+          </a:xfrm>
+          <a:prstGeom prst="ellipse">
+            <a:avLst/>
+          </a:prstGeom>
+          <a:solidFill>
+            <a:srgbClr val="B4671A"/>
+          </a:solidFill>
+          <a:ln/>
+        </p:spPr>
+      </p:sp>
+      <p:sp>
+        <p:nvSpPr>
+          <p:cNvPr id="12" name="Text 9"/>
+          <p:cNvSpPr/>
+          <p:nvPr/>
+        </p:nvSpPr>
+        <p:spPr>
+          <a:xfrm>
+            <a:off x="8247888" y="3739896"/>
+            <a:ext cx="3017520" cy="301752"/>
+          </a:xfrm>
+          <a:prstGeom prst="rect">
+            <a:avLst/>
+          </a:prstGeom>
+          <a:noFill/>
+          <a:ln/>
+        </p:spPr>
+        <p:txBody>
+          <a:bodyPr wrap="square" lIns="0" tIns="0" rIns="0" bIns="0" rtlCol="0" anchor="ctr"/>
+          <a:lstStyle/>
+          <a:p>
+            <a:pPr indent="0" marL="0">
+              <a:buNone/>
+            </a:pPr>
+            <a:r>
+              <a:rPr lang="en-US" sz="1400" b="1" dirty="0">
+                <a:solidFill>
+                  <a:srgbClr val="14212E"/>
+                </a:solidFill>
+                <a:latin typeface="Calibri" pitchFamily="34" charset="0"/>
+                <a:ea typeface="Calibri" pitchFamily="34" charset="-122"/>
+                <a:cs typeface="Calibri" pitchFamily="34" charset="-120"/>
+              </a:rPr>
+              <a:t>M-wave, 2–4 ms</a:t>
+            </a:r>
+            <a:endParaRPr lang="en-US" sz="1400" dirty="0"/>
+          </a:p>
+        </p:txBody>
+      </p:sp>
+      <p:sp>
+        <p:nvSpPr>
+          <p:cNvPr id="13" name="Text 10"/>
+          <p:cNvSpPr/>
+          <p:nvPr/>
+        </p:nvSpPr>
+        <p:spPr>
+          <a:xfrm>
+            <a:off x="8247888" y="4032504"/>
+            <a:ext cx="3063240" cy="621792"/>
           </a:xfrm>
           <a:prstGeom prst="rect">
             <a:avLst/>
@@ -18970,12 +18864,71 @@
           <a:p>
             <a:pPr indent="0" marL="0">
               <a:lnSpc>
-                <a:spcPct val="108000"/>
+                <a:spcPct val="105000"/>
               </a:lnSpc>
               <a:buNone/>
             </a:pPr>
             <a:r>
-              <a:rPr lang="en-US" sz="1350" dirty="0">
+              <a:rPr lang="en-US" sz="1300" dirty="0">
+                <a:solidFill>
+                  <a:srgbClr val="5A6B7B"/>
+                </a:solidFill>
+                <a:latin typeface="Calibri" pitchFamily="34" charset="0"/>
+                <a:ea typeface="Calibri" pitchFamily="34" charset="-122"/>
+                <a:cs typeface="Calibri" pitchFamily="34" charset="-120"/>
+              </a:rPr>
+              <a:t>the nerve firing the muscle directly</a:t>
+            </a:r>
+            <a:endParaRPr lang="en-US" sz="1300" dirty="0"/>
+          </a:p>
+        </p:txBody>
+      </p:sp>
+      <p:sp>
+        <p:nvSpPr>
+          <p:cNvPr id="14" name="Shape 11"/>
+          <p:cNvSpPr/>
+          <p:nvPr/>
+        </p:nvSpPr>
+        <p:spPr>
+          <a:xfrm>
+            <a:off x="7991856" y="4791456"/>
+            <a:ext cx="155448" cy="155448"/>
+          </a:xfrm>
+          <a:prstGeom prst="ellipse">
+            <a:avLst/>
+          </a:prstGeom>
+          <a:solidFill>
+            <a:srgbClr val="15718F"/>
+          </a:solidFill>
+          <a:ln/>
+        </p:spPr>
+      </p:sp>
+      <p:sp>
+        <p:nvSpPr>
+          <p:cNvPr id="15" name="Text 12"/>
+          <p:cNvSpPr/>
+          <p:nvPr/>
+        </p:nvSpPr>
+        <p:spPr>
+          <a:xfrm>
+            <a:off x="8247888" y="4672584"/>
+            <a:ext cx="3017520" cy="301752"/>
+          </a:xfrm>
+          <a:prstGeom prst="rect">
+            <a:avLst/>
+          </a:prstGeom>
+          <a:noFill/>
+          <a:ln/>
+        </p:spPr>
+        <p:txBody>
+          <a:bodyPr wrap="square" lIns="0" tIns="0" rIns="0" bIns="0" rtlCol="0" anchor="ctr"/>
+          <a:lstStyle/>
+          <a:p>
+            <a:pPr indent="0" marL="0">
+              <a:buNone/>
+            </a:pPr>
+            <a:r>
+              <a:rPr lang="en-US" sz="1400" b="1" dirty="0">
                 <a:solidFill>
                   <a:srgbClr val="14212E"/>
                 </a:solidFill>
@@ -18983,95 +18936,22 @@
                 <a:ea typeface="Calibri" pitchFamily="34" charset="-122"/>
                 <a:cs typeface="Calibri" pitchFamily="34" charset="-120"/>
               </a:rPr>
-              <a:t>2006 MySQL tables and a decoder script. The script documented the byte order as big-endian.</a:t>
-            </a:r>
-            <a:endParaRPr lang="en-US" sz="1350" dirty="0"/>
-          </a:p>
-        </p:txBody>
-      </p:sp>
-      <p:sp>
-        <p:nvSpPr>
-          <p:cNvPr id="7" name="Shape 5"/>
-          <p:cNvSpPr/>
-          <p:nvPr/>
-        </p:nvSpPr>
-        <p:spPr>
-          <a:xfrm>
-            <a:off x="4416552" y="2011680"/>
-            <a:ext cx="3566160" cy="2651760"/>
-          </a:xfrm>
-          <a:prstGeom prst="roundRect">
-            <a:avLst>
-              <a:gd name="adj" fmla="val 2759"/>
-            </a:avLst>
-          </a:prstGeom>
-          <a:solidFill>
-            <a:srgbClr val="FBF3EA"/>
-          </a:solidFill>
-          <a:ln w="12700">
-            <a:solidFill>
-              <a:srgbClr val="DDE4EA"/>
-            </a:solidFill>
-            <a:prstDash val="solid"/>
-          </a:ln>
-          <a:effectLst>
-            <a:outerShdw sx="100000" sy="100000" kx="0" ky="0" algn="bl" rotWithShape="0" blurRad="127000" dist="38100" dir="5400000">
-              <a:srgbClr val="0C1620">
-                <a:alpha val="11000"/>
-              </a:srgbClr>
-            </a:outerShdw>
-          </a:effectLst>
-        </p:spPr>
-      </p:sp>
-      <p:sp>
-        <p:nvSpPr>
-          <p:cNvPr id="8" name="Text 6"/>
-          <p:cNvSpPr/>
-          <p:nvPr/>
-        </p:nvSpPr>
-        <p:spPr>
-          <a:xfrm>
-            <a:off x="4709160" y="2240280"/>
-            <a:ext cx="3017520" cy="411480"/>
-          </a:xfrm>
-          <a:prstGeom prst="rect">
-            <a:avLst/>
-          </a:prstGeom>
-          <a:noFill/>
-          <a:ln/>
-        </p:spPr>
-        <p:txBody>
-          <a:bodyPr wrap="square" lIns="0" tIns="0" rIns="0" bIns="0" rtlCol="0" anchor="ctr"/>
-          <a:lstStyle/>
-          <a:p>
-            <a:pPr indent="0" marL="0">
-              <a:buNone/>
-            </a:pPr>
-            <a:r>
-              <a:rPr lang="en-US" sz="1450" b="1" dirty="0">
-                <a:solidFill>
-                  <a:srgbClr val="A44430"/>
-                </a:solidFill>
-                <a:latin typeface="Calibri" pitchFamily="34" charset="0"/>
-                <a:ea typeface="Calibri" pitchFamily="34" charset="-122"/>
-                <a:cs typeface="Calibri" pitchFamily="34" charset="-120"/>
-              </a:rPr>
-              <a:t>What happened</a:t>
-            </a:r>
-            <a:endParaRPr lang="en-US" sz="1450" dirty="0"/>
-          </a:p>
-        </p:txBody>
-      </p:sp>
-      <p:sp>
-        <p:nvSpPr>
-          <p:cNvPr id="9" name="Text 7"/>
-          <p:cNvSpPr/>
-          <p:nvPr/>
-        </p:nvSpPr>
-        <p:spPr>
-          <a:xfrm>
-            <a:off x="4709160" y="2743200"/>
-            <a:ext cx="3017520" cy="1645920"/>
+              <a:t>H-reflex, 6–9 ms</a:t>
+            </a:r>
+            <a:endParaRPr lang="en-US" sz="1400" dirty="0"/>
+          </a:p>
+        </p:txBody>
+      </p:sp>
+      <p:sp>
+        <p:nvSpPr>
+          <p:cNvPr id="16" name="Text 13"/>
+          <p:cNvSpPr/>
+          <p:nvPr/>
+        </p:nvSpPr>
+        <p:spPr>
+          <a:xfrm>
+            <a:off x="8247888" y="4965192"/>
+            <a:ext cx="3063240" cy="621792"/>
           </a:xfrm>
           <a:prstGeom prst="rect">
             <a:avLst/>
@@ -19085,252 +18965,22 @@
           <a:p>
             <a:pPr indent="0" marL="0">
               <a:lnSpc>
-                <a:spcPct val="108000"/>
+                <a:spcPct val="105000"/>
               </a:lnSpc>
               <a:buNone/>
             </a:pPr>
             <a:r>
-              <a:rPr lang="en-US" sz="1350" dirty="0">
-                <a:solidFill>
-                  <a:srgbClr val="14212E"/>
-                </a:solidFill>
-                <a:latin typeface="Calibri" pitchFamily="34" charset="0"/>
-                <a:ea typeface="Calibri" pitchFamily="34" charset="-122"/>
-                <a:cs typeface="Calibri" pitchFamily="34" charset="-120"/>
-              </a:rPr>
-              <a:t>Decoded as documented, every trial came out as noise. No M-wave, no reflex, nothing.</a:t>
-            </a:r>
-            <a:endParaRPr lang="en-US" sz="1350" dirty="0"/>
-          </a:p>
-        </p:txBody>
-      </p:sp>
-      <p:sp>
-        <p:nvSpPr>
-          <p:cNvPr id="10" name="Shape 8"/>
-          <p:cNvSpPr/>
-          <p:nvPr/>
-        </p:nvSpPr>
-        <p:spPr>
-          <a:xfrm>
-            <a:off x="8147304" y="2011680"/>
-            <a:ext cx="3566160" cy="2651760"/>
-          </a:xfrm>
-          <a:prstGeom prst="roundRect">
-            <a:avLst>
-              <a:gd name="adj" fmla="val 2759"/>
-            </a:avLst>
-          </a:prstGeom>
-          <a:solidFill>
-            <a:srgbClr val="EEF5EE"/>
-          </a:solidFill>
-          <a:ln w="12700">
-            <a:solidFill>
-              <a:srgbClr val="DDE4EA"/>
-            </a:solidFill>
-            <a:prstDash val="solid"/>
-          </a:ln>
-          <a:effectLst>
-            <a:outerShdw sx="100000" sy="100000" kx="0" ky="0" algn="bl" rotWithShape="0" blurRad="127000" dist="38100" dir="5400000">
-              <a:srgbClr val="0C1620">
-                <a:alpha val="11000"/>
-              </a:srgbClr>
-            </a:outerShdw>
-          </a:effectLst>
-        </p:spPr>
-      </p:sp>
-      <p:sp>
-        <p:nvSpPr>
-          <p:cNvPr id="11" name="Text 9"/>
-          <p:cNvSpPr/>
-          <p:nvPr/>
-        </p:nvSpPr>
-        <p:spPr>
-          <a:xfrm>
-            <a:off x="8439912" y="2240280"/>
-            <a:ext cx="3017520" cy="411480"/>
-          </a:xfrm>
-          <a:prstGeom prst="rect">
-            <a:avLst/>
-          </a:prstGeom>
-          <a:noFill/>
-          <a:ln/>
-        </p:spPr>
-        <p:txBody>
-          <a:bodyPr wrap="square" lIns="0" tIns="0" rIns="0" bIns="0" rtlCol="0" anchor="ctr"/>
-          <a:lstStyle/>
-          <a:p>
-            <a:pPr indent="0" marL="0">
-              <a:buNone/>
-            </a:pPr>
-            <a:r>
-              <a:rPr lang="en-US" sz="1450" b="1" dirty="0">
-                <a:solidFill>
-                  <a:srgbClr val="3B6E43"/>
-                </a:solidFill>
-                <a:latin typeface="Calibri" pitchFamily="34" charset="0"/>
-                <a:ea typeface="Calibri" pitchFamily="34" charset="-122"/>
-                <a:cs typeface="Calibri" pitchFamily="34" charset="-120"/>
-              </a:rPr>
-              <a:t>What was wrong</a:t>
-            </a:r>
-            <a:endParaRPr lang="en-US" sz="1450" dirty="0"/>
-          </a:p>
-        </p:txBody>
-      </p:sp>
-      <p:sp>
-        <p:nvSpPr>
-          <p:cNvPr id="12" name="Text 10"/>
-          <p:cNvSpPr/>
-          <p:nvPr/>
-        </p:nvSpPr>
-        <p:spPr>
-          <a:xfrm>
-            <a:off x="8439912" y="2743200"/>
-            <a:ext cx="3017520" cy="1645920"/>
-          </a:xfrm>
-          <a:prstGeom prst="rect">
-            <a:avLst/>
-          </a:prstGeom>
-          <a:noFill/>
-          <a:ln/>
-        </p:spPr>
-        <p:txBody>
-          <a:bodyPr wrap="square" lIns="0" tIns="0" rIns="0" bIns="0" rtlCol="0" anchor="ctr"/>
-          <a:lstStyle/>
-          <a:p>
-            <a:pPr indent="0" marL="0">
-              <a:lnSpc>
-                <a:spcPct val="108000"/>
-              </a:lnSpc>
-              <a:buNone/>
-            </a:pPr>
-            <a:r>
-              <a:rPr lang="en-US" sz="1350" dirty="0">
-                <a:solidFill>
-                  <a:srgbClr val="14212E"/>
-                </a:solidFill>
-                <a:latin typeface="Calibri" pitchFamily="34" charset="0"/>
-                <a:ea typeface="Calibri" pitchFamily="34" charset="-122"/>
-                <a:cs typeface="Calibri" pitchFamily="34" charset="-120"/>
-              </a:rPr>
-              <a:t>The files are little-endian. One flag. Flip it and the physiology appears exactly where the experimenters' own notes said it would.</a:t>
-            </a:r>
-            <a:endParaRPr lang="en-US" sz="1350" dirty="0"/>
-          </a:p>
-        </p:txBody>
-      </p:sp>
-      <p:sp>
-        <p:nvSpPr>
-          <p:cNvPr id="13" name="Shape 11"/>
-          <p:cNvSpPr/>
-          <p:nvPr/>
-        </p:nvSpPr>
-        <p:spPr>
-          <a:xfrm>
-            <a:off x="685800" y="4892040"/>
-            <a:ext cx="10881360" cy="1234440"/>
-          </a:xfrm>
-          <a:prstGeom prst="roundRect">
-            <a:avLst>
-              <a:gd name="adj" fmla="val 5926"/>
-            </a:avLst>
-          </a:prstGeom>
-          <a:solidFill>
-            <a:srgbClr val="0C1620"/>
-          </a:solidFill>
-          <a:ln w="12700">
-            <a:solidFill>
-              <a:srgbClr val="DDE4EA"/>
-            </a:solidFill>
-            <a:prstDash val="solid"/>
-          </a:ln>
-          <a:effectLst>
-            <a:outerShdw sx="100000" sy="100000" kx="0" ky="0" algn="bl" rotWithShape="0" blurRad="127000" dist="38100" dir="5400000">
-              <a:srgbClr val="0C1620">
-                <a:alpha val="11000"/>
-              </a:srgbClr>
-            </a:outerShdw>
-          </a:effectLst>
-        </p:spPr>
-      </p:sp>
-      <p:sp>
-        <p:nvSpPr>
-          <p:cNvPr id="14" name="Text 12"/>
-          <p:cNvSpPr/>
-          <p:nvPr/>
-        </p:nvSpPr>
-        <p:spPr>
-          <a:xfrm>
-            <a:off x="1051560" y="5074920"/>
-            <a:ext cx="7315200" cy="320040"/>
-          </a:xfrm>
-          <a:prstGeom prst="rect">
-            <a:avLst/>
-          </a:prstGeom>
-          <a:noFill/>
-          <a:ln/>
-        </p:spPr>
-        <p:txBody>
-          <a:bodyPr wrap="square" lIns="0" tIns="0" rIns="0" bIns="0" rtlCol="0" anchor="ctr"/>
-          <a:lstStyle/>
-          <a:p>
-            <a:pPr indent="0" marL="0">
-              <a:buNone/>
-            </a:pPr>
-            <a:r>
-              <a:rPr lang="en-US" sz="1400" b="1" dirty="0">
-                <a:solidFill>
-                  <a:srgbClr val="7FB8C9"/>
-                </a:solidFill>
-                <a:latin typeface="Calibri" pitchFamily="34" charset="0"/>
-                <a:ea typeface="Calibri" pitchFamily="34" charset="-122"/>
-                <a:cs typeface="Calibri" pitchFamily="34" charset="-120"/>
-              </a:rPr>
-              <a:t>How we knew we had it right</a:t>
-            </a:r>
-            <a:endParaRPr lang="en-US" sz="1400" dirty="0"/>
-          </a:p>
-        </p:txBody>
-      </p:sp>
-      <p:sp>
-        <p:nvSpPr>
-          <p:cNvPr id="15" name="Text 13"/>
-          <p:cNvSpPr/>
-          <p:nvPr/>
-        </p:nvSpPr>
-        <p:spPr>
-          <a:xfrm>
-            <a:off x="1051560" y="5413248"/>
-            <a:ext cx="10149840" cy="640080"/>
-          </a:xfrm>
-          <a:prstGeom prst="rect">
-            <a:avLst/>
-          </a:prstGeom>
-          <a:noFill/>
-          <a:ln/>
-        </p:spPr>
-        <p:txBody>
-          <a:bodyPr wrap="square" lIns="0" tIns="0" rIns="0" bIns="0" rtlCol="0" anchor="ctr"/>
-          <a:lstStyle/>
-          <a:p>
-            <a:pPr indent="0" marL="0">
-              <a:lnSpc>
-                <a:spcPct val="106000"/>
-              </a:lnSpc>
-              <a:buNone/>
-            </a:pPr>
-            <a:r>
-              <a:rPr lang="en-US" sz="1350" dirty="0">
-                <a:solidFill>
-                  <a:srgbClr val="D5DFE7"/>
-                </a:solidFill>
-                <a:latin typeface="Calibri" pitchFamily="34" charset="0"/>
-                <a:ea typeface="Calibri" pitchFamily="34" charset="-122"/>
-                <a:cs typeface="Calibri" pitchFamily="34" charset="-120"/>
-              </a:rPr>
-              <a:t>Not because it looked plausible — because the M-wave and H-reflex landed at exactly the latencies the experimenter had typed into the log in 2006: “MR interval 2-4; HR interval 6-9”. The data confirmed the notes and the notes confirmed the data.</a:t>
-            </a:r>
-            <a:endParaRPr lang="en-US" sz="1350" dirty="0"/>
+              <a:rPr lang="en-US" sz="1300" dirty="0">
+                <a:solidFill>
+                  <a:srgbClr val="5A6B7B"/>
+                </a:solidFill>
+                <a:latin typeface="Calibri" pitchFamily="34" charset="0"/>
+                <a:ea typeface="Calibri" pitchFamily="34" charset="-122"/>
+                <a:cs typeface="Calibri" pitchFamily="34" charset="-120"/>
+              </a:rPr>
+              <a:t>the signal that travelled to the spinal cord and back — this is what conditioning changes</a:t>
+            </a:r>
+            <a:endParaRPr lang="en-US" sz="1300" dirty="0"/>
           </a:p>
         </p:txBody>
       </p:sp>
@@ -19391,7 +19041,7 @@
               <a:buNone/>
             </a:pPr>
             <a:r>
-              <a:rPr lang="en-US" sz="1150" b="1" spc="320" kern="0" dirty="0">
+              <a:rPr lang="en-US" sz="1300" b="1" spc="320" kern="0" dirty="0">
                 <a:solidFill>
                   <a:srgbClr val="B4671A"/>
                 </a:solidFill>
@@ -19401,7 +19051,7 @@
               </a:rPr>
               <a:t>PART 2 · THE DATA</a:t>
             </a:r>
-            <a:endParaRPr lang="en-US" sz="1150" dirty="0"/>
+            <a:endParaRPr lang="en-US" sz="1300" dirty="0"/>
           </a:p>
         </p:txBody>
       </p:sp>
@@ -19438,49 +19088,256 @@
                 <a:ea typeface="Cambria" pitchFamily="34" charset="-122"/>
                 <a:cs typeface="Cambria" pitchFamily="34" charset="-120"/>
               </a:rPr>
-              <a:t>The same 8,000 trials, decoded two ways</a:t>
+              <a:t>First problem: the archive would not decode</a:t>
             </a:r>
             <a:endParaRPr lang="en-US" sz="3000" dirty="0"/>
           </a:p>
         </p:txBody>
       </p:sp>
-      <p:pic>
-        <p:nvPicPr>
-          <p:cNvPr id="4" name="Image 0" descr="/Users/suchithrao/Downloads/hroc-training/outputs/diagrams/decoder_fix.png">    </p:cNvPr>
-          <p:cNvPicPr>
-            <a:picLocks noChangeAspect="1"/>
-          </p:cNvPicPr>
-          <p:nvPr/>
-        </p:nvPicPr>
-        <p:blipFill>
-          <a:blip r:embed="rId1"/>
-          <a:srcRect l="0" r="0" t="0" b="0"/>
-          <a:stretch/>
-        </p:blipFill>
-        <p:spPr>
-          <a:xfrm>
-            <a:off x="685800" y="1828800"/>
-            <a:ext cx="10881360" cy="3627120"/>
-          </a:xfrm>
-          <a:prstGeom prst="rect">
-            <a:avLst/>
-          </a:prstGeom>
-        </p:spPr>
-      </p:pic>
-      <p:sp>
-        <p:nvSpPr>
-          <p:cNvPr id="5" name="Shape 2"/>
-          <p:cNvSpPr/>
-          <p:nvPr/>
-        </p:nvSpPr>
-        <p:spPr>
-          <a:xfrm>
-            <a:off x="685800" y="5806440"/>
-            <a:ext cx="10881360" cy="777240"/>
+      <p:sp>
+        <p:nvSpPr>
+          <p:cNvPr id="4" name="Shape 2"/>
+          <p:cNvSpPr/>
+          <p:nvPr/>
+        </p:nvSpPr>
+        <p:spPr>
+          <a:xfrm>
+            <a:off x="685800" y="2011680"/>
+            <a:ext cx="3566160" cy="2651760"/>
           </a:xfrm>
           <a:prstGeom prst="roundRect">
             <a:avLst>
-              <a:gd name="adj" fmla="val 9412"/>
+              <a:gd name="adj" fmla="val 2759"/>
+            </a:avLst>
+          </a:prstGeom>
+          <a:solidFill>
+            <a:srgbClr val="F4F7F9"/>
+          </a:solidFill>
+          <a:ln w="12700">
+            <a:solidFill>
+              <a:srgbClr val="DDE4EA"/>
+            </a:solidFill>
+            <a:prstDash val="solid"/>
+          </a:ln>
+          <a:effectLst>
+            <a:outerShdw sx="100000" sy="100000" kx="0" ky="0" algn="bl" rotWithShape="0" blurRad="127000" dist="38100" dir="5400000">
+              <a:srgbClr val="0C1620">
+                <a:alpha val="11000"/>
+              </a:srgbClr>
+            </a:outerShdw>
+          </a:effectLst>
+        </p:spPr>
+      </p:sp>
+      <p:sp>
+        <p:nvSpPr>
+          <p:cNvPr id="5" name="Text 3"/>
+          <p:cNvSpPr/>
+          <p:nvPr/>
+        </p:nvSpPr>
+        <p:spPr>
+          <a:xfrm>
+            <a:off x="978408" y="2240280"/>
+            <a:ext cx="3017520" cy="411480"/>
+          </a:xfrm>
+          <a:prstGeom prst="rect">
+            <a:avLst/>
+          </a:prstGeom>
+          <a:noFill/>
+          <a:ln/>
+        </p:spPr>
+        <p:txBody>
+          <a:bodyPr wrap="square" lIns="0" tIns="0" rIns="0" bIns="0" rtlCol="0" anchor="ctr"/>
+          <a:lstStyle/>
+          <a:p>
+            <a:pPr indent="0" marL="0">
+              <a:buNone/>
+            </a:pPr>
+            <a:r>
+              <a:rPr lang="en-US" sz="1650" b="1" dirty="0">
+                <a:solidFill>
+                  <a:srgbClr val="5A6B7B"/>
+                </a:solidFill>
+                <a:latin typeface="Calibri" pitchFamily="34" charset="0"/>
+                <a:ea typeface="Calibri" pitchFamily="34" charset="-122"/>
+                <a:cs typeface="Calibri" pitchFamily="34" charset="-120"/>
+              </a:rPr>
+              <a:t>What we were given</a:t>
+            </a:r>
+            <a:endParaRPr lang="en-US" sz="1650" dirty="0"/>
+          </a:p>
+        </p:txBody>
+      </p:sp>
+      <p:sp>
+        <p:nvSpPr>
+          <p:cNvPr id="6" name="Text 4"/>
+          <p:cNvSpPr/>
+          <p:nvPr/>
+        </p:nvSpPr>
+        <p:spPr>
+          <a:xfrm>
+            <a:off x="978408" y="2697480"/>
+            <a:ext cx="3017520" cy="1874520"/>
+          </a:xfrm>
+          <a:prstGeom prst="rect">
+            <a:avLst/>
+          </a:prstGeom>
+          <a:noFill/>
+          <a:ln/>
+        </p:spPr>
+        <p:txBody>
+          <a:bodyPr wrap="square" lIns="0" tIns="0" rIns="0" bIns="0" rtlCol="0" anchor="ctr"/>
+          <a:lstStyle/>
+          <a:p>
+            <a:pPr indent="0" marL="0">
+              <a:lnSpc>
+                <a:spcPct val="108000"/>
+              </a:lnSpc>
+              <a:buNone/>
+            </a:pPr>
+            <a:r>
+              <a:rPr lang="en-US" sz="1550" dirty="0">
+                <a:solidFill>
+                  <a:srgbClr val="14212E"/>
+                </a:solidFill>
+                <a:latin typeface="Calibri" pitchFamily="34" charset="0"/>
+                <a:ea typeface="Calibri" pitchFamily="34" charset="-122"/>
+                <a:cs typeface="Calibri" pitchFamily="34" charset="-120"/>
+              </a:rPr>
+              <a:t>2006 MySQL tables and a decoder script. The script said each sample's two bytes are stored most-significant first (big-endian).</a:t>
+            </a:r>
+            <a:endParaRPr lang="en-US" sz="1550" dirty="0"/>
+          </a:p>
+        </p:txBody>
+      </p:sp>
+      <p:sp>
+        <p:nvSpPr>
+          <p:cNvPr id="7" name="Shape 5"/>
+          <p:cNvSpPr/>
+          <p:nvPr/>
+        </p:nvSpPr>
+        <p:spPr>
+          <a:xfrm>
+            <a:off x="4416552" y="2011680"/>
+            <a:ext cx="3566160" cy="2651760"/>
+          </a:xfrm>
+          <a:prstGeom prst="roundRect">
+            <a:avLst>
+              <a:gd name="adj" fmla="val 2759"/>
+            </a:avLst>
+          </a:prstGeom>
+          <a:solidFill>
+            <a:srgbClr val="FBF3EA"/>
+          </a:solidFill>
+          <a:ln w="12700">
+            <a:solidFill>
+              <a:srgbClr val="DDE4EA"/>
+            </a:solidFill>
+            <a:prstDash val="solid"/>
+          </a:ln>
+          <a:effectLst>
+            <a:outerShdw sx="100000" sy="100000" kx="0" ky="0" algn="bl" rotWithShape="0" blurRad="127000" dist="38100" dir="5400000">
+              <a:srgbClr val="0C1620">
+                <a:alpha val="11000"/>
+              </a:srgbClr>
+            </a:outerShdw>
+          </a:effectLst>
+        </p:spPr>
+      </p:sp>
+      <p:sp>
+        <p:nvSpPr>
+          <p:cNvPr id="8" name="Text 6"/>
+          <p:cNvSpPr/>
+          <p:nvPr/>
+        </p:nvSpPr>
+        <p:spPr>
+          <a:xfrm>
+            <a:off x="4709160" y="2240280"/>
+            <a:ext cx="3017520" cy="411480"/>
+          </a:xfrm>
+          <a:prstGeom prst="rect">
+            <a:avLst/>
+          </a:prstGeom>
+          <a:noFill/>
+          <a:ln/>
+        </p:spPr>
+        <p:txBody>
+          <a:bodyPr wrap="square" lIns="0" tIns="0" rIns="0" bIns="0" rtlCol="0" anchor="ctr"/>
+          <a:lstStyle/>
+          <a:p>
+            <a:pPr indent="0" marL="0">
+              <a:buNone/>
+            </a:pPr>
+            <a:r>
+              <a:rPr lang="en-US" sz="1650" b="1" dirty="0">
+                <a:solidFill>
+                  <a:srgbClr val="A44430"/>
+                </a:solidFill>
+                <a:latin typeface="Calibri" pitchFamily="34" charset="0"/>
+                <a:ea typeface="Calibri" pitchFamily="34" charset="-122"/>
+                <a:cs typeface="Calibri" pitchFamily="34" charset="-120"/>
+              </a:rPr>
+              <a:t>What happened</a:t>
+            </a:r>
+            <a:endParaRPr lang="en-US" sz="1650" dirty="0"/>
+          </a:p>
+        </p:txBody>
+      </p:sp>
+      <p:sp>
+        <p:nvSpPr>
+          <p:cNvPr id="9" name="Text 7"/>
+          <p:cNvSpPr/>
+          <p:nvPr/>
+        </p:nvSpPr>
+        <p:spPr>
+          <a:xfrm>
+            <a:off x="4709160" y="2697480"/>
+            <a:ext cx="3017520" cy="1874520"/>
+          </a:xfrm>
+          <a:prstGeom prst="rect">
+            <a:avLst/>
+          </a:prstGeom>
+          <a:noFill/>
+          <a:ln/>
+        </p:spPr>
+        <p:txBody>
+          <a:bodyPr wrap="square" lIns="0" tIns="0" rIns="0" bIns="0" rtlCol="0" anchor="ctr"/>
+          <a:lstStyle/>
+          <a:p>
+            <a:pPr indent="0" marL="0">
+              <a:lnSpc>
+                <a:spcPct val="108000"/>
+              </a:lnSpc>
+              <a:buNone/>
+            </a:pPr>
+            <a:r>
+              <a:rPr lang="en-US" sz="1550" dirty="0">
+                <a:solidFill>
+                  <a:srgbClr val="14212E"/>
+                </a:solidFill>
+                <a:latin typeface="Calibri" pitchFamily="34" charset="0"/>
+                <a:ea typeface="Calibri" pitchFamily="34" charset="-122"/>
+                <a:cs typeface="Calibri" pitchFamily="34" charset="-120"/>
+              </a:rPr>
+              <a:t>Decoded as documented, every trial came out as noise. No M-wave, no reflex, nothing.</a:t>
+            </a:r>
+            <a:endParaRPr lang="en-US" sz="1550" dirty="0"/>
+          </a:p>
+        </p:txBody>
+      </p:sp>
+      <p:sp>
+        <p:nvSpPr>
+          <p:cNvPr id="10" name="Shape 8"/>
+          <p:cNvSpPr/>
+          <p:nvPr/>
+        </p:nvSpPr>
+        <p:spPr>
+          <a:xfrm>
+            <a:off x="8147304" y="2011680"/>
+            <a:ext cx="3566160" cy="2651760"/>
+          </a:xfrm>
+          <a:prstGeom prst="roundRect">
+            <a:avLst>
+              <a:gd name="adj" fmla="val 2759"/>
             </a:avLst>
           </a:prstGeom>
           <a:solidFill>
@@ -19503,30 +19360,30 @@
       </p:sp>
       <p:sp>
         <p:nvSpPr>
-          <p:cNvPr id="6" name="Text 3"/>
-          <p:cNvSpPr/>
-          <p:nvPr/>
-        </p:nvSpPr>
-        <p:spPr>
-          <a:xfrm>
-            <a:off x="1005840" y="5925312"/>
-            <a:ext cx="10241280" cy="548640"/>
-          </a:xfrm>
-          <a:prstGeom prst="rect">
-            <a:avLst/>
-          </a:prstGeom>
-          <a:noFill/>
-          <a:ln/>
-        </p:spPr>
-        <p:txBody>
-          <a:bodyPr wrap="square" lIns="0" tIns="0" rIns="0" bIns="0" rtlCol="0" anchor="ctr"/>
-          <a:lstStyle/>
-          <a:p>
-            <a:pPr indent="0" marL="0">
-              <a:buNone/>
-            </a:pPr>
-            <a:r>
-              <a:rPr lang="en-US" sz="1350" b="1" dirty="0">
+          <p:cNvPr id="11" name="Text 9"/>
+          <p:cNvSpPr/>
+          <p:nvPr/>
+        </p:nvSpPr>
+        <p:spPr>
+          <a:xfrm>
+            <a:off x="8439912" y="2240280"/>
+            <a:ext cx="3017520" cy="411480"/>
+          </a:xfrm>
+          <a:prstGeom prst="rect">
+            <a:avLst/>
+          </a:prstGeom>
+          <a:noFill/>
+          <a:ln/>
+        </p:spPr>
+        <p:txBody>
+          <a:bodyPr wrap="square" lIns="0" tIns="0" rIns="0" bIns="0" rtlCol="0" anchor="ctr"/>
+          <a:lstStyle/>
+          <a:p>
+            <a:pPr indent="0" marL="0">
+              <a:buNone/>
+            </a:pPr>
+            <a:r>
+              <a:rPr lang="en-US" sz="1650" b="1" dirty="0">
                 <a:solidFill>
                   <a:srgbClr val="3B6E43"/>
                 </a:solidFill>
@@ -19534,13 +19391,41 @@
                 <a:ea typeface="Calibri" pitchFamily="34" charset="-122"/>
                 <a:cs typeface="Calibri" pitchFamily="34" charset="-120"/>
               </a:rPr>
-              <a:t>This is real data, not an illustration.  </a:t>
-            </a:r>
-            <a:pPr indent="0" marL="0">
-              <a:buNone/>
-            </a:pPr>
-            <a:r>
-              <a:rPr lang="en-US" sz="1350" dirty="0">
+              <a:t>What was wrong</a:t>
+            </a:r>
+            <a:endParaRPr lang="en-US" sz="1650" dirty="0"/>
+          </a:p>
+        </p:txBody>
+      </p:sp>
+      <p:sp>
+        <p:nvSpPr>
+          <p:cNvPr id="12" name="Text 10"/>
+          <p:cNvSpPr/>
+          <p:nvPr/>
+        </p:nvSpPr>
+        <p:spPr>
+          <a:xfrm>
+            <a:off x="8439912" y="2697480"/>
+            <a:ext cx="3017520" cy="1874520"/>
+          </a:xfrm>
+          <a:prstGeom prst="rect">
+            <a:avLst/>
+          </a:prstGeom>
+          <a:noFill/>
+          <a:ln/>
+        </p:spPr>
+        <p:txBody>
+          <a:bodyPr wrap="square" lIns="0" tIns="0" rIns="0" bIns="0" rtlCol="0" anchor="ctr"/>
+          <a:lstStyle/>
+          <a:p>
+            <a:pPr indent="0" marL="0">
+              <a:lnSpc>
+                <a:spcPct val="108000"/>
+              </a:lnSpc>
+              <a:buNone/>
+            </a:pPr>
+            <a:r>
+              <a:rPr lang="en-US" sz="1550" dirty="0">
                 <a:solidFill>
                   <a:srgbClr val="14212E"/>
                 </a:solidFill>
@@ -19548,9 +19433,124 @@
                 <a:ea typeface="Calibri" pitchFamily="34" charset="-122"/>
                 <a:cs typeface="Calibri" pitchFamily="34" charset="-120"/>
               </a:rPr>
-              <a:t>Left is what we got for the first two weeks. Right is the same file after flipping one flag.</a:t>
-            </a:r>
-            <a:endParaRPr lang="en-US" sz="1350" dirty="0"/>
+              <a:t>They are stored least-significant first (little-endian). Read that way, the physiology appears exactly where the experimenters' own notes said it would.</a:t>
+            </a:r>
+            <a:endParaRPr lang="en-US" sz="1550" dirty="0"/>
+          </a:p>
+        </p:txBody>
+      </p:sp>
+      <p:sp>
+        <p:nvSpPr>
+          <p:cNvPr id="13" name="Shape 11"/>
+          <p:cNvSpPr/>
+          <p:nvPr/>
+        </p:nvSpPr>
+        <p:spPr>
+          <a:xfrm>
+            <a:off x="685800" y="4892040"/>
+            <a:ext cx="10881360" cy="1234440"/>
+          </a:xfrm>
+          <a:prstGeom prst="roundRect">
+            <a:avLst>
+              <a:gd name="adj" fmla="val 5926"/>
+            </a:avLst>
+          </a:prstGeom>
+          <a:solidFill>
+            <a:srgbClr val="0C1620"/>
+          </a:solidFill>
+          <a:ln w="12700">
+            <a:solidFill>
+              <a:srgbClr val="DDE4EA"/>
+            </a:solidFill>
+            <a:prstDash val="solid"/>
+          </a:ln>
+          <a:effectLst>
+            <a:outerShdw sx="100000" sy="100000" kx="0" ky="0" algn="bl" rotWithShape="0" blurRad="127000" dist="38100" dir="5400000">
+              <a:srgbClr val="0C1620">
+                <a:alpha val="11000"/>
+              </a:srgbClr>
+            </a:outerShdw>
+          </a:effectLst>
+        </p:spPr>
+      </p:sp>
+      <p:sp>
+        <p:nvSpPr>
+          <p:cNvPr id="14" name="Text 12"/>
+          <p:cNvSpPr/>
+          <p:nvPr/>
+        </p:nvSpPr>
+        <p:spPr>
+          <a:xfrm>
+            <a:off x="1051560" y="5074920"/>
+            <a:ext cx="7315200" cy="320040"/>
+          </a:xfrm>
+          <a:prstGeom prst="rect">
+            <a:avLst/>
+          </a:prstGeom>
+          <a:noFill/>
+          <a:ln/>
+        </p:spPr>
+        <p:txBody>
+          <a:bodyPr wrap="square" lIns="0" tIns="0" rIns="0" bIns="0" rtlCol="0" anchor="ctr"/>
+          <a:lstStyle/>
+          <a:p>
+            <a:pPr indent="0" marL="0">
+              <a:buNone/>
+            </a:pPr>
+            <a:r>
+              <a:rPr lang="en-US" sz="1600" b="1" dirty="0">
+                <a:solidFill>
+                  <a:srgbClr val="7FB8C9"/>
+                </a:solidFill>
+                <a:latin typeface="Calibri" pitchFamily="34" charset="0"/>
+                <a:ea typeface="Calibri" pitchFamily="34" charset="-122"/>
+                <a:cs typeface="Calibri" pitchFamily="34" charset="-120"/>
+              </a:rPr>
+              <a:t>How we knew we had it right</a:t>
+            </a:r>
+            <a:endParaRPr lang="en-US" sz="1600" dirty="0"/>
+          </a:p>
+        </p:txBody>
+      </p:sp>
+      <p:sp>
+        <p:nvSpPr>
+          <p:cNvPr id="15" name="Text 13"/>
+          <p:cNvSpPr/>
+          <p:nvPr/>
+        </p:nvSpPr>
+        <p:spPr>
+          <a:xfrm>
+            <a:off x="1051560" y="5413248"/>
+            <a:ext cx="10149840" cy="640080"/>
+          </a:xfrm>
+          <a:prstGeom prst="rect">
+            <a:avLst/>
+          </a:prstGeom>
+          <a:noFill/>
+          <a:ln/>
+        </p:spPr>
+        <p:txBody>
+          <a:bodyPr wrap="square" lIns="0" tIns="0" rIns="0" bIns="0" rtlCol="0" anchor="ctr"/>
+          <a:lstStyle/>
+          <a:p>
+            <a:pPr indent="0" marL="0">
+              <a:lnSpc>
+                <a:spcPct val="106000"/>
+              </a:lnSpc>
+              <a:buNone/>
+            </a:pPr>
+            <a:r>
+              <a:rPr lang="en-US" sz="1550" dirty="0">
+                <a:solidFill>
+                  <a:srgbClr val="D5DFE7"/>
+                </a:solidFill>
+                <a:latin typeface="Calibri" pitchFamily="34" charset="0"/>
+                <a:ea typeface="Calibri" pitchFamily="34" charset="-122"/>
+                <a:cs typeface="Calibri" pitchFamily="34" charset="-120"/>
+              </a:rPr>
+              <a:t>Not because it looked plausible — because the M-wave and H-reflex landed at exactly the latencies the experimenter had typed into the log in 2006: “MR interval 2-4; HR interval 6-9”. The data confirmed the notes and the notes confirmed the data.</a:t>
+            </a:r>
+            <a:endParaRPr lang="en-US" sz="1550" dirty="0"/>
           </a:p>
         </p:txBody>
       </p:sp>
@@ -19611,7 +19611,7 @@
               <a:buNone/>
             </a:pPr>
             <a:r>
-              <a:rPr lang="en-US" sz="1150" b="1" spc="320" kern="0" dirty="0">
+              <a:rPr lang="en-US" sz="1300" b="1" spc="320" kern="0" dirty="0">
                 <a:solidFill>
                   <a:srgbClr val="B4671A"/>
                 </a:solidFill>
@@ -19621,7 +19621,7 @@
               </a:rPr>
               <a:t>PART 2 · THE DATA</a:t>
             </a:r>
-            <a:endParaRPr lang="en-US" sz="1150" dirty="0"/>
+            <a:endParaRPr lang="en-US" sz="1300" dirty="0"/>
           </a:p>
         </p:txBody>
       </p:sp>
@@ -19762,7 +19762,7 @@
               <a:buNone/>
             </a:pPr>
             <a:r>
-              <a:rPr lang="en-US" sz="1250" dirty="0">
+              <a:rPr lang="en-US" sz="1400" dirty="0">
                 <a:solidFill>
                   <a:srgbClr val="5A6B7B"/>
                 </a:solidFill>
@@ -19772,7 +19772,7 @@
               </a:rPr>
               <a:t>trials decoded</a:t>
             </a:r>
-            <a:endParaRPr lang="en-US" sz="1250" dirty="0"/>
+            <a:endParaRPr lang="en-US" sz="1400" dirty="0"/>
           </a:p>
         </p:txBody>
       </p:sp>
@@ -19874,7 +19874,7 @@
               <a:buNone/>
             </a:pPr>
             <a:r>
-              <a:rPr lang="en-US" sz="1250" dirty="0">
+              <a:rPr lang="en-US" sz="1400" dirty="0">
                 <a:solidFill>
                   <a:srgbClr val="5A6B7B"/>
                 </a:solidFill>
@@ -19884,7 +19884,7 @@
               </a:rPr>
               <a:t>animals</a:t>
             </a:r>
-            <a:endParaRPr lang="en-US" sz="1250" dirty="0"/>
+            <a:endParaRPr lang="en-US" sz="1400" dirty="0"/>
           </a:p>
         </p:txBody>
       </p:sp>
@@ -19986,7 +19986,7 @@
               <a:buNone/>
             </a:pPr>
             <a:r>
-              <a:rPr lang="en-US" sz="1250" dirty="0">
+              <a:rPr lang="en-US" sz="1400" dirty="0">
                 <a:solidFill>
                   <a:srgbClr val="5A6B7B"/>
                 </a:solidFill>
@@ -19996,7 +19996,7 @@
               </a:rPr>
               <a:t>down / up</a:t>
             </a:r>
-            <a:endParaRPr lang="en-US" sz="1250" dirty="0"/>
+            <a:endParaRPr lang="en-US" sz="1400" dirty="0"/>
           </a:p>
         </p:txBody>
       </p:sp>
@@ -20098,7 +20098,7 @@
               <a:buNone/>
             </a:pPr>
             <a:r>
-              <a:rPr lang="en-US" sz="1250" dirty="0">
+              <a:rPr lang="en-US" sz="1400" dirty="0">
                 <a:solidFill>
                   <a:srgbClr val="5A6B7B"/>
                 </a:solidFill>
@@ -20108,7 +20108,7 @@
               </a:rPr>
               <a:t>days each</a:t>
             </a:r>
-            <a:endParaRPr lang="en-US" sz="1250" dirty="0"/>
+            <a:endParaRPr lang="en-US" sz="1400" dirty="0"/>
           </a:p>
         </p:txBody>
       </p:sp>
@@ -20171,7 +20171,7 @@
               <a:buNone/>
             </a:pPr>
             <a:r>
-              <a:rPr lang="en-US" sz="1450" b="1" dirty="0">
+              <a:rPr lang="en-US" sz="1650" b="1" dirty="0">
                 <a:solidFill>
                   <a:srgbClr val="15718F"/>
                 </a:solidFill>
@@ -20181,7 +20181,7 @@
               </a:rPr>
               <a:t>Choosing which animals to download, without downloading them</a:t>
             </a:r>
-            <a:endParaRPr lang="en-US" sz="1450" dirty="0"/>
+            <a:endParaRPr lang="en-US" sz="1650" dirty="0"/>
           </a:p>
         </p:txBody>
       </p:sp>
@@ -20213,7 +20213,7 @@
               <a:buNone/>
             </a:pPr>
             <a:r>
-              <a:rPr lang="en-US" sz="1350" dirty="0">
+              <a:rPr lang="en-US" sz="1550" dirty="0">
                 <a:solidFill>
                   <a:srgbClr val="14212E"/>
                 </a:solidFill>
@@ -20221,9 +20221,9 @@
                 <a:ea typeface="Calibri" pitchFamily="34" charset="-122"/>
                 <a:cs typeface="Calibri" pitchFamily="34" charset="-120"/>
               </a:rPr>
-              <a:t>The log files are a few hundred kilobytes; the signal data is four gigabytes an animal. The experimenter raises the reward threshold whenever the rat starts beating it, so the threshold history is a written record of how the animal was doing. We read only the logs, then downloaded signal data for the animals that had actually learned.</a:t>
-            </a:r>
-            <a:endParaRPr lang="en-US" sz="1350" dirty="0"/>
+              <a:t>The log files are a few hundred kilobytes; the signal data is four gigabytes an animal. The experimenter raises the reward threshold whenever the rat exceeds it, so the threshold history records how the animal was doing. We read only the logs, then downloaded signal data for the animals that responded.</a:t>
+            </a:r>
+            <a:endParaRPr lang="en-US" sz="1550" dirty="0"/>
           </a:p>
         </p:txBody>
       </p:sp>
@@ -20286,7 +20286,7 @@
               <a:buNone/>
             </a:pPr>
             <a:r>
-              <a:rPr lang="en-US" sz="1350" b="1" dirty="0">
+              <a:rPr lang="en-US" sz="1550" b="1" dirty="0">
                 <a:solidFill>
                   <a:srgbClr val="B4671A"/>
                 </a:solidFill>
@@ -20300,7 +20300,7 @@
               <a:buNone/>
             </a:pPr>
             <a:r>
-              <a:rPr lang="en-US" sz="1350" dirty="0">
+              <a:rPr lang="en-US" sz="1550" dirty="0">
                 <a:solidFill>
                   <a:srgbClr val="14212E"/>
                 </a:solidFill>
@@ -20308,9 +20308,9 @@
                 <a:ea typeface="Calibri" pitchFamily="34" charset="-122"/>
                 <a:cs typeface="Calibri" pitchFamily="34" charset="-120"/>
               </a:rPr>
-              <a:t>A12's pre-stimulus cortical signal is 2.8 µV against 106–128 µV in the others — that electrode was dead.</a:t>
-            </a:r>
-            <a:endParaRPr lang="en-US" sz="1350" dirty="0"/>
+              <a:t>A12's pre-stimulus cortical signal is 2.8 µV against 106–128 µV in the others — that electrode had failed.</a:t>
+            </a:r>
+            <a:endParaRPr lang="en-US" sz="1550" dirty="0"/>
           </a:p>
         </p:txBody>
       </p:sp>
@@ -20371,7 +20371,7 @@
               <a:buNone/>
             </a:pPr>
             <a:r>
-              <a:rPr lang="en-US" sz="1150" b="1" spc="320" kern="0" dirty="0">
+              <a:rPr lang="en-US" sz="1300" b="1" spc="320" kern="0" dirty="0">
                 <a:solidFill>
                   <a:srgbClr val="B4671A"/>
                 </a:solidFill>
@@ -20381,7 +20381,7 @@
               </a:rPr>
               <a:t>PART 2 · THE DATA</a:t>
             </a:r>
-            <a:endParaRPr lang="en-US" sz="1150" dirty="0"/>
+            <a:endParaRPr lang="en-US" sz="1300" dirty="0"/>
           </a:p>
         </p:txBody>
       </p:sp>
@@ -20434,13 +20434,14 @@
         </p:nvPicPr>
         <p:blipFill>
           <a:blip r:embed="rId1"/>
-          <a:srcRect l="0" r="0" t="0" b="0"/>
-          <a:stretch/>
+          <a:stretch>
+            <a:fillRect/>
+          </a:stretch>
         </p:blipFill>
         <p:spPr>
           <a:xfrm>
             <a:off x="685800" y="1828800"/>
-            <a:ext cx="10881360" cy="3627120"/>
+            <a:ext cx="10881360" cy="3385583"/>
           </a:xfrm>
           <a:prstGeom prst="rect">
             <a:avLst/>

--- a/slides/HROC_Team_Presentation.pptx
+++ b/slides/HROC_Team_Presentation.pptx
@@ -535,7 +535,7 @@
           <a:p>
             <a:r>
               <a:rPr lang="en-US" dirty="0"/>
-              <a:t>Thanks for having us. We're the machine-learning side of this project. Over the summer we took the archived paired EMG and ECoG recordings and asked one question: on any given trial, does the brain signal tell us anything about how big the reflex is going to be? I'll walk through what the data is, how we built the analysis, what we found — including one thing that didn't work — and where we think it goes.</a:t>
+              <a:t>Thanks for having us. Tarun and I are the machine-learning side of this project. We worked with recordings from rats trained to change a spinal reflex: EMG, the electrical signal from the leg muscle, and ECoG, the signal from an electrode on the surface of the brain over sensorimotor cortex, both recorded on every trial. There are 2.7 million trials. Our one question: on any single trial, does the brain signal tell you anything about how big the reflex is going to be? I'll go through the data, how we built the analysis, what we found, including one result that did not hold up, and where it goes next.</a:t>
             </a:r>
             <a:endParaRPr lang="en-US" dirty="0"/>
           </a:p>
@@ -623,7 +623,7 @@
           <a:p>
             <a:r>
               <a:rPr lang="en-US" dirty="0"/>
-              <a:t>This is the whole data flow. Recover the old tables into a local database. Decode each trial into two channels of microvolts. Store as Zarr, which is a chunked array format that lets us read two point seven million trials without loading them into memory. Measure the physiology. Learn the representation. Then test it against controls. Four gigabytes in per animal, about three hundred megabytes out, and once it's set up it's two commands per animal.</a:t>
+              <a:t>This is the whole process, left to right. First we load the 2006 files into a database on a laptop. Then we read each trial into two traces in microvolts, one for muscle and one for brain. Then we save each animal as one file in a format called Zarr. All that means is the data is stored in small pieces, so we can pull out any part of 2.7 million trials without loading all of it into memory. Then we measure the M-wave, the H-reflex and the background muscle activity. Then the model learns its summary of the brain signal, and finally everything is tested against the controls. The small grey labels are just the software used at each step; you do not need them to follow the talk. It is about four gigabytes in per animal and three hundred megabytes out, and once set up it is two commands per animal.</a:t>
             </a:r>
             <a:endParaRPr lang="en-US" dirty="0"/>
           </a:p>
@@ -799,7 +799,7 @@
           <a:p>
             <a:r>
               <a:rPr lang="en-US" dirty="0"/>
-              <a:t>Training details. Six hundred thousand trials pooled across five animals, twelve passes, about four minutes on a laptop GPU — these are small models. Reconstruction error halves and flattens. The trap we had to avoid: if you pool animals naively, the model learns to tell the animals apart, because they have different electrodes and different amplitudes. That's a recording artefact, not biology. So we standardise each animal separately before pooling. And the reason we train one model across all animals rather than one each: separate models would describe each brain in its own private vocabulary and you could never compare them. One shared model means a given pattern means the same thing in animal three as in animal eleven — which is what makes the group comparisons later legitimate.</a:t>
+              <a:t>Some numbers on training. The model saw six hundred thousand brain-signal trials from five animals and went through them twelve times. That took about four minutes on a laptop, because this is a small model. The reconstruction error, meaning how far the rebuilt trace is from the real one, roughly halved and then levelled off, which is what you want to see. The trap is this: if you mix animals together without care, the easiest thing for the model to learn is which animal a trace came from, because each electrode has its own size and character. That is a property of the recording, not the biology. So we scale each animal's data to the same range before mixing. And we use one model for all animals rather than one each, so a given pattern means the same thing in every animal. That is what makes it fair to compare animals later.</a:t>
             </a:r>
             <a:endParaRPr lang="en-US" dirty="0"/>
           </a:p>
@@ -887,7 +887,7 @@
           <a:p>
             <a:r>
               <a:rPr lang="en-US" dirty="0"/>
-              <a:t>The stack, in case it's useful. MariaDB for the archives, Zarr and NumPy for the arrays, PyTorch for the model running on Apple Silicon, scikit-learn and SciPy for the statistics, and matplotlib for figures. All Python, all open source, nothing exotic. Day to day the loop was: read the animal's log, load it, convert, look at the averaged trace to check the decode, run the analyses, commit the figures. Every figure in this talk regenerates from a single command — none of them were hand-edited, which matters when a number changes and six figures have to change with it.</a:t>
+              <a:t>Very briefly, the software. Everything is free, open-source Python, and it all runs on a laptop. The names on the slide are for anyone who wants to repeat the work; you do not need them to follow the results. The daily routine was: read the animal's log, load its data, convert it, look at the average trace to check it decoded correctly, run the analyses, and save the figures. Every figure in this talk is produced by the code with one command. None were edited by hand, so when a number changed, every figure that used it changed too.</a:t>
             </a:r>
             <a:endParaRPr lang="en-US" dirty="0"/>
           </a:p>
@@ -1151,7 +1151,7 @@
           <a:p>
             <a:r>
               <a:rPr lang="en-US" dirty="0"/>
-              <a:t>We lead with behaviour because it's the check that has to pass before anything else counts. Each animal is aligned to its own training start day. Up-trained animals rise, down-trained fall. Three of five clear the twenty percent criterion in the trained direction, and the two that don't come back later as a negative control. And again — this is after removing stimulus and background, so it isn't the stimulus creeping up.</a:t>
+              <a:t>First, the check that has to pass before anything else counts: did the animals learn? How to read the left graph: the horizontal axis is days, lined up so that zero is the day each animal's training began. Left of zero is baseline, right of zero is training. The vertical axis is the size of the H-reflex as a percent change from that animal's own baseline, after correcting for stimulus strength and background muscle activity. Thin lines are single animals, thick lines are group averages, red for up-trained and blue for down-trained. The dashed lines mark plus and minus twenty percent. Animals 9 and 11 fall and animal 3 rises, so three of five meet the twenty percent criterion in the direction they were trained. Animals 10 and 4 moved the other way; they serve as a comparison group later. One caution: this is a percent of baseline, so an animal with a small baseline looks bigger than it is. Animal 3's baseline is about nineteen microvolts, against sixty to a hundred and sixty in the others. The right-hand graph is the brain measure, which we come to next.</a:t>
             </a:r>
             <a:endParaRPr lang="en-US" dirty="0"/>
           </a:p>
@@ -1239,7 +1239,7 @@
           <a:p>
             <a:r>
               <a:rPr lang="en-US" dirty="0"/>
-              <a:t>Now the hard part, and I want to be direct about it. Two things change slowly over the same weeks: the animal's learning, and the chronically implanted electrode. On the left, both curves go up. On the right is what the recording actually gives you — one curve, with no way to split it. Inside a single animal both are smooth functions of time, so no amount of analysis separates them. That's a limitation of the design rather than the data, and it shaped everything we did next.</a:t>
+              <a:t>Now the central difficulty. Two things change slowly over the same weeks: what the animal has learned, and the implanted brain electrode itself, as tissue settles around it and the signal slowly shifts. These two graphs are a sketch of the idea, not data. On the left, both rise together over the weeks. On the right is what we actually record: one curve that mixes the two, with no way to pull them apart. Within one animal, learning and electrode change are both slow and steady, so no analysis can separate them. That is a limit of how the study was designed, not of the data, and it shaped everything we did next.</a:t>
             </a:r>
             <a:endParaRPr lang="en-US" dirty="0"/>
           </a:p>
@@ -1327,7 +1327,7 @@
           <a:p>
             <a:r>
               <a:rPr lang="en-US" dirty="0"/>
-              <a:t>Our first approach was the obvious one: measure how far the average brain state moves across training. It does move, and it looked convincing. But three tests say that movement is the recording rather than the animal. If you take baseline-only data and pretend half of it was training, it moves just as much, in five of six animals. If you shuffle which trial belongs to which day, nothing moves — so the measure itself is fine. And electrode drift doesn't care which direction you trained the animal, and there's no difference between the up and down groups. Those controls changed our conclusion. I'd rather show you this than not.</a:t>
+              <a:t>Our first approach was the obvious one. Take the model's summary of the brain signal, average it for each day, and measure how far that average moves from baseline as training goes on. It does move, and at first it looked convincing. But three checks say the movement comes from the recording, not the animal. First, take only baseline days, before any training, and pretend the second half was training. Nothing happened in those days, yet the average moves just as much, in five of six animals. Second, shuffle which trial belongs to which day: then nothing moves, so the measure is not inventing movement. Third, electrode change does not depend on which way an animal was trained, but learning does, and the up-trained and down-trained groups do not differ. Those checks changed our conclusion, and we would rather show you that than leave it out.</a:t>
             </a:r>
             <a:endParaRPr lang="en-US" dirty="0"/>
           </a:p>
@@ -1503,7 +1503,7 @@
           <a:p>
             <a:r>
               <a:rPr lang="en-US" dirty="0"/>
-              <a:t>Five parts. What the question is and what was already known. What the data actually is. How we built the analysis, including the model and the workflow, since I gather that part is of interest. What we found, which includes one result that didn't survive. And where we think it goes from here.</a:t>
+              <a:t>Five parts: the question, the data, how we built it, what we found, and where it goes. About forty minutes. The results start around slide sixteen.</a:t>
             </a:r>
             <a:endParaRPr lang="en-US" dirty="0"/>
           </a:p>
@@ -1679,7 +1679,7 @@
           <a:p>
             <a:r>
               <a:rPr lang="en-US" dirty="0"/>
-              <a:t>And here's the finding. In ninety-nine of a hundred and one windows the real data beat its own shuffled version, and it holds in all five animals. On the statistics I want to be careful. Counting each window as independent would badly overstate it, because windows within an animal share an electrode and an animal. Counting the animal as the unit of analysis gives t of three point eight one on four degrees of freedom, p equals nought point nought one nine. So the effect is small in size but almost never absent — and I'd argue reliability is the more meaningful property here.</a:t>
+              <a:t>This is the main finding. The graph first: the horizontal axis is days relative to the start of training. The vertical axis is the prediction score, R squared: the fraction of the trial-to-trial variation in reflex size that the brain signal predicts, always measured on trials the model did not see. Zero means no prediction. Each thin line is one animal; the thick lines are the up and down group averages. The number to take away is on the right. In 99 of 101 five-day windows, the real data beat its own shuffled version. If there were no real signal, real versus shuffled would be a coin flip in each window, so you would expect about half, not 99 of 101. It holds in all five animals. On the statistics: windows from the same animal share an electrode, so they are not independent, and we do not count them as if they were. The test we report counts each animal once: t equals 3.81 with four degrees of freedom, p equals 0.019. So the effect is small, but it almost never disappears.</a:t>
             </a:r>
             <a:endParaRPr lang="en-US" dirty="0"/>
           </a:p>
@@ -1767,7 +1767,7 @@
           <a:p>
             <a:r>
               <a:rPr lang="en-US" dirty="0"/>
-              <a:t>Here is how the variance in reflex size divides up. The stimulus dominates at forty-seven percent. Background is one. About half is still unexplained, which is normal for single-trial physiology. The brain on its own looks like twenty-one percent, but almost all of that overlaps with the stimulus, because the stimulus drives both the cortical response and the reflex. Only the part that survives once the other two are in the model — about two percent — counts as a genuine cortical contribution. That's a small number and I don't want to oversell it.</a:t>
+              <a:t>How much does the brain actually explain? The bar is all of the trial-to-trial variation in reflex size, a hundred percent from left to right. Stimulus strength, measured by the M-wave, accounts for forty-seven percent. Background muscle activity before the stimulus adds one percent. About half is unexplained, which is normal for single trials in an awake animal. The thin blue sliver is the brain's own contribution: two percent. The brain signal on its own seems to explain twenty-one percent, but almost all of that overlaps with the stimulus, because the stimulus drives both the brain response and the reflex. Only what is left after stimulus and background are accounted for counts as the brain's own contribution. Two percent is small, and we do not want to oversell it.</a:t>
             </a:r>
             <a:endParaRPr lang="en-US" dirty="0"/>
           </a:p>
@@ -1855,7 +1855,7 @@
           <a:p>
             <a:r>
               <a:rPr lang="en-US" dirty="0"/>
-              <a:t>This is everything on one slide. On the left, behaviour: three animals passed the twenty percent line in the trained direction; the other two moved against their training. In the middle, the prediction score against its shuffled control — real in blue, shuffled in grey — and the real bar is higher in every animal. On the right, how many five-day windows beat their own shuffle: nine of nine, fifteen of seventeen, and three animals at a hundred percent. Ninety-nine of a hundred and one overall.</a:t>
+              <a:t>All five animals and all three measures side by side. Left panel, behaviour: each bar is one animal, showing how much its reflex changed in the direction it was trained. Positive means it moved the way it was trained, up for an up-trained animal and down for a down-trained one. The dashed line is the twenty percent criterion. Animals 9, 11 and 3 pass it; animal 3's bar is cut off at the edge and labelled, because its small baseline makes its percentage very large. Animals 10 and 4 are negative: they moved against their training. Middle panel: each animal's prediction score, blue for the real data and grey for the same data shuffled. Blue is higher in every animal, and the grey bars sit at or just below zero, which is what a fair shuffle should give. Right panel: how many five-day windows beat their shuffle. Nine of nine, fifteen of seventeen, and the other three animals at every window: 99 of 101 in total.</a:t>
             </a:r>
             <a:endParaRPr lang="en-US" dirty="0"/>
           </a:p>
@@ -2031,7 +2031,7 @@
           <a:p>
             <a:r>
               <a:rPr lang="en-US" dirty="0"/>
-              <a:t>The obvious objection is that both channels are recorded simultaneously, so maybe the cortical electrode is just picking up muscle. The test is to correlate cortical power against muscle power and see how much they move together. Muscle artefact lives at high frequency, so that's where contamination would show. Above a hundred hertz the correlation is plus nought point nought six — essentially zero. The low bands are slightly negative. And the cortical signal marginally leads the muscle, which is the acceptable direction. So we don't think this is contamination, though I'd welcome a better test.</a:t>
+              <a:t>The obvious objection: both electrodes record at the same moment, so maybe the brain electrode is simply picking up the muscle. How to read this: the left graph compares each animal's prediction score under the earlier and the stricter correction, next to the shuffle. The right graph shows, for each frequency band from low on the left to high on the right, how closely brain-signal power and muscle power rise and fall together; near zero means they are independent. Muscle interference shows up at high frequencies, so that is where contamination would appear. Above a hundred hertz the correlation is plus 0.06, essentially zero. The low bands are slightly negative. And the brain signal slightly leads the muscle rather than following it, which is the direction you would expect if it is not contamination.</a:t>
             </a:r>
             <a:endParaRPr lang="en-US" dirty="0"/>
           </a:p>
@@ -2119,7 +2119,7 @@
           <a:p>
             <a:r>
               <a:rPr lang="en-US" dirty="0"/>
-              <a:t>This is the thread I think is most promising. Animals differ in how much they learned, and two failed outright — those become a built-in negative control. The correlation between how much an animal learned and how much its cortical coupling changed is plus nought point six four, and the two that failed show no increase. With five animals that's a direction rather than a result. Four more down-conditioned animals are next through the pipeline, and that is what would help settle it.</a:t>
+              <a:t>This is the thread we think is most promising, and it is the graph that needs the most explaining, so let me go slowly. Each dot is one animal, red for up-trained and blue for down-trained. The horizontal axis is how much the animal learned: the percent change in its reflex in the direction it was trained. The dotted vertical line is twenty percent, so dots to the right of it met the criterion. In the left graph, the vertical axis is how well the brain signal predicts the reflex during training. In the right graph, the vertical axis is the change in that prediction from baseline to training, training minus baseline, so above zero means the brain became more predictive once training started. The right graph is the one that matters. The line slopes upward, with a correlation of plus 0.64: animals that learned more tended to gain more coupling. The two that did not meet criterion, 10 and 4, show no increase; 10 went down and 4 stayed flat. The exception is animal 9, which met criterion but did not gain. And animal 3 sits far to the right partly because of its small baseline. With five animals this points in a direction but does not settle it; that is what the remaining animals are for.</a:t>
             </a:r>
             <a:endParaRPr lang="en-US" dirty="0"/>
           </a:p>
@@ -2207,7 +2207,7 @@
           <a:p>
             <a:r>
               <a:rPr lang="en-US" dirty="0"/>
-              <a:t>One new thread, which came out of our last meeting. The reward threshold is adjusted by hand, day by day — raised when the rat exceeds it, lowered when it's struggling. That's effectively a staircase procedure, and it's a record of how hard the task was for that animal, written down independently of anything we measure from the electrodes. Right now our scaling result correlates two things measured from the same electrodes, which share noise. If cortical coupling instead tracks a behavioural record kept by hand at the time, that's a much harder result to dismiss. We'd like to build that next.</a:t>
+              <a:t>A new thread. First, what the reward criterion is, because in the lab's logs it is written as RW. It is the value the reflex has to pass to earn a food pellet: above it for an up-trained animal, below it for a down-trained one. The experimenter resets it every day so the rat is rewarded on roughly thirty to forty percent of trials, the ones furthest in the trained direction. So the reward rate stays about the same while the requirement moves as the animal changes. In effect it is a staircase. That makes its history a record of how demanding the task was for each animal: effort and engagement, not just success, written down by a person at the time, independently of anything we measure from the electrodes. At the moment our scaling result compares two things measured from the same electrodes. If brain coupling also tracks a record kept by hand, that is a much harder result to dismiss. We would like to build this next.</a:t>
             </a:r>
             <a:endParaRPr lang="en-US" dirty="0"/>
           </a:p>
@@ -3263,7 +3263,7 @@
           <a:p>
             <a:r>
               <a:rPr lang="en-US" dirty="0"/>
-              <a:t>First problem, and it took a while. We were given the tables and a decoder script that said each sample's two bytes are stored most-significant first — big-endian. Decoded that way, every trial is noise. The files are actually stored least-significant first — little-endian. The reason we trusted that wasn't that the output looked plausible; it's that the M-wave and H-reflex landed at exactly the latencies the experimenter had typed into the log in 2006 — MR interval two to four, HR interval six to nine. The data confirmed the notes and the notes confirmed the data.</a:t>
+              <a:t>The first problem took a couple of weeks. The recordings were saved in 2006 in an old database format, with a script that was supposed to read them. Every number in the file is stored as two bytes, and the script had the order of those two bytes backwards. Read that way, every trial came out as noise. Read the other way round, the muscle response appears. The reason we trust it is not that it looked right. The M-wave and the H-reflex appeared at exactly the times the experimenter had typed into the log in 2006: two to four milliseconds and six to nine milliseconds. The data matched the notes, and the notes matched the data.</a:t>
             </a:r>
             <a:endParaRPr lang="en-US" dirty="0"/>
           </a:p>
@@ -3439,7 +3439,7 @@
           <a:p>
             <a:r>
               <a:rPr lang="en-US" dirty="0"/>
-              <a:t>Here's the roster. Six animals, three trained to increase the reflex and three to decrease it, with trial counts from two hundred eighty thousand up to six hundred thirty thousand. Three met the twenty percent criterion. Two changed less than that — and those two turn out to be useful, because they act as a negative control later. One had a failed electrode and is excluded from anything cortical.</a:t>
+              <a:t>This is who is in the study. Each card is one animal. The coloured bar at the top says which way it was trained: blue down, orange up. Under the name is how many trials it has, from about two hundred eighty thousand to six hundred thirty thousand. The dot at the bottom says how it did. Three met the lab's twenty percent criterion: 9, 11 and 3. Two did not, 10 and 4. Their reflexes actually moved against their training, and they come back later as a comparison group. Animal 12's brain electrode had failed, so it is left out of anything involving the brain signal.</a:t>
             </a:r>
             <a:endParaRPr lang="en-US" dirty="0"/>
           </a:p>
@@ -11497,7 +11497,7 @@
                 <a:ea typeface="Calibri" pitchFamily="34" charset="-122"/>
                 <a:cs typeface="Calibri" pitchFamily="34" charset="-120"/>
               </a:rPr>
-              <a:t>The experimenter raises it when the rat exceeds it and lowers it when the rat is struggling. It is adjusted by hand, day by day, across the whole experiment.</a:t>
+              <a:t>The experimenter raises it when the rat exceeds it and lowers it when the rat falls short of it. It is adjusted by hand, day by day, across the whole experiment.</a:t>
             </a:r>
             <a:endParaRPr lang="en-US" sz="1550" dirty="0"/>
           </a:p>
